--- a/reviews/2026-10-25-inkofood/summary/Inkofood_tri_agent_synthesis_2026.pptx
+++ b/reviews/2026-10-25-inkofood/summary/Inkofood_tri_agent_synthesis_2026.pptx
@@ -5525,7 +5525,7 @@
                           </a:solidFill>
                           <a:latin typeface="Inter"/>
                         </a:rPr>
-                        <a:t>Города</a:t>
+                        <a:t>Города выборки</a:t>
                       </a:r>
                     </a:p>
                   </a:txBody>
@@ -5567,11 +5567,11 @@
                       <a:r>
                         <a:rPr sz="950" b="0">
                           <a:solidFill>
-                            <a:srgbClr val="C0332B"/>
-                          </a:solidFill>
-                          <a:latin typeface="Inter"/>
-                        </a:rPr>
-                        <a:t>Москва 300, СПб 150, Екб 150</a:t>
+                            <a:srgbClr val="1E8A5F"/>
+                          </a:solidFill>
+                          <a:latin typeface="Inter"/>
+                        </a:rPr>
+                        <a:t>Москва 300, СПб 150, Екб 150; Минск 150, Брест 75, Гомель 75</a:t>
                       </a:r>
                     </a:p>
                   </a:txBody>
@@ -5594,7 +5594,7 @@
                           </a:solidFill>
                           <a:latin typeface="Inter"/>
                         </a:rPr>
-                        <a:t>только «РФ 600 / РБ 300» · слайд 2</a:t>
+                        <a:t>то же на слайде 2 · совпадает</a:t>
                       </a:r>
                     </a:p>
                   </a:txBody>
@@ -5673,7 +5673,7 @@
                 </a:solidFill>
                 <a:latin typeface="Inter"/>
               </a:rPr>
-              <a:t>Клод читает последний столбец как 55+ (10,2%) и выносит это в ограничение L-01: 10% в выборке против 36% в панели РОМИР. Тезис верный, формулировка аккуратная.</a:t>
+              <a:t>Клод читает последний столбец как 55+ (10,2%) и выносит это в ограничение L-01: 10% в выборке против 36% на слайде РОМИР. Тезис верный, но ярлык «население РФ» колода не подтверждает: источник слайда — Потребительская панель, база не указана.</a:t>
             </a:r>
           </a:p>
         </p:txBody>
@@ -5742,7 +5742,7 @@
                 </a:solidFill>
                 <a:latin typeface="Inter"/>
               </a:rPr>
-              <a:t>Гемини объявляет 55+ отсутствующими, чтобы построить противоречие. Вывод о недоборе верен, но основание ложное — и вся арифметика демографии (пол, дети, доход) не из этой колоды.</a:t>
+              <a:t>Гемини объявляет 55+ отсутствующими, чтобы построить противоречие. Вывод о недоборе верен, но основание ложное. Города выборки, наоборот, совпадают с колодой: ошибка только в поле, детях, доходе и возрастах.</a:t>
             </a:r>
           </a:p>
         </p:txBody>
@@ -8341,7 +8341,7 @@
                 </a:solidFill>
                 <a:latin typeface="Inter"/>
               </a:rPr>
-              <a:t>24,5% («Белорусская традиция») и 32,9% (Natura). №2 — доступность и заметность в магазине: 17,5% и 15,8%. Цена — 4,9% и 4,8% (слайд 51).</a:t>
+              <a:t>24,5% («Белорусская традиция») и 32,9% (Natura). №2 — доступность и заметность: 17,5% и 15,8%. Цена — 4,9% и 4,8% (слайд 51, домашний регион — РБ).</a:t>
             </a:r>
           </a:p>
           <a:p>
@@ -12320,7 +12320,7 @@
                 </a:solidFill>
                 <a:latin typeface="Inter"/>
               </a:rPr>
-              <a:t>Счёт по этой таблице: Клод 8 из 8 (где участвовал), Грок 2 из 3, Гемини 1 из 9. Полный счёт по всем 102 проверкам — 17 из 17, 5 из 7 и 44 из 78 (приложение A пояснения).</a:t>
+              <a:t>Счёт по этой таблице: Клод 8 из 8 (где участвовал), Грок 2 из 3, Гемини 1 из 9. Полный счёт по всем 103 проверкам — 18 из 18, 5 из 7 и 46 из 78 (приложение A пояснения).</a:t>
             </a:r>
           </a:p>
         </p:txBody>
@@ -15873,7 +15873,7 @@
                           </a:solidFill>
                           <a:latin typeface="Inter"/>
                         </a:rPr>
-                        <a:t>Формула для упаковки: «18 г мясного белка из 100% говядины и индейки — 0% сои»</a:t>
+                        <a:t>Шаблон формулы на пачке: «X г белка на 100 г • мяса Y% • без соевого белка»</a:t>
                       </a:r>
                     </a:p>
                   </a:txBody>
@@ -15892,11 +15892,11 @@
                       <a:r>
                         <a:rPr sz="880" b="0">
                           <a:solidFill>
-                            <a:srgbClr val="1E8A5F"/>
-                          </a:solidFill>
-                          <a:latin typeface="Inter"/>
-                        </a:rPr>
-                        <a:t>готово</a:t>
+                            <a:srgbClr val="D1820E"/>
+                          </a:solidFill>
+                          <a:latin typeface="Inter"/>
+                        </a:rPr>
+                        <a:t>шаблон</a:t>
                       </a:r>
                     </a:p>
                   </a:txBody>
@@ -15919,7 +15919,7 @@
                           </a:solidFill>
                           <a:latin typeface="Inter"/>
                         </a:rPr>
-                        <a:t>операционализирует 21% скепсиса и 8% страха сои, слайд 31</a:t>
+                        <a:t>значения дают рецептура и лабораторный протокол; идея опирается на 21% скепсиса и 8% страха сои, page=31</a:t>
                       </a:r>
                     </a:p>
                   </a:txBody>
@@ -15968,7 +15968,7 @@
                 </a:solidFill>
                 <a:latin typeface="Inter"/>
               </a:rPr>
-              <a:t>Итого: пять находок подтверждаются и ценны (декомпозиция рынка, сценарии нарезки, механика премиума, сегменты 55–75, формула белка), одна частично, две нет. Формула белка — единственная вещь во всех трёх работах, готовая к переносу в макет.</a:t>
+              <a:t>Итого: четыре находки подтверждаются и ценны (декомпозиция рынка, сценарии нарезки, механика премиума, сегменты 55–75), одна частично, две нет. Формула белка — шаблон с заполнителями, а не значение из колоды: числа дают рецептура и лабораторный протокол.</a:t>
             </a:r>
           </a:p>
         </p:txBody>
@@ -18218,7 +18218,7 @@
         </p:nvGraphicFramePr>
         <p:xfrm>
           <a:off x="658368" y="1828800"/>
-          <a:ext cx="10881360" cy="4151376"/>
+          <a:ext cx="10881360" cy="4133088"/>
         </p:xfrm>
         <a:graphic>
           <a:graphicData uri="http://schemas.openxmlformats.org/drawingml/2006/table">
@@ -18302,7 +18302,7 @@
                   </a:tcPr>
                 </a:tc>
               </a:tr>
-              <a:tr h="384048">
+              <a:tr h="347472">
                 <a:tc>
                   <a:txBody>
                     <a:bodyPr wrap="square"/>
@@ -18373,7 +18373,7 @@
                   </a:tcPr>
                 </a:tc>
               </a:tr>
-              <a:tr h="384048">
+              <a:tr h="347472">
                 <a:tc>
                   <a:txBody>
                     <a:bodyPr wrap="square"/>
@@ -18444,7 +18444,7 @@
                   </a:tcPr>
                 </a:tc>
               </a:tr>
-              <a:tr h="384048">
+              <a:tr h="347472">
                 <a:tc>
                   <a:txBody>
                     <a:bodyPr wrap="square"/>
@@ -18515,7 +18515,7 @@
                   </a:tcPr>
                 </a:tc>
               </a:tr>
-              <a:tr h="384048">
+              <a:tr h="347472">
                 <a:tc>
                   <a:txBody>
                     <a:bodyPr wrap="square"/>
@@ -18586,7 +18586,7 @@
                   </a:tcPr>
                 </a:tc>
               </a:tr>
-              <a:tr h="384048">
+              <a:tr h="347472">
                 <a:tc>
                   <a:txBody>
                     <a:bodyPr wrap="square"/>
@@ -18657,7 +18657,7 @@
                   </a:tcPr>
                 </a:tc>
               </a:tr>
-              <a:tr h="384048">
+              <a:tr h="347472">
                 <a:tc>
                   <a:txBody>
                     <a:bodyPr wrap="square"/>
@@ -18728,7 +18728,7 @@
                   </a:tcPr>
                 </a:tc>
               </a:tr>
-              <a:tr h="384048">
+              <a:tr h="347472">
                 <a:tc>
                   <a:txBody>
                     <a:bodyPr wrap="square"/>
@@ -18799,7 +18799,7 @@
                   </a:tcPr>
                 </a:tc>
               </a:tr>
-              <a:tr h="384048">
+              <a:tr h="347472">
                 <a:tc>
                   <a:txBody>
                     <a:bodyPr wrap="square"/>
@@ -18870,7 +18870,7 @@
                   </a:tcPr>
                 </a:tc>
               </a:tr>
-              <a:tr h="384048">
+              <a:tr h="347472">
                 <a:tc>
                   <a:txBody>
                     <a:bodyPr wrap="square"/>
@@ -18941,7 +18941,7 @@
                   </a:tcPr>
                 </a:tc>
               </a:tr>
-              <a:tr h="384048">
+              <a:tr h="347472">
                 <a:tc>
                   <a:txBody>
                     <a:bodyPr wrap="square"/>
@@ -18955,7 +18955,7 @@
                           </a:solidFill>
                           <a:latin typeface="Inter"/>
                         </a:rPr>
-                        <a:t>10. Добрать 55+ и проверить «готовность к пользе» на полке</a:t>
+                        <a:t>10. Добрать 55+ в выборку</a:t>
                       </a:r>
                     </a:p>
                   </a:txBody>
@@ -19001,13 +19001,84 @@
                           </a:solidFill>
                           <a:latin typeface="Inter"/>
                         </a:rPr>
-                        <a:t>≈10% против 36% в панели; 71,8 / 79,7% декларации · сл. 66, 46</a:t>
+                        <a:t>≈10% против 36% на слайде РОМИР (база не указана) · page=66, romir page=4</a:t>
                       </a:r>
                     </a:p>
                   </a:txBody>
                   <a:tcPr marL="64008" marR="54864" marT="27432" marB="27432" anchor="ctr">
                     <a:solidFill>
                       <a:srgbClr val="F2F5F9"/>
+                    </a:solidFill>
+                  </a:tcPr>
+                </a:tc>
+              </a:tr>
+              <a:tr h="347472">
+                <a:tc>
+                  <a:txBody>
+                    <a:bodyPr wrap="square"/>
+                    <a:lstStyle/>
+                    <a:p>
+                      <a:pPr algn="l"/>
+                      <a:r>
+                        <a:rPr sz="900" b="0">
+                          <a:solidFill>
+                            <a:srgbClr val="0E1726"/>
+                          </a:solidFill>
+                          <a:latin typeface="Inter"/>
+                        </a:rPr>
+                        <a:t>11. Проверить «готовность к пользе» полевым тестом</a:t>
+                      </a:r>
+                    </a:p>
+                  </a:txBody>
+                  <a:tcPr marL="64008" marR="54864" marT="27432" marB="27432" anchor="ctr">
+                    <a:solidFill>
+                      <a:srgbClr val="FFFFFF"/>
+                    </a:solidFill>
+                  </a:tcPr>
+                </a:tc>
+                <a:tc>
+                  <a:txBody>
+                    <a:bodyPr wrap="square"/>
+                    <a:lstStyle/>
+                    <a:p>
+                      <a:pPr algn="l"/>
+                      <a:r>
+                        <a:rPr sz="900" b="0">
+                          <a:solidFill>
+                            <a:srgbClr val="1E8A5F"/>
+                          </a:solidFill>
+                          <a:latin typeface="Inter"/>
+                        </a:rPr>
+                        <a:t>A1</a:t>
+                      </a:r>
+                    </a:p>
+                  </a:txBody>
+                  <a:tcPr marL="64008" marR="54864" marT="27432" marB="27432" anchor="ctr">
+                    <a:solidFill>
+                      <a:srgbClr val="FFFFFF"/>
+                    </a:solidFill>
+                  </a:tcPr>
+                </a:tc>
+                <a:tc>
+                  <a:txBody>
+                    <a:bodyPr wrap="square"/>
+                    <a:lstStyle/>
+                    <a:p>
+                      <a:pPr algn="l"/>
+                      <a:r>
+                        <a:rPr sz="900" b="0">
+                          <a:solidFill>
+                            <a:srgbClr val="0E1726"/>
+                          </a:solidFill>
+                          <a:latin typeface="Inter"/>
+                        </a:rPr>
+                        <a:t>71,8 / 79,7% — декларация, не поведение · page=46</a:t>
+                      </a:r>
+                    </a:p>
+                  </a:txBody>
+                  <a:tcPr marL="64008" marR="54864" marT="27432" marB="27432" anchor="ctr">
+                    <a:solidFill>
+                      <a:srgbClr val="FFFFFF"/>
                     </a:solidFill>
                   </a:tcPr>
                 </a:tc>
@@ -19168,7 +19239,7 @@
                 </a:solidFill>
                 <a:latin typeface="Inter"/>
               </a:rPr>
-              <a:t>Все — из работы Гемини; правдоподобны, поэтому опасны. Ниже — отдельным блоком шесть искажений</a:t>
+              <a:t>Все — из работы Гемини; правдоподобны, поэтому опасны. Ниже — отдельным блоком пять искажений</a:t>
             </a:r>
           </a:p>
         </p:txBody>
@@ -19999,7 +20070,7 @@
                 </a:solidFill>
                 <a:latin typeface="Inter"/>
               </a:rPr>
-              <a:t>Шесть искажений (число есть, смысл другой): «80% продаж у топ-брендов» — в колоде 80% дают 2,9% SKU; СТМ «до 50% в категориях» — по колоде до 67,5%; «сыр и специи 13%» — необычные начинки; 180–250 / 350–500 г — в колоде 151–250 / 251–500; «1–20%+» — 1–20% это 55,0 / 56,6%; «68% со средним+ доходом» — 70% по всей базе, без разбивки.</a:t>
+              <a:t>Пять искажений (число есть, смысл другой): «80% продаж у топ-брендов» — в колоде 80% дают 2,9% SKU; «сыр и специи 13%» — необычные начинки; 180–250 / 350–500 г — в колоде 151–250 / 251–500; «1–20%+» — 1–20% это 55,0 / 56,6%; «68% со средним+ доходом» — 70% по всей базе, без разбивки.</a:t>
             </a:r>
           </a:p>
         </p:txBody>
@@ -22550,7 +22621,7 @@
                 </a:solidFill>
                 <a:latin typeface="Inter"/>
               </a:rPr>
-              <a:t>Проверялось всё, где есть число или однозначный факт: 102 утверждения, из них 78 — у Гемини</a:t>
+              <a:t>Проверялось всё, где есть число или однозначный факт: 103 утверждения, из них 78 — у Гемини</a:t>
             </a:r>
           </a:p>
         </p:txBody>
@@ -22780,7 +22851,7 @@
                 </a:solidFill>
                 <a:latin typeface="Inter"/>
               </a:rPr>
-              <a:t>17 / 17</a:t>
+              <a:t>18 / 18</a:t>
             </a:r>
           </a:p>
         </p:txBody>
@@ -22815,7 +22886,7 @@
                 </a:solidFill>
                 <a:latin typeface="Inter"/>
               </a:rPr>
-              <a:t>все подтверждены</a:t>
+              <a:t>все числа верны, два ярлыка поправлены</a:t>
             </a:r>
           </a:p>
         </p:txBody>
@@ -23050,7 +23121,7 @@
                 </a:solidFill>
                 <a:latin typeface="Inter"/>
               </a:rPr>
-              <a:t>44 / 78</a:t>
+              <a:t>46 / 78</a:t>
             </a:r>
           </a:p>
         </p:txBody>
@@ -23085,7 +23156,7 @@
                 </a:solidFill>
                 <a:latin typeface="Inter"/>
               </a:rPr>
-              <a:t>6 искажений, 28 значений в колоде нет</a:t>
+              <a:t>5 искажений, 27 значений в колоде нет</a:t>
             </a:r>
           </a:p>
         </p:txBody>
@@ -23245,7 +23316,7 @@
                           </a:solidFill>
                           <a:latin typeface="Inter"/>
                         </a:rPr>
-                        <a:t>6 / 6</a:t>
+                        <a:t>7 / 7</a:t>
                       </a:r>
                     </a:p>
                   </a:txBody>
@@ -23291,7 +23362,7 @@
                           </a:solidFill>
                           <a:latin typeface="Inter"/>
                         </a:rPr>
-                        <a:t>0 / 7</a:t>
+                        <a:t>1 / 7</a:t>
                       </a:r>
                     </a:p>
                   </a:txBody>
@@ -23573,7 +23644,7 @@
                           </a:solidFill>
                           <a:latin typeface="Inter"/>
                         </a:rPr>
-                        <a:t>7 / 20</a:t>
+                        <a:t>8 / 20</a:t>
                       </a:r>
                     </a:p>
                   </a:txBody>
@@ -23876,8 +23947,8 @@
                 <a:latin typeface="Inter"/>
               </a:rPr>
               <a:t>Ключ к разнице — не объём, а адрес ошибки.
-У Гемини 11 из 11 в поведении и 19 из 27 в продукте — там он читал колоду. И 0 из 7 в демографии, 1 из 5 в поколениях, 11 отсутствующих значений из 20 в макро — там он переносил цифры из других колод.
-У Клода не разошлось ни одно из 17 утверждений. У Грока все числа верны; спорны две трактовки.</a:t>
+У Гемини 11 из 11 в поведении и 19 из 27 в продукте — там он читал колоду. И 1 из 7 в демографии, 1 из 5 в поколениях, 11 отсутствующих значений из 20 в макро — там он переносил цифры из других колод.
+У Клода все 18 чисел верны; поправлены два ярлыка. У Грока все числа верны; спорны две трактовки.</a:t>
             </a:r>
           </a:p>
         </p:txBody>
@@ -23912,7 +23983,7 @@
                 </a:solidFill>
                 <a:latin typeface="Inter"/>
               </a:rPr>
-              <a:t>Полный перечень 102 проверок — в пояснении к презентации, приложение A.</a:t>
+              <a:t>Полный перечень 103 проверок — в пояснении к презентации, приложение A.</a:t>
             </a:r>
           </a:p>
         </p:txBody>
@@ -24360,7 +24431,7 @@
                 </a:solidFill>
                 <a:latin typeface="Inter"/>
               </a:rPr>
-              <a:t>Ядро консенсуса: где все трое говорят одно</a:t>
+              <a:t>Ядро колоды: что подтверждают все или большинство</a:t>
             </a:r>
           </a:p>
         </p:txBody>
@@ -24395,7 +24466,7 @@
                 </a:solidFill>
                 <a:latin typeface="Inter"/>
               </a:rPr>
-              <a:t>Шесть тезисов, которые независимо воспроизвели Клод, Грок и Гемини — с числами из колоды</a:t>
+              <a:t>Шесть тезисов, которые воспроизвели минимум двое из трёх. Кто именно — в матрице на слайде 08</a:t>
             </a:r>
           </a:p>
         </p:txBody>
@@ -24594,7 +24665,7 @@
                 </a:solidFill>
                 <a:latin typeface="Inter"/>
               </a:rPr>
-              <a:t>Покупают для себя и семьи 76,7% в РФ и 78,1% в РБ — совпадают все трое (слайд 5).</a:t>
+              <a:t>Покупают для себя и семьи 76,7% в РФ и 78,1% в РБ — есть у всех троих (слайд 5).</a:t>
             </a:r>
           </a:p>
           <a:p>
@@ -24943,7 +25014,7 @@
                 </a:solidFill>
                 <a:latin typeface="Inter"/>
               </a:rPr>
-              <a:t>Ядро консенсуса: продолжение</a:t>
+              <a:t>Ядро колоды: продолжение</a:t>
             </a:r>
           </a:p>
         </p:txBody>
@@ -24978,7 +25049,7 @@
                 </a:solidFill>
                 <a:latin typeface="Inter"/>
               </a:rPr>
-              <a:t>Ещё четыре тезиса — и главный вывод о природе расхождений</a:t>
+              <a:t>Ещё четыре тезиса — с пометкой, где покрытие неполное</a:t>
             </a:r>
           </a:p>
         </p:txBody>
@@ -25269,7 +25340,7 @@
                 </a:solidFill>
                 <a:latin typeface="Inter"/>
               </a:rPr>
-              <a:t>Концепт принимают 60,0% / 58,9% при заметном отличии; доплату за ГОСТ в основном ограничивают 10% (слайды 38, 43).</a:t>
+              <a:t>Концепт принимают 60,0% / 58,9% при заметном отличии; доплату за ГОСТ в основном ограничивают 10% (слайды 38, 43). У Грока — только концепт, без ГОСТ.</a:t>
             </a:r>
           </a:p>
           <a:p>
@@ -25294,7 +25365,7 @@
                 </a:solidFill>
                 <a:latin typeface="Inter"/>
               </a:rPr>
-              <a:t>Свои бренды слабы в РФ, сильнее в РБ.</a:t>
+              <a:t>Свои бренды слабы, особенно в РФ.</a:t>
             </a:r>
             <a:r>
               <a:rPr sz="1300">
@@ -25312,7 +25383,7 @@
                 </a:solidFill>
                 <a:latin typeface="Inter"/>
               </a:rPr>
-              <a:t>«Белорусская традиция»: знание 13,3% / 28,4%, покупка 2,7% / 7,7%. Natura: 12,3% / 16,8% и 2,0% / 5,8%. Барьеры — незнание (24,5% / 32,9%) и полка (17,5% / 15,8%), цена — 4,9% / 4,8% (слайды 50–51).</a:t>
+              <a:t>«Белорусская традиция»: знание 13,3% / 28,4%, покупка 2,7% / 7,7%. Natura: 12,3% / 16,8% и 2,0% / 5,8% (слайд 50). Причины непокупки в домашнем регионе (РБ): незнание 24,5% / 32,9%, полка 17,5% / 15,8%, цена 4,9% / 4,8% (слайд 51).</a:t>
             </a:r>
           </a:p>
         </p:txBody>
@@ -25411,7 +25482,7 @@
                 </a:solidFill>
                 <a:latin typeface="Inter"/>
               </a:rPr>
-              <a:t>Вывод: три независимых чтения одной колоды дают одну и ту же картину. Расхождения начинаются не в колоде, а в двух местах — в переносе цифр из других колод и в стратегии, где любой выбор защитим данными лишь частично.</a:t>
+              <a:t>Вывод: три независимых чтения одной колоды дают одну и ту же картину. Расхождения начинаются не в колоде, а в двух местах — в переносе цифр из других колод и в стратегии, где любой выбор защитим данными лишь частично. Полное покрытие по всем тезисам — только у Клода.</a:t>
             </a:r>
           </a:p>
         </p:txBody>
@@ -25533,7 +25604,7 @@
                 </a:solidFill>
                 <a:latin typeface="Inter"/>
               </a:rPr>
-              <a:t>Двенадцать чисел, которые назвали все трое</a:t>
+              <a:t>Двенадцать чисел и кто из троих их привёл</a:t>
             </a:r>
           </a:p>
         </p:txBody>
@@ -25568,7 +25639,7 @@
                 </a:solidFill>
                 <a:latin typeface="Inter"/>
               </a:rPr>
-              <a:t>Галочка — утверждение есть у агента и совпадает с колодой</a:t>
+              <a:t>✔ — точное значение, ~ — округление или пересказ, — — не приводил. Все числа совпадают с колодой</a:t>
             </a:r>
           </a:p>
         </p:txBody>
@@ -26507,11 +26578,11 @@
                       <a:r>
                         <a:rPr sz="1100" b="1">
                           <a:solidFill>
-                            <a:srgbClr val="1E8A5F"/>
-                          </a:solidFill>
-                          <a:latin typeface="Inter"/>
-                        </a:rPr>
-                        <a:t>✔</a:t>
+                            <a:srgbClr val="D1820E"/>
+                          </a:solidFill>
+                          <a:latin typeface="Inter"/>
+                        </a:rPr>
+                        <a:t>~</a:t>
                       </a:r>
                     </a:p>
                   </a:txBody>
@@ -26670,11 +26741,11 @@
                       <a:r>
                         <a:rPr sz="1100" b="1">
                           <a:solidFill>
-                            <a:srgbClr val="1E8A5F"/>
-                          </a:solidFill>
-                          <a:latin typeface="Inter"/>
-                        </a:rPr>
-                        <a:t>✔</a:t>
+                            <a:srgbClr val="A8B2BF"/>
+                          </a:solidFill>
+                          <a:latin typeface="Inter"/>
+                        </a:rPr>
+                        <a:t>—</a:t>
                       </a:r>
                     </a:p>
                   </a:txBody>
@@ -26833,11 +26904,11 @@
                       <a:r>
                         <a:rPr sz="1100" b="1">
                           <a:solidFill>
-                            <a:srgbClr val="1E8A5F"/>
-                          </a:solidFill>
-                          <a:latin typeface="Inter"/>
-                        </a:rPr>
-                        <a:t>✔</a:t>
+                            <a:srgbClr val="A8B2BF"/>
+                          </a:solidFill>
+                          <a:latin typeface="Inter"/>
+                        </a:rPr>
+                        <a:t>—</a:t>
                       </a:r>
                     </a:p>
                   </a:txBody>
@@ -26996,11 +27067,11 @@
                       <a:r>
                         <a:rPr sz="1100" b="1">
                           <a:solidFill>
-                            <a:srgbClr val="1E8A5F"/>
-                          </a:solidFill>
-                          <a:latin typeface="Inter"/>
-                        </a:rPr>
-                        <a:t>✔</a:t>
+                            <a:srgbClr val="A8B2BF"/>
+                          </a:solidFill>
+                          <a:latin typeface="Inter"/>
+                        </a:rPr>
+                        <a:t>—</a:t>
                       </a:r>
                     </a:p>
                   </a:txBody>
@@ -27159,11 +27230,11 @@
                       <a:r>
                         <a:rPr sz="1100" b="1">
                           <a:solidFill>
-                            <a:srgbClr val="1E8A5F"/>
-                          </a:solidFill>
-                          <a:latin typeface="Inter"/>
-                        </a:rPr>
-                        <a:t>✔</a:t>
+                            <a:srgbClr val="A8B2BF"/>
+                          </a:solidFill>
+                          <a:latin typeface="Inter"/>
+                        </a:rPr>
+                        <a:t>—</a:t>
                       </a:r>
                     </a:p>
                   </a:txBody>
@@ -27322,11 +27393,11 @@
                       <a:r>
                         <a:rPr sz="1100" b="1">
                           <a:solidFill>
-                            <a:srgbClr val="1E8A5F"/>
-                          </a:solidFill>
-                          <a:latin typeface="Inter"/>
-                        </a:rPr>
-                        <a:t>✔</a:t>
+                            <a:srgbClr val="D1820E"/>
+                          </a:solidFill>
+                          <a:latin typeface="Inter"/>
+                        </a:rPr>
+                        <a:t>~</a:t>
                       </a:r>
                     </a:p>
                   </a:txBody>
@@ -27861,8 +27932,8 @@
         </p:nvSpPr>
         <p:spPr>
           <a:xfrm>
-            <a:off x="658368" y="6053328"/>
-            <a:ext cx="10881360" cy="274320"/>
+            <a:off x="658368" y="5907024"/>
+            <a:ext cx="10881360" cy="457200"/>
           </a:xfrm>
           <a:prstGeom prst="rect">
             <a:avLst/>
@@ -27875,7 +27946,11 @@
           </a:bodyPr>
           <a:lstStyle/>
           <a:p>
-            <a:pPr algn="l"/>
+            <a:pPr algn="l">
+              <a:lnSpc>
+                <a:spcPct val="115000"/>
+              </a:lnSpc>
+            </a:pPr>
             <a:r>
               <a:rPr sz="900" b="0" i="1">
                 <a:solidFill>
@@ -27883,7 +27958,7 @@
                 </a:solidFill>
                 <a:latin typeface="Inter"/>
               </a:rPr>
-              <a:t>Последняя строка — nielsen-itogi-2025-vektory-2026, слайд 22: это ЗОЖ-батончики и мороженое, не мясо.</a:t>
+              <a:t>Шесть чисел приведены всеми троими с точностью до десятых. Грок числа берёт выборочно и часто в округлении, поэтому «12 показателей названы всеми тремя» было бы преувеличением. Последняя строка — nielsen-itogi-2025-vektory-2026, page=22: это ЗОЖ-батончики и мороженое, не мясо.</a:t>
             </a:r>
           </a:p>
         </p:txBody>

--- a/reviews/2026-10-25-inkofood/summary/Inkofood_tri_agent_synthesis_2026.pptx
+++ b/reviews/2026-10-25-inkofood/summary/Inkofood_tri_agent_synthesis_2026.pptx
@@ -4788,7 +4788,7 @@
                 </a:solidFill>
                 <a:latin typeface="Inter"/>
               </a:rPr>
-              <a:t>Самое дорогое расхождение: на нём у Гемини построено противоречие №1</a:t>
+              <a:t>Первая итерация Гемини расходилась с колодой по четырём строкам; во второй — совпадает полностью</a:t>
             </a:r>
           </a:p>
         </p:txBody>
@@ -4933,7 +4933,7 @@
         </p:nvGraphicFramePr>
         <p:xfrm>
           <a:off x="658368" y="1828800"/>
-          <a:ext cx="10881360" cy="2615184"/>
+          <a:ext cx="11109960" cy="2615184"/>
         </p:xfrm>
         <a:graphic>
           <a:graphicData uri="http://schemas.openxmlformats.org/drawingml/2006/table">
@@ -4942,10 +4942,11 @@
                 <a:tableStyleId>{5C22544A-7EE6-4342-B048-85BDC9FD1C3A}</a:tableStyleId>
               </a:tblPr>
               <a:tblGrid>
+                <a:gridCol w="2103120"/>
+                <a:gridCol w="2514600"/>
+                <a:gridCol w="2240280"/>
                 <a:gridCol w="2331720"/>
-                <a:gridCol w="3108960"/>
-                <a:gridCol w="2926080"/>
-                <a:gridCol w="2514600"/>
+                <a:gridCol w="1920240"/>
               </a:tblGrid>
               <a:tr h="310896">
                 <a:tc>
@@ -5007,7 +5008,30 @@
                           </a:solidFill>
                           <a:latin typeface="Inter"/>
                         </a:rPr>
-                        <a:t>Agent 3 · Гемини</a:t>
+                        <a:t>Гемини, итерация 1</a:t>
+                      </a:r>
+                    </a:p>
+                  </a:txBody>
+                  <a:tcPr marL="64008" marR="54864" marT="27432" marB="27432" anchor="ctr">
+                    <a:solidFill>
+                      <a:srgbClr val="0E1726"/>
+                    </a:solidFill>
+                  </a:tcPr>
+                </a:tc>
+                <a:tc>
+                  <a:txBody>
+                    <a:bodyPr wrap="square"/>
+                    <a:lstStyle/>
+                    <a:p>
+                      <a:pPr algn="l"/>
+                      <a:r>
+                        <a:rPr sz="950" b="1">
+                          <a:solidFill>
+                            <a:srgbClr val="FFFFFF"/>
+                          </a:solidFill>
+                          <a:latin typeface="Inter"/>
+                        </a:rPr>
+                        <a:t>Гемини, итерация 2</a:t>
                       </a:r>
                     </a:p>
                   </a:txBody>
@@ -5049,13 +5073,13 @@
                     <a:p>
                       <a:pPr algn="l"/>
                       <a:r>
-                        <a:rPr sz="950" b="1">
+                        <a:rPr sz="900" b="1">
                           <a:solidFill>
                             <a:srgbClr val="0E1726"/>
                           </a:solidFill>
                           <a:latin typeface="Inter"/>
                         </a:rPr>
-                        <a:t>Пол (РФ)</a:t>
+                        <a:t>Пол</a:t>
                       </a:r>
                     </a:p>
                   </a:txBody>
@@ -5072,7 +5096,7 @@
                     <a:p>
                       <a:pPr algn="l"/>
                       <a:r>
-                        <a:rPr sz="950" b="0">
+                        <a:rPr sz="900" b="0">
                           <a:solidFill>
                             <a:srgbClr val="1E8A5F"/>
                           </a:solidFill>
@@ -5095,7 +5119,7 @@
                     <a:p>
                       <a:pPr algn="l"/>
                       <a:r>
-                        <a:rPr sz="950" b="0">
+                        <a:rPr sz="900" b="0">
                           <a:solidFill>
                             <a:srgbClr val="C0332B"/>
                           </a:solidFill>
@@ -5118,9 +5142,32 @@
                     <a:p>
                       <a:pPr algn="l"/>
                       <a:r>
-                        <a:rPr sz="950" b="0">
-                          <a:solidFill>
-                            <a:srgbClr val="0E1726"/>
+                        <a:rPr sz="900" b="0">
+                          <a:solidFill>
+                            <a:srgbClr val="1E8A5F"/>
+                          </a:solidFill>
+                          <a:latin typeface="Inter"/>
+                        </a:rPr>
+                        <a:t>женщины 61%, мужчины 39%</a:t>
+                      </a:r>
+                    </a:p>
+                  </a:txBody>
+                  <a:tcPr marL="64008" marR="54864" marT="27432" marB="27432" anchor="ctr">
+                    <a:solidFill>
+                      <a:srgbClr val="FFFFFF"/>
+                    </a:solidFill>
+                  </a:tcPr>
+                </a:tc>
+                <a:tc>
+                  <a:txBody>
+                    <a:bodyPr wrap="square"/>
+                    <a:lstStyle/>
+                    <a:p>
+                      <a:pPr algn="l"/>
+                      <a:r>
+                        <a:rPr sz="900" b="0">
+                          <a:solidFill>
+                            <a:srgbClr val="1E8A5F"/>
                           </a:solidFill>
                           <a:latin typeface="Inter"/>
                         </a:rPr>
@@ -5143,7 +5190,7 @@
                     <a:p>
                       <a:pPr algn="l"/>
                       <a:r>
-                        <a:rPr sz="950" b="1">
+                        <a:rPr sz="900" b="1">
                           <a:solidFill>
                             <a:srgbClr val="0E1726"/>
                           </a:solidFill>
@@ -5166,7 +5213,7 @@
                     <a:p>
                       <a:pPr algn="l"/>
                       <a:r>
-                        <a:rPr sz="950" b="0">
+                        <a:rPr sz="900" b="0">
                           <a:solidFill>
                             <a:srgbClr val="1E8A5F"/>
                           </a:solidFill>
@@ -5189,7 +5236,7 @@
                     <a:p>
                       <a:pPr algn="l"/>
                       <a:r>
-                        <a:rPr sz="950" b="0">
+                        <a:rPr sz="900" b="0">
                           <a:solidFill>
                             <a:srgbClr val="C0332B"/>
                           </a:solidFill>
@@ -5212,9 +5259,32 @@
                     <a:p>
                       <a:pPr algn="l"/>
                       <a:r>
-                        <a:rPr sz="950" b="0">
-                          <a:solidFill>
-                            <a:srgbClr val="0E1726"/>
+                        <a:rPr sz="900" b="0">
+                          <a:solidFill>
+                            <a:srgbClr val="1E8A5F"/>
+                          </a:solidFill>
+                          <a:latin typeface="Inter"/>
+                        </a:rPr>
+                        <a:t>есть у 52%, нет у 48%</a:t>
+                      </a:r>
+                    </a:p>
+                  </a:txBody>
+                  <a:tcPr marL="64008" marR="54864" marT="27432" marB="27432" anchor="ctr">
+                    <a:solidFill>
+                      <a:srgbClr val="F2F5F9"/>
+                    </a:solidFill>
+                  </a:tcPr>
+                </a:tc>
+                <a:tc>
+                  <a:txBody>
+                    <a:bodyPr wrap="square"/>
+                    <a:lstStyle/>
+                    <a:p>
+                      <a:pPr algn="l"/>
+                      <a:r>
+                        <a:rPr sz="900" b="0">
+                          <a:solidFill>
+                            <a:srgbClr val="1E8A5F"/>
                           </a:solidFill>
                           <a:latin typeface="Inter"/>
                         </a:rPr>
@@ -5237,13 +5307,13 @@
                     <a:p>
                       <a:pPr algn="l"/>
                       <a:r>
-                        <a:rPr sz="950" b="1">
+                        <a:rPr sz="900" b="1">
                           <a:solidFill>
                             <a:srgbClr val="0E1726"/>
                           </a:solidFill>
                           <a:latin typeface="Inter"/>
                         </a:rPr>
-                        <a:t>Доход «хватает на всё»</a:t>
+                        <a:t>Доход</a:t>
                       </a:r>
                     </a:p>
                   </a:txBody>
@@ -5260,7 +5330,7 @@
                     <a:p>
                       <a:pPr algn="l"/>
                       <a:r>
-                        <a:rPr sz="950" b="0">
+                        <a:rPr sz="900" b="0">
                           <a:solidFill>
                             <a:srgbClr val="1E8A5F"/>
                           </a:solidFill>
@@ -5283,7 +5353,7 @@
                     <a:p>
                       <a:pPr algn="l"/>
                       <a:r>
-                        <a:rPr sz="950" b="0">
+                        <a:rPr sz="900" b="0">
                           <a:solidFill>
                             <a:srgbClr val="C0332B"/>
                           </a:solidFill>
@@ -5306,9 +5376,32 @@
                     <a:p>
                       <a:pPr algn="l"/>
                       <a:r>
-                        <a:rPr sz="950" b="0">
-                          <a:solidFill>
-                            <a:srgbClr val="0E1726"/>
+                        <a:rPr sz="900" b="0">
+                          <a:solidFill>
+                            <a:srgbClr val="1E8A5F"/>
+                          </a:solidFill>
+                          <a:latin typeface="Inter"/>
+                        </a:rPr>
+                        <a:t>70% (65,2 вещи длит. польз. + 4,8 дорогие)</a:t>
+                      </a:r>
+                    </a:p>
+                  </a:txBody>
+                  <a:tcPr marL="64008" marR="54864" marT="27432" marB="27432" anchor="ctr">
+                    <a:solidFill>
+                      <a:srgbClr val="FFFFFF"/>
+                    </a:solidFill>
+                  </a:tcPr>
+                </a:tc>
+                <a:tc>
+                  <a:txBody>
+                    <a:bodyPr wrap="square"/>
+                    <a:lstStyle/>
+                    <a:p>
+                      <a:pPr algn="l"/>
+                      <a:r>
+                        <a:rPr sz="900" b="0">
+                          <a:solidFill>
+                            <a:srgbClr val="1E8A5F"/>
                           </a:solidFill>
                           <a:latin typeface="Inter"/>
                         </a:rPr>
@@ -5331,7 +5424,7 @@
                     <a:p>
                       <a:pPr algn="l"/>
                       <a:r>
-                        <a:rPr sz="950" b="1">
+                        <a:rPr sz="900" b="1">
                           <a:solidFill>
                             <a:srgbClr val="0E1726"/>
                           </a:solidFill>
@@ -5354,7 +5447,7 @@
                     <a:p>
                       <a:pPr algn="l"/>
                       <a:r>
-                        <a:rPr sz="950" b="0">
+                        <a:rPr sz="900" b="0">
                           <a:solidFill>
                             <a:srgbClr val="1E8A5F"/>
                           </a:solidFill>
@@ -5377,7 +5470,7 @@
                     <a:p>
                       <a:pPr algn="l"/>
                       <a:r>
-                        <a:rPr sz="950" b="0">
+                        <a:rPr sz="900" b="0">
                           <a:solidFill>
                             <a:srgbClr val="C0332B"/>
                           </a:solidFill>
@@ -5400,9 +5493,32 @@
                     <a:p>
                       <a:pPr algn="l"/>
                       <a:r>
-                        <a:rPr sz="950" b="0">
-                          <a:solidFill>
-                            <a:srgbClr val="0E1726"/>
+                        <a:rPr sz="900" b="0">
+                          <a:solidFill>
+                            <a:srgbClr val="1E8A5F"/>
+                          </a:solidFill>
+                          <a:latin typeface="Inter"/>
+                        </a:rPr>
+                        <a:t>8 групп, «Untitled 1» — 10,2%</a:t>
+                      </a:r>
+                    </a:p>
+                  </a:txBody>
+                  <a:tcPr marL="64008" marR="54864" marT="27432" marB="27432" anchor="ctr">
+                    <a:solidFill>
+                      <a:srgbClr val="F2F5F9"/>
+                    </a:solidFill>
+                  </a:tcPr>
+                </a:tc>
+                <a:tc>
+                  <a:txBody>
+                    <a:bodyPr wrap="square"/>
+                    <a:lstStyle/>
+                    <a:p>
+                      <a:pPr algn="l"/>
+                      <a:r>
+                        <a:rPr sz="900" b="0">
+                          <a:solidFill>
+                            <a:srgbClr val="1E8A5F"/>
                           </a:solidFill>
                           <a:latin typeface="Inter"/>
                         </a:rPr>
@@ -5425,7 +5541,7 @@
                     <a:p>
                       <a:pPr algn="l"/>
                       <a:r>
-                        <a:rPr sz="950" b="1">
+                        <a:rPr sz="900" b="1">
                           <a:solidFill>
                             <a:srgbClr val="0E1726"/>
                           </a:solidFill>
@@ -5448,7 +5564,7 @@
                     <a:p>
                       <a:pPr algn="l"/>
                       <a:r>
-                        <a:rPr sz="950" b="0">
+                        <a:rPr sz="900" b="0">
                           <a:solidFill>
                             <a:srgbClr val="1E8A5F"/>
                           </a:solidFill>
@@ -5471,7 +5587,7 @@
                     <a:p>
                       <a:pPr algn="l"/>
                       <a:r>
-                        <a:rPr sz="950" b="0">
+                        <a:rPr sz="900" b="0">
                           <a:solidFill>
                             <a:srgbClr val="C0332B"/>
                           </a:solidFill>
@@ -5494,9 +5610,32 @@
                     <a:p>
                       <a:pPr algn="l"/>
                       <a:r>
-                        <a:rPr sz="950" b="0">
-                          <a:solidFill>
-                            <a:srgbClr val="0E1726"/>
+                        <a:rPr sz="900" b="0">
+                          <a:solidFill>
+                            <a:srgbClr val="1E8A5F"/>
+                          </a:solidFill>
+                          <a:latin typeface="Inter"/>
+                        </a:rPr>
+                        <a:t>10,2% + 2,8% пенсионеров</a:t>
+                      </a:r>
+                    </a:p>
+                  </a:txBody>
+                  <a:tcPr marL="64008" marR="54864" marT="27432" marB="27432" anchor="ctr">
+                    <a:solidFill>
+                      <a:srgbClr val="FFFFFF"/>
+                    </a:solidFill>
+                  </a:tcPr>
+                </a:tc>
+                <a:tc>
+                  <a:txBody>
+                    <a:bodyPr wrap="square"/>
+                    <a:lstStyle/>
+                    <a:p>
+                      <a:pPr algn="l"/>
+                      <a:r>
+                        <a:rPr sz="900" b="0">
+                          <a:solidFill>
+                            <a:srgbClr val="1E8A5F"/>
                           </a:solidFill>
                           <a:latin typeface="Inter"/>
                         </a:rPr>
@@ -5519,7 +5658,7 @@
                     <a:p>
                       <a:pPr algn="l"/>
                       <a:r>
-                        <a:rPr sz="950" b="1">
+                        <a:rPr sz="900" b="1">
                           <a:solidFill>
                             <a:srgbClr val="0E1726"/>
                           </a:solidFill>
@@ -5542,7 +5681,7 @@
                     <a:p>
                       <a:pPr algn="l"/>
                       <a:r>
-                        <a:rPr sz="950" b="0">
+                        <a:rPr sz="900" b="0">
                           <a:solidFill>
                             <a:srgbClr val="1E8A5F"/>
                           </a:solidFill>
@@ -5565,13 +5704,36 @@
                     <a:p>
                       <a:pPr algn="l"/>
                       <a:r>
-                        <a:rPr sz="950" b="0">
+                        <a:rPr sz="900" b="0">
+                          <a:solidFill>
+                            <a:srgbClr val="C0332B"/>
+                          </a:solidFill>
+                          <a:latin typeface="Inter"/>
+                        </a:rPr>
+                        <a:t>Москва 300, СПб 150, Екб 150; Минск 150, Брест 75, Гомель 75</a:t>
+                      </a:r>
+                    </a:p>
+                  </a:txBody>
+                  <a:tcPr marL="64008" marR="54864" marT="27432" marB="27432" anchor="ctr">
+                    <a:solidFill>
+                      <a:srgbClr val="F2F5F9"/>
+                    </a:solidFill>
+                  </a:tcPr>
+                </a:tc>
+                <a:tc>
+                  <a:txBody>
+                    <a:bodyPr wrap="square"/>
+                    <a:lstStyle/>
+                    <a:p>
+                      <a:pPr algn="l"/>
+                      <a:r>
+                        <a:rPr sz="900" b="0">
                           <a:solidFill>
                             <a:srgbClr val="1E8A5F"/>
                           </a:solidFill>
                           <a:latin typeface="Inter"/>
                         </a:rPr>
-                        <a:t>Москва 300, СПб 150, Екб 150; Минск 150, Брест 75, Гомель 75</a:t>
+                        <a:t>то же</a:t>
                       </a:r>
                     </a:p>
                   </a:txBody>
@@ -5588,13 +5750,13 @@
                     <a:p>
                       <a:pPr algn="l"/>
                       <a:r>
-                        <a:rPr sz="950" b="0">
-                          <a:solidFill>
-                            <a:srgbClr val="0E1726"/>
-                          </a:solidFill>
-                          <a:latin typeface="Inter"/>
-                        </a:rPr>
-                        <a:t>то же на слайде 2 · совпадает</a:t>
+                        <a:rPr sz="900" b="0">
+                          <a:solidFill>
+                            <a:srgbClr val="1E8A5F"/>
+                          </a:solidFill>
+                          <a:latin typeface="Inter"/>
+                        </a:rPr>
+                        <a:t>то же · слайд 2</a:t>
                       </a:r>
                     </a:p>
                   </a:txBody>
@@ -10750,7 +10912,7 @@
         </p:nvGraphicFramePr>
         <p:xfrm>
           <a:off x="658368" y="1828800"/>
-          <a:ext cx="10881360" cy="3767328"/>
+          <a:ext cx="10881359" cy="3758184"/>
         </p:xfrm>
         <a:graphic>
           <a:graphicData uri="http://schemas.openxmlformats.org/drawingml/2006/table">
@@ -10759,11 +10921,12 @@
                 <a:tableStyleId>{5C22544A-7EE6-4342-B048-85BDC9FD1C3A}</a:tableStyleId>
               </a:tblPr>
               <a:tblGrid>
-                <a:gridCol w="4160520"/>
-                <a:gridCol w="914400"/>
+                <a:gridCol w="3520440"/>
                 <a:gridCol w="777240"/>
-                <a:gridCol w="1783080"/>
-                <a:gridCol w="3246120"/>
+                <a:gridCol w="685800"/>
+                <a:gridCol w="1463040"/>
+                <a:gridCol w="1874519"/>
+                <a:gridCol w="2560320"/>
               </a:tblGrid>
               <a:tr h="310896">
                 <a:tc>
@@ -10848,7 +11011,7 @@
                           </a:solidFill>
                           <a:latin typeface="Inter"/>
                         </a:rPr>
-                        <a:t>A3</a:t>
+                        <a:t>A3 · итер. 1</a:t>
                       </a:r>
                     </a:p>
                   </a:txBody>
@@ -10871,6 +11034,29 @@
                           </a:solidFill>
                           <a:latin typeface="Inter"/>
                         </a:rPr>
+                        <a:t>A3 · итер. 2</a:t>
+                      </a:r>
+                    </a:p>
+                  </a:txBody>
+                  <a:tcPr marL="64008" marR="54864" marT="27432" marB="27432" anchor="ctr">
+                    <a:solidFill>
+                      <a:srgbClr val="0E1726"/>
+                    </a:solidFill>
+                  </a:tcPr>
+                </a:tc>
+                <a:tc>
+                  <a:txBody>
+                    <a:bodyPr wrap="square"/>
+                    <a:lstStyle/>
+                    <a:p>
+                      <a:pPr algn="l"/>
+                      <a:r>
+                        <a:rPr sz="950" b="1">
+                          <a:solidFill>
+                            <a:srgbClr val="FFFFFF"/>
+                          </a:solidFill>
+                          <a:latin typeface="Inter"/>
+                        </a:rPr>
                         <a:t>Проверка по колоде</a:t>
                       </a:r>
                     </a:p>
@@ -10882,15 +11068,15 @@
                   </a:tcPr>
                 </a:tc>
               </a:tr>
-              <a:tr h="288036">
-                <a:tc>
-                  <a:txBody>
-                    <a:bodyPr wrap="square"/>
-                    <a:lstStyle/>
-                    <a:p>
-                      <a:pPr algn="l"/>
-                      <a:r>
-                        <a:rPr sz="900" b="0">
+              <a:tr h="265176">
+                <a:tc>
+                  <a:txBody>
+                    <a:bodyPr wrap="square"/>
+                    <a:lstStyle/>
+                    <a:p>
+                      <a:pPr algn="l"/>
+                      <a:r>
+                        <a:rPr sz="860" b="0">
                           <a:solidFill>
                             <a:srgbClr val="0E1726"/>
                           </a:solidFill>
@@ -10913,7 +11099,7 @@
                     <a:p>
                       <a:pPr algn="ctr"/>
                       <a:r>
-                        <a:rPr sz="1050" b="1">
+                        <a:rPr sz="1010" b="1">
                           <a:solidFill>
                             <a:srgbClr val="1E8A5F"/>
                           </a:solidFill>
@@ -10936,7 +11122,7 @@
                     <a:p>
                       <a:pPr algn="ctr"/>
                       <a:r>
-                        <a:rPr sz="1050" b="1">
+                        <a:rPr sz="1010" b="1">
                           <a:solidFill>
                             <a:srgbClr val="0E1726"/>
                           </a:solidFill>
@@ -10959,7 +11145,7 @@
                     <a:p>
                       <a:pPr algn="ctr"/>
                       <a:r>
-                        <a:rPr sz="900" b="0">
+                        <a:rPr sz="860" b="0">
                           <a:solidFill>
                             <a:srgbClr val="C0332B"/>
                           </a:solidFill>
@@ -10982,7 +11168,30 @@
                     <a:p>
                       <a:pPr algn="l"/>
                       <a:r>
-                        <a:rPr sz="900" b="0">
+                        <a:rPr sz="860" b="0">
+                          <a:solidFill>
+                            <a:srgbClr val="1E8A5F"/>
+                          </a:solidFill>
+                          <a:latin typeface="Inter"/>
+                        </a:rPr>
+                        <a:t>✔ 35,0 / 37,6</a:t>
+                      </a:r>
+                    </a:p>
+                  </a:txBody>
+                  <a:tcPr marL="64008" marR="54864" marT="27432" marB="27432" anchor="ctr">
+                    <a:solidFill>
+                      <a:srgbClr val="FFFFFF"/>
+                    </a:solidFill>
+                  </a:tcPr>
+                </a:tc>
+                <a:tc>
+                  <a:txBody>
+                    <a:bodyPr wrap="square"/>
+                    <a:lstStyle/>
+                    <a:p>
+                      <a:pPr algn="l"/>
+                      <a:r>
+                        <a:rPr sz="860" b="0">
                           <a:solidFill>
                             <a:srgbClr val="0E1726"/>
                           </a:solidFill>
@@ -10999,15 +11208,15 @@
                   </a:tcPr>
                 </a:tc>
               </a:tr>
-              <a:tr h="288036">
-                <a:tc>
-                  <a:txBody>
-                    <a:bodyPr wrap="square"/>
-                    <a:lstStyle/>
-                    <a:p>
-                      <a:pPr algn="l"/>
-                      <a:r>
-                        <a:rPr sz="900" b="0">
+              <a:tr h="265176">
+                <a:tc>
+                  <a:txBody>
+                    <a:bodyPr wrap="square"/>
+                    <a:lstStyle/>
+                    <a:p>
+                      <a:pPr algn="l"/>
+                      <a:r>
+                        <a:rPr sz="860" b="0">
                           <a:solidFill>
                             <a:srgbClr val="0E1726"/>
                           </a:solidFill>
@@ -11030,7 +11239,7 @@
                     <a:p>
                       <a:pPr algn="ctr"/>
                       <a:r>
-                        <a:rPr sz="1050" b="1">
+                        <a:rPr sz="1010" b="1">
                           <a:solidFill>
                             <a:srgbClr val="0E1726"/>
                           </a:solidFill>
@@ -11053,7 +11262,7 @@
                     <a:p>
                       <a:pPr algn="ctr"/>
                       <a:r>
-                        <a:rPr sz="1050" b="1">
+                        <a:rPr sz="1010" b="1">
                           <a:solidFill>
                             <a:srgbClr val="0E1726"/>
                           </a:solidFill>
@@ -11076,7 +11285,7 @@
                     <a:p>
                       <a:pPr algn="ctr"/>
                       <a:r>
-                        <a:rPr sz="900" b="0">
+                        <a:rPr sz="860" b="0">
                           <a:solidFill>
                             <a:srgbClr val="C0332B"/>
                           </a:solidFill>
@@ -11099,13 +11308,36 @@
                     <a:p>
                       <a:pPr algn="l"/>
                       <a:r>
-                        <a:rPr sz="900" b="0">
+                        <a:rPr sz="860" b="0">
+                          <a:solidFill>
+                            <a:srgbClr val="1E8A5F"/>
+                          </a:solidFill>
+                          <a:latin typeface="Inter"/>
+                        </a:rPr>
+                        <a:t>✔ 15,3, а 13,8 — рост молочки</a:t>
+                      </a:r>
+                    </a:p>
+                  </a:txBody>
+                  <a:tcPr marL="64008" marR="54864" marT="27432" marB="27432" anchor="ctr">
+                    <a:solidFill>
+                      <a:srgbClr val="F2F5F9"/>
+                    </a:solidFill>
+                  </a:tcPr>
+                </a:tc>
+                <a:tc>
+                  <a:txBody>
+                    <a:bodyPr wrap="square"/>
+                    <a:lstStyle/>
+                    <a:p>
+                      <a:pPr algn="l"/>
+                      <a:r>
+                        <a:rPr sz="860" b="0">
                           <a:solidFill>
                             <a:srgbClr val="0E1726"/>
                           </a:solidFill>
                           <a:latin typeface="Inter"/>
                         </a:rPr>
-                        <a:t>nielsen-fmcg, слайд 8</a:t>
+                        <a:t>nielsen-fmcg, слайды 8–9</a:t>
                       </a:r>
                     </a:p>
                   </a:txBody>
@@ -11116,15 +11348,15 @@
                   </a:tcPr>
                 </a:tc>
               </a:tr>
-              <a:tr h="288036">
-                <a:tc>
-                  <a:txBody>
-                    <a:bodyPr wrap="square"/>
-                    <a:lstStyle/>
-                    <a:p>
-                      <a:pPr algn="l"/>
-                      <a:r>
-                        <a:rPr sz="900" b="0">
+              <a:tr h="265176">
+                <a:tc>
+                  <a:txBody>
+                    <a:bodyPr wrap="square"/>
+                    <a:lstStyle/>
+                    <a:p>
+                      <a:pPr algn="l"/>
+                      <a:r>
+                        <a:rPr sz="860" b="0">
                           <a:solidFill>
                             <a:srgbClr val="0E1726"/>
                           </a:solidFill>
@@ -11147,7 +11379,7 @@
                     <a:p>
                       <a:pPr algn="ctr"/>
                       <a:r>
-                        <a:rPr sz="1050" b="1">
+                        <a:rPr sz="1010" b="1">
                           <a:solidFill>
                             <a:srgbClr val="1E8A5F"/>
                           </a:solidFill>
@@ -11170,7 +11402,7 @@
                     <a:p>
                       <a:pPr algn="ctr"/>
                       <a:r>
-                        <a:rPr sz="1050" b="1">
+                        <a:rPr sz="1010" b="1">
                           <a:solidFill>
                             <a:srgbClr val="0E1726"/>
                           </a:solidFill>
@@ -11193,7 +11425,7 @@
                     <a:p>
                       <a:pPr algn="ctr"/>
                       <a:r>
-                        <a:rPr sz="900" b="0">
+                        <a:rPr sz="860" b="0">
                           <a:solidFill>
                             <a:srgbClr val="C0332B"/>
                           </a:solidFill>
@@ -11216,13 +11448,36 @@
                     <a:p>
                       <a:pPr algn="l"/>
                       <a:r>
-                        <a:rPr sz="900" b="0">
+                        <a:rPr sz="860" b="0">
+                          <a:solidFill>
+                            <a:srgbClr val="1E8A5F"/>
+                          </a:solidFill>
+                          <a:latin typeface="Inter"/>
+                        </a:rPr>
+                        <a:t>✔ 23 и 73 по местам</a:t>
+                      </a:r>
+                    </a:p>
+                  </a:txBody>
+                  <a:tcPr marL="64008" marR="54864" marT="27432" marB="27432" anchor="ctr">
+                    <a:solidFill>
+                      <a:srgbClr val="FFFFFF"/>
+                    </a:solidFill>
+                  </a:tcPr>
+                </a:tc>
+                <a:tc>
+                  <a:txBody>
+                    <a:bodyPr wrap="square"/>
+                    <a:lstStyle/>
+                    <a:p>
+                      <a:pPr algn="l"/>
+                      <a:r>
+                        <a:rPr sz="860" b="0">
                           <a:solidFill>
                             <a:srgbClr val="0E1726"/>
                           </a:solidFill>
                           <a:latin typeface="Inter"/>
                         </a:rPr>
-                        <a:t>sber-global, слайд 7; 73% — про AI в быту, слайд 9</a:t>
+                        <a:t>sber-global, слайды 7, 9</a:t>
                       </a:r>
                     </a:p>
                   </a:txBody>
@@ -11233,15 +11488,15 @@
                   </a:tcPr>
                 </a:tc>
               </a:tr>
-              <a:tr h="288036">
-                <a:tc>
-                  <a:txBody>
-                    <a:bodyPr wrap="square"/>
-                    <a:lstStyle/>
-                    <a:p>
-                      <a:pPr algn="l"/>
-                      <a:r>
-                        <a:rPr sz="900" b="0">
+              <a:tr h="265176">
+                <a:tc>
+                  <a:txBody>
+                    <a:bodyPr wrap="square"/>
+                    <a:lstStyle/>
+                    <a:p>
+                      <a:pPr algn="l"/>
+                      <a:r>
+                        <a:rPr sz="860" b="0">
                           <a:solidFill>
                             <a:srgbClr val="0E1726"/>
                           </a:solidFill>
@@ -11264,7 +11519,7 @@
                     <a:p>
                       <a:pPr algn="ctr"/>
                       <a:r>
-                        <a:rPr sz="1050" b="1">
+                        <a:rPr sz="1010" b="1">
                           <a:solidFill>
                             <a:srgbClr val="0E1726"/>
                           </a:solidFill>
@@ -11287,7 +11542,7 @@
                     <a:p>
                       <a:pPr algn="ctr"/>
                       <a:r>
-                        <a:rPr sz="1050" b="1">
+                        <a:rPr sz="1010" b="1">
                           <a:solidFill>
                             <a:srgbClr val="0E1726"/>
                           </a:solidFill>
@@ -11310,7 +11565,7 @@
                     <a:p>
                       <a:pPr algn="ctr"/>
                       <a:r>
-                        <a:rPr sz="900" b="0">
+                        <a:rPr sz="860" b="0">
                           <a:solidFill>
                             <a:srgbClr val="C0332B"/>
                           </a:solidFill>
@@ -11333,7 +11588,30 @@
                     <a:p>
                       <a:pPr algn="l"/>
                       <a:r>
-                        <a:rPr sz="900" b="0">
+                        <a:rPr sz="860" b="0">
+                          <a:solidFill>
+                            <a:srgbClr val="1E8A5F"/>
+                          </a:solidFill>
+                          <a:latin typeface="Inter"/>
+                        </a:rPr>
+                        <a:t>✔ значения нет, снято</a:t>
+                      </a:r>
+                    </a:p>
+                  </a:txBody>
+                  <a:tcPr marL="64008" marR="54864" marT="27432" marB="27432" anchor="ctr">
+                    <a:solidFill>
+                      <a:srgbClr val="F2F5F9"/>
+                    </a:solidFill>
+                  </a:tcPr>
+                </a:tc>
+                <a:tc>
+                  <a:txBody>
+                    <a:bodyPr wrap="square"/>
+                    <a:lstStyle/>
+                    <a:p>
+                      <a:pPr algn="l"/>
+                      <a:r>
+                        <a:rPr sz="860" b="0">
                           <a:solidFill>
                             <a:srgbClr val="0E1726"/>
                           </a:solidFill>
@@ -11350,15 +11628,15 @@
                   </a:tcPr>
                 </a:tc>
               </a:tr>
-              <a:tr h="288036">
-                <a:tc>
-                  <a:txBody>
-                    <a:bodyPr wrap="square"/>
-                    <a:lstStyle/>
-                    <a:p>
-                      <a:pPr algn="l"/>
-                      <a:r>
-                        <a:rPr sz="900" b="0">
+              <a:tr h="265176">
+                <a:tc>
+                  <a:txBody>
+                    <a:bodyPr wrap="square"/>
+                    <a:lstStyle/>
+                    <a:p>
+                      <a:pPr algn="l"/>
+                      <a:r>
+                        <a:rPr sz="860" b="0">
                           <a:solidFill>
                             <a:srgbClr val="0E1726"/>
                           </a:solidFill>
@@ -11381,7 +11659,7 @@
                     <a:p>
                       <a:pPr algn="ctr"/>
                       <a:r>
-                        <a:rPr sz="1050" b="1">
+                        <a:rPr sz="1010" b="1">
                           <a:solidFill>
                             <a:srgbClr val="1E8A5F"/>
                           </a:solidFill>
@@ -11404,7 +11682,7 @@
                     <a:p>
                       <a:pPr algn="ctr"/>
                       <a:r>
-                        <a:rPr sz="1050" b="1">
+                        <a:rPr sz="1010" b="1">
                           <a:solidFill>
                             <a:srgbClr val="0E1726"/>
                           </a:solidFill>
@@ -11427,7 +11705,7 @@
                     <a:p>
                       <a:pPr algn="ctr"/>
                       <a:r>
-                        <a:rPr sz="900" b="0">
+                        <a:rPr sz="860" b="0">
                           <a:solidFill>
                             <a:srgbClr val="C0332B"/>
                           </a:solidFill>
@@ -11450,7 +11728,30 @@
                     <a:p>
                       <a:pPr algn="l"/>
                       <a:r>
-                        <a:rPr sz="900" b="0">
+                        <a:rPr sz="860" b="0">
+                          <a:solidFill>
+                            <a:srgbClr val="1E8A5F"/>
+                          </a:solidFill>
+                          <a:latin typeface="Inter"/>
+                        </a:rPr>
+                        <a:t>✔ 61/39, 52, 70</a:t>
+                      </a:r>
+                    </a:p>
+                  </a:txBody>
+                  <a:tcPr marL="64008" marR="54864" marT="27432" marB="27432" anchor="ctr">
+                    <a:solidFill>
+                      <a:srgbClr val="FFFFFF"/>
+                    </a:solidFill>
+                  </a:tcPr>
+                </a:tc>
+                <a:tc>
+                  <a:txBody>
+                    <a:bodyPr wrap="square"/>
+                    <a:lstStyle/>
+                    <a:p>
+                      <a:pPr algn="l"/>
+                      <a:r>
+                        <a:rPr sz="860" b="0">
                           <a:solidFill>
                             <a:srgbClr val="0E1726"/>
                           </a:solidFill>
@@ -11467,15 +11768,15 @@
                   </a:tcPr>
                 </a:tc>
               </a:tr>
-              <a:tr h="288036">
-                <a:tc>
-                  <a:txBody>
-                    <a:bodyPr wrap="square"/>
-                    <a:lstStyle/>
-                    <a:p>
-                      <a:pPr algn="l"/>
-                      <a:r>
-                        <a:rPr sz="900" b="0">
+              <a:tr h="265176">
+                <a:tc>
+                  <a:txBody>
+                    <a:bodyPr wrap="square"/>
+                    <a:lstStyle/>
+                    <a:p>
+                      <a:pPr algn="l"/>
+                      <a:r>
+                        <a:rPr sz="860" b="0">
                           <a:solidFill>
                             <a:srgbClr val="0E1726"/>
                           </a:solidFill>
@@ -11498,7 +11799,7 @@
                     <a:p>
                       <a:pPr algn="ctr"/>
                       <a:r>
-                        <a:rPr sz="900" b="0">
+                        <a:rPr sz="860" b="0">
                           <a:solidFill>
                             <a:srgbClr val="1E8A5F"/>
                           </a:solidFill>
@@ -11521,7 +11822,7 @@
                     <a:p>
                       <a:pPr algn="ctr"/>
                       <a:r>
-                        <a:rPr sz="1050" b="1">
+                        <a:rPr sz="1010" b="1">
                           <a:solidFill>
                             <a:srgbClr val="0E1726"/>
                           </a:solidFill>
@@ -11544,7 +11845,7 @@
                     <a:p>
                       <a:pPr algn="ctr"/>
                       <a:r>
-                        <a:rPr sz="900" b="0">
+                        <a:rPr sz="860" b="0">
                           <a:solidFill>
                             <a:srgbClr val="C0332B"/>
                           </a:solidFill>
@@ -11567,13 +11868,36 @@
                     <a:p>
                       <a:pPr algn="l"/>
                       <a:r>
-                        <a:rPr sz="900" b="0">
+                        <a:rPr sz="860" b="0">
+                          <a:solidFill>
+                            <a:srgbClr val="1E8A5F"/>
+                          </a:solidFill>
+                          <a:latin typeface="Inter"/>
+                        </a:rPr>
+                        <a:t>✔ 10,2% + 2,8%</a:t>
+                      </a:r>
+                    </a:p>
+                  </a:txBody>
+                  <a:tcPr marL="64008" marR="54864" marT="27432" marB="27432" anchor="ctr">
+                    <a:solidFill>
+                      <a:srgbClr val="F2F5F9"/>
+                    </a:solidFill>
+                  </a:tcPr>
+                </a:tc>
+                <a:tc>
+                  <a:txBody>
+                    <a:bodyPr wrap="square"/>
+                    <a:lstStyle/>
+                    <a:p>
+                      <a:pPr algn="l"/>
+                      <a:r>
+                        <a:rPr sz="860" b="0">
                           <a:solidFill>
                             <a:srgbClr val="0E1726"/>
                           </a:solidFill>
                           <a:latin typeface="Inter"/>
                         </a:rPr>
-                        <a:t>inkofood, слайд 66 — столбец «Untitled 1»</a:t>
+                        <a:t>inkofood, слайд 66 — «Untitled 1»</a:t>
                       </a:r>
                     </a:p>
                   </a:txBody>
@@ -11584,15 +11908,15 @@
                   </a:tcPr>
                 </a:tc>
               </a:tr>
-              <a:tr h="288036">
-                <a:tc>
-                  <a:txBody>
-                    <a:bodyPr wrap="square"/>
-                    <a:lstStyle/>
-                    <a:p>
-                      <a:pPr algn="l"/>
-                      <a:r>
-                        <a:rPr sz="900" b="0">
+              <a:tr h="265176">
+                <a:tc>
+                  <a:txBody>
+                    <a:bodyPr wrap="square"/>
+                    <a:lstStyle/>
+                    <a:p>
+                      <a:pPr algn="l"/>
+                      <a:r>
+                        <a:rPr sz="860" b="0">
                           <a:solidFill>
                             <a:srgbClr val="0E1726"/>
                           </a:solidFill>
@@ -11615,7 +11939,7 @@
                     <a:p>
                       <a:pPr algn="ctr"/>
                       <a:r>
-                        <a:rPr sz="1050" b="1">
+                        <a:rPr sz="1010" b="1">
                           <a:solidFill>
                             <a:srgbClr val="1E8A5F"/>
                           </a:solidFill>
@@ -11638,7 +11962,7 @@
                     <a:p>
                       <a:pPr algn="ctr"/>
                       <a:r>
-                        <a:rPr sz="1050" b="1">
+                        <a:rPr sz="1010" b="1">
                           <a:solidFill>
                             <a:srgbClr val="0E1726"/>
                           </a:solidFill>
@@ -11661,7 +11985,7 @@
                     <a:p>
                       <a:pPr algn="ctr"/>
                       <a:r>
-                        <a:rPr sz="900" b="0">
+                        <a:rPr sz="860" b="0">
                           <a:solidFill>
                             <a:srgbClr val="C0332B"/>
                           </a:solidFill>
@@ -11684,7 +12008,30 @@
                     <a:p>
                       <a:pPr algn="l"/>
                       <a:r>
-                        <a:rPr sz="900" b="0">
+                        <a:rPr sz="860" b="0">
+                          <a:solidFill>
+                            <a:srgbClr val="1E8A5F"/>
+                          </a:solidFill>
+                          <a:latin typeface="Inter"/>
+                        </a:rPr>
+                        <a:t>✔ 15,1 / 16,8</a:t>
+                      </a:r>
+                    </a:p>
+                  </a:txBody>
+                  <a:tcPr marL="64008" marR="54864" marT="27432" marB="27432" anchor="ctr">
+                    <a:solidFill>
+                      <a:srgbClr val="FFFFFF"/>
+                    </a:solidFill>
+                  </a:tcPr>
+                </a:tc>
+                <a:tc>
+                  <a:txBody>
+                    <a:bodyPr wrap="square"/>
+                    <a:lstStyle/>
+                    <a:p>
+                      <a:pPr algn="l"/>
+                      <a:r>
+                        <a:rPr sz="860" b="0">
                           <a:solidFill>
                             <a:srgbClr val="0E1726"/>
                           </a:solidFill>
@@ -11701,15 +12048,15 @@
                   </a:tcPr>
                 </a:tc>
               </a:tr>
-              <a:tr h="288036">
-                <a:tc>
-                  <a:txBody>
-                    <a:bodyPr wrap="square"/>
-                    <a:lstStyle/>
-                    <a:p>
-                      <a:pPr algn="l"/>
-                      <a:r>
-                        <a:rPr sz="900" b="0">
+              <a:tr h="265176">
+                <a:tc>
+                  <a:txBody>
+                    <a:bodyPr wrap="square"/>
+                    <a:lstStyle/>
+                    <a:p>
+                      <a:pPr algn="l"/>
+                      <a:r>
+                        <a:rPr sz="860" b="0">
                           <a:solidFill>
                             <a:srgbClr val="0E1726"/>
                           </a:solidFill>
@@ -11732,7 +12079,7 @@
                     <a:p>
                       <a:pPr algn="ctr"/>
                       <a:r>
-                        <a:rPr sz="1050" b="1">
+                        <a:rPr sz="1010" b="1">
                           <a:solidFill>
                             <a:srgbClr val="1E8A5F"/>
                           </a:solidFill>
@@ -11755,7 +12102,7 @@
                     <a:p>
                       <a:pPr algn="ctr"/>
                       <a:r>
-                        <a:rPr sz="1050" b="1">
+                        <a:rPr sz="1010" b="1">
                           <a:solidFill>
                             <a:srgbClr val="0E1726"/>
                           </a:solidFill>
@@ -11778,7 +12125,7 @@
                     <a:p>
                       <a:pPr algn="ctr"/>
                       <a:r>
-                        <a:rPr sz="900" b="0">
+                        <a:rPr sz="860" b="0">
                           <a:solidFill>
                             <a:srgbClr val="C0332B"/>
                           </a:solidFill>
@@ -11801,13 +12148,36 @@
                     <a:p>
                       <a:pPr algn="l"/>
                       <a:r>
-                        <a:rPr sz="900" b="0">
+                        <a:rPr sz="860" b="0">
+                          <a:solidFill>
+                            <a:srgbClr val="1E8A5F"/>
+                          </a:solidFill>
+                          <a:latin typeface="Inter"/>
+                        </a:rPr>
+                        <a:t>✔ 30,3% и 58,5%</a:t>
+                      </a:r>
+                    </a:p>
+                  </a:txBody>
+                  <a:tcPr marL="64008" marR="54864" marT="27432" marB="27432" anchor="ctr">
+                    <a:solidFill>
+                      <a:srgbClr val="F2F5F9"/>
+                    </a:solidFill>
+                  </a:tcPr>
+                </a:tc>
+                <a:tc>
+                  <a:txBody>
+                    <a:bodyPr wrap="square"/>
+                    <a:lstStyle/>
+                    <a:p>
+                      <a:pPr algn="l"/>
+                      <a:r>
+                        <a:rPr sz="860" b="0">
                           <a:solidFill>
                             <a:srgbClr val="0E1726"/>
                           </a:solidFill>
                           <a:latin typeface="Inter"/>
                         </a:rPr>
-                        <a:t>inkofood, слайд 53: 30,3% и 58,5%</a:t>
+                        <a:t>inkofood, слайд 53</a:t>
                       </a:r>
                     </a:p>
                   </a:txBody>
@@ -11818,15 +12188,15 @@
                   </a:tcPr>
                 </a:tc>
               </a:tr>
-              <a:tr h="288036">
-                <a:tc>
-                  <a:txBody>
-                    <a:bodyPr wrap="square"/>
-                    <a:lstStyle/>
-                    <a:p>
-                      <a:pPr algn="l"/>
-                      <a:r>
-                        <a:rPr sz="900" b="0">
+              <a:tr h="265176">
+                <a:tc>
+                  <a:txBody>
+                    <a:bodyPr wrap="square"/>
+                    <a:lstStyle/>
+                    <a:p>
+                      <a:pPr algn="l"/>
+                      <a:r>
+                        <a:rPr sz="860" b="0">
                           <a:solidFill>
                             <a:srgbClr val="0E1726"/>
                           </a:solidFill>
@@ -11849,7 +12219,7 @@
                     <a:p>
                       <a:pPr algn="ctr"/>
                       <a:r>
-                        <a:rPr sz="1050" b="1">
+                        <a:rPr sz="1010" b="1">
                           <a:solidFill>
                             <a:srgbClr val="1E8A5F"/>
                           </a:solidFill>
@@ -11872,7 +12242,7 @@
                     <a:p>
                       <a:pPr algn="ctr"/>
                       <a:r>
-                        <a:rPr sz="1050" b="1">
+                        <a:rPr sz="1010" b="1">
                           <a:solidFill>
                             <a:srgbClr val="0E1726"/>
                           </a:solidFill>
@@ -11895,7 +12265,7 @@
                     <a:p>
                       <a:pPr algn="ctr"/>
                       <a:r>
-                        <a:rPr sz="900" b="0">
+                        <a:rPr sz="860" b="0">
                           <a:solidFill>
                             <a:srgbClr val="C0332B"/>
                           </a:solidFill>
@@ -11918,7 +12288,30 @@
                     <a:p>
                       <a:pPr algn="l"/>
                       <a:r>
-                        <a:rPr sz="900" b="0">
+                        <a:rPr sz="860" b="0">
+                          <a:solidFill>
+                            <a:srgbClr val="1E8A5F"/>
+                          </a:solidFill>
+                          <a:latin typeface="Inter"/>
+                        </a:rPr>
+                        <a:t>✔ ≈34 / ≈28</a:t>
+                      </a:r>
+                    </a:p>
+                  </a:txBody>
+                  <a:tcPr marL="64008" marR="54864" marT="27432" marB="27432" anchor="ctr">
+                    <a:solidFill>
+                      <a:srgbClr val="FFFFFF"/>
+                    </a:solidFill>
+                  </a:tcPr>
+                </a:tc>
+                <a:tc>
+                  <a:txBody>
+                    <a:bodyPr wrap="square"/>
+                    <a:lstStyle/>
+                    <a:p>
+                      <a:pPr algn="l"/>
+                      <a:r>
+                        <a:rPr sz="860" b="0">
                           <a:solidFill>
                             <a:srgbClr val="0E1726"/>
                           </a:solidFill>
@@ -11935,15 +12328,15 @@
                   </a:tcPr>
                 </a:tc>
               </a:tr>
-              <a:tr h="288036">
-                <a:tc>
-                  <a:txBody>
-                    <a:bodyPr wrap="square"/>
-                    <a:lstStyle/>
-                    <a:p>
-                      <a:pPr algn="l"/>
-                      <a:r>
-                        <a:rPr sz="900" b="0">
+              <a:tr h="265176">
+                <a:tc>
+                  <a:txBody>
+                    <a:bodyPr wrap="square"/>
+                    <a:lstStyle/>
+                    <a:p>
+                      <a:pPr algn="l"/>
+                      <a:r>
+                        <a:rPr sz="860" b="0">
                           <a:solidFill>
                             <a:srgbClr val="0E1726"/>
                           </a:solidFill>
@@ -11966,7 +12359,7 @@
                     <a:p>
                       <a:pPr algn="ctr"/>
                       <a:r>
-                        <a:rPr sz="1050" b="1">
+                        <a:rPr sz="1010" b="1">
                           <a:solidFill>
                             <a:srgbClr val="1E8A5F"/>
                           </a:solidFill>
@@ -11989,7 +12382,7 @@
                     <a:p>
                       <a:pPr algn="ctr"/>
                       <a:r>
-                        <a:rPr sz="1050" b="1">
+                        <a:rPr sz="1010" b="1">
                           <a:solidFill>
                             <a:srgbClr val="C0332B"/>
                           </a:solidFill>
@@ -12012,7 +12405,7 @@
                     <a:p>
                       <a:pPr algn="ctr"/>
                       <a:r>
-                        <a:rPr sz="1050" b="1">
+                        <a:rPr sz="1010" b="1">
                           <a:solidFill>
                             <a:srgbClr val="1E8A5F"/>
                           </a:solidFill>
@@ -12035,7 +12428,30 @@
                     <a:p>
                       <a:pPr algn="l"/>
                       <a:r>
-                        <a:rPr sz="900" b="0">
+                        <a:rPr sz="1010" b="1">
+                          <a:solidFill>
+                            <a:srgbClr val="1E8A5F"/>
+                          </a:solidFill>
+                          <a:latin typeface="Inter"/>
+                        </a:rPr>
+                        <a:t>✔</a:t>
+                      </a:r>
+                    </a:p>
+                  </a:txBody>
+                  <a:tcPr marL="64008" marR="54864" marT="27432" marB="27432" anchor="ctr">
+                    <a:solidFill>
+                      <a:srgbClr val="F2F5F9"/>
+                    </a:solidFill>
+                  </a:tcPr>
+                </a:tc>
+                <a:tc>
+                  <a:txBody>
+                    <a:bodyPr wrap="square"/>
+                    <a:lstStyle/>
+                    <a:p>
+                      <a:pPr algn="l"/>
+                      <a:r>
+                        <a:rPr sz="860" b="0">
                           <a:solidFill>
                             <a:srgbClr val="0E1726"/>
                           </a:solidFill>
@@ -12052,15 +12468,15 @@
                   </a:tcPr>
                 </a:tc>
               </a:tr>
-              <a:tr h="288036">
-                <a:tc>
-                  <a:txBody>
-                    <a:bodyPr wrap="square"/>
-                    <a:lstStyle/>
-                    <a:p>
-                      <a:pPr algn="l"/>
-                      <a:r>
-                        <a:rPr sz="900" b="0">
+              <a:tr h="265176">
+                <a:tc>
+                  <a:txBody>
+                    <a:bodyPr wrap="square"/>
+                    <a:lstStyle/>
+                    <a:p>
+                      <a:pPr algn="l"/>
+                      <a:r>
+                        <a:rPr sz="860" b="0">
                           <a:solidFill>
                             <a:srgbClr val="0E1726"/>
                           </a:solidFill>
@@ -12083,7 +12499,7 @@
                     <a:p>
                       <a:pPr algn="ctr"/>
                       <a:r>
-                        <a:rPr sz="1050" b="1">
+                        <a:rPr sz="1010" b="1">
                           <a:solidFill>
                             <a:srgbClr val="0E1726"/>
                           </a:solidFill>
@@ -12106,7 +12522,7 @@
                     <a:p>
                       <a:pPr algn="ctr"/>
                       <a:r>
-                        <a:rPr sz="1050" b="1">
+                        <a:rPr sz="1010" b="1">
                           <a:solidFill>
                             <a:srgbClr val="1E8A5F"/>
                           </a:solidFill>
@@ -12129,7 +12545,7 @@
                     <a:p>
                       <a:pPr algn="ctr"/>
                       <a:r>
-                        <a:rPr sz="1050" b="1">
+                        <a:rPr sz="1010" b="1">
                           <a:solidFill>
                             <a:srgbClr val="0E1726"/>
                           </a:solidFill>
@@ -12152,7 +12568,30 @@
                     <a:p>
                       <a:pPr algn="l"/>
                       <a:r>
-                        <a:rPr sz="900" b="0">
+                        <a:rPr sz="1010" b="1">
+                          <a:solidFill>
+                            <a:srgbClr val="1E8A5F"/>
+                          </a:solidFill>
+                          <a:latin typeface="Inter"/>
+                        </a:rPr>
+                        <a:t>✔</a:t>
+                      </a:r>
+                    </a:p>
+                  </a:txBody>
+                  <a:tcPr marL="64008" marR="54864" marT="27432" marB="27432" anchor="ctr">
+                    <a:solidFill>
+                      <a:srgbClr val="FFFFFF"/>
+                    </a:solidFill>
+                  </a:tcPr>
+                </a:tc>
+                <a:tc>
+                  <a:txBody>
+                    <a:bodyPr wrap="square"/>
+                    <a:lstStyle/>
+                    <a:p>
+                      <a:pPr algn="l"/>
+                      <a:r>
+                        <a:rPr sz="860" b="0">
                           <a:solidFill>
                             <a:srgbClr val="0E1726"/>
                           </a:solidFill>
@@ -12169,15 +12608,15 @@
                   </a:tcPr>
                 </a:tc>
               </a:tr>
-              <a:tr h="288036">
-                <a:tc>
-                  <a:txBody>
-                    <a:bodyPr wrap="square"/>
-                    <a:lstStyle/>
-                    <a:p>
-                      <a:pPr algn="l"/>
-                      <a:r>
-                        <a:rPr sz="900" b="0">
+              <a:tr h="265176">
+                <a:tc>
+                  <a:txBody>
+                    <a:bodyPr wrap="square"/>
+                    <a:lstStyle/>
+                    <a:p>
+                      <a:pPr algn="l"/>
+                      <a:r>
+                        <a:rPr sz="860" b="0">
                           <a:solidFill>
                             <a:srgbClr val="0E1726"/>
                           </a:solidFill>
@@ -12200,7 +12639,7 @@
                     <a:p>
                       <a:pPr algn="ctr"/>
                       <a:r>
-                        <a:rPr sz="1050" b="1">
+                        <a:rPr sz="1010" b="1">
                           <a:solidFill>
                             <a:srgbClr val="0E1726"/>
                           </a:solidFill>
@@ -12223,7 +12662,7 @@
                     <a:p>
                       <a:pPr algn="ctr"/>
                       <a:r>
-                        <a:rPr sz="1050" b="1">
+                        <a:rPr sz="1010" b="1">
                           <a:solidFill>
                             <a:srgbClr val="1E8A5F"/>
                           </a:solidFill>
@@ -12246,7 +12685,7 @@
                     <a:p>
                       <a:pPr algn="ctr"/>
                       <a:r>
-                        <a:rPr sz="1050" b="1">
+                        <a:rPr sz="1010" b="1">
                           <a:solidFill>
                             <a:srgbClr val="0E1726"/>
                           </a:solidFill>
@@ -12269,7 +12708,30 @@
                     <a:p>
                       <a:pPr algn="l"/>
                       <a:r>
-                        <a:rPr sz="900" b="0">
+                        <a:rPr sz="860" b="0">
+                          <a:solidFill>
+                            <a:srgbClr val="1E8A5F"/>
+                          </a:solidFill>
+                          <a:latin typeface="Inter"/>
+                        </a:rPr>
+                        <a:t>✔ 31,3 / 32,9 и 22,2 / 21,9</a:t>
+                      </a:r>
+                    </a:p>
+                  </a:txBody>
+                  <a:tcPr marL="64008" marR="54864" marT="27432" marB="27432" anchor="ctr">
+                    <a:solidFill>
+                      <a:srgbClr val="F2F5F9"/>
+                    </a:solidFill>
+                  </a:tcPr>
+                </a:tc>
+                <a:tc>
+                  <a:txBody>
+                    <a:bodyPr wrap="square"/>
+                    <a:lstStyle/>
+                    <a:p>
+                      <a:pPr algn="l"/>
+                      <a:r>
+                        <a:rPr sz="860" b="0">
                           <a:solidFill>
                             <a:srgbClr val="0E1726"/>
                           </a:solidFill>
@@ -12282,6 +12744,146 @@
                   <a:tcPr marL="64008" marR="54864" marT="27432" marB="27432" anchor="ctr">
                     <a:solidFill>
                       <a:srgbClr val="F2F5F9"/>
+                    </a:solidFill>
+                  </a:tcPr>
+                </a:tc>
+              </a:tr>
+              <a:tr h="265176">
+                <a:tc>
+                  <a:txBody>
+                    <a:bodyPr wrap="square"/>
+                    <a:lstStyle/>
+                    <a:p>
+                      <a:pPr algn="l"/>
+                      <a:r>
+                        <a:rPr sz="860" b="0">
+                          <a:solidFill>
+                            <a:srgbClr val="0E1726"/>
+                          </a:solidFill>
+                          <a:latin typeface="Inter"/>
+                        </a:rPr>
+                        <a:t>«58% ориентируются на курируемые предложения»</a:t>
+                      </a:r>
+                    </a:p>
+                  </a:txBody>
+                  <a:tcPr marL="64008" marR="54864" marT="27432" marB="27432" anchor="ctr">
+                    <a:solidFill>
+                      <a:srgbClr val="FFFFFF"/>
+                    </a:solidFill>
+                  </a:tcPr>
+                </a:tc>
+                <a:tc>
+                  <a:txBody>
+                    <a:bodyPr wrap="square"/>
+                    <a:lstStyle/>
+                    <a:p>
+                      <a:pPr algn="ctr"/>
+                      <a:r>
+                        <a:rPr sz="1010" b="1">
+                          <a:solidFill>
+                            <a:srgbClr val="0E1726"/>
+                          </a:solidFill>
+                          <a:latin typeface="Inter"/>
+                        </a:rPr>
+                        <a:t>—</a:t>
+                      </a:r>
+                    </a:p>
+                  </a:txBody>
+                  <a:tcPr marL="64008" marR="54864" marT="27432" marB="27432" anchor="ctr">
+                    <a:solidFill>
+                      <a:srgbClr val="FFFFFF"/>
+                    </a:solidFill>
+                  </a:tcPr>
+                </a:tc>
+                <a:tc>
+                  <a:txBody>
+                    <a:bodyPr wrap="square"/>
+                    <a:lstStyle/>
+                    <a:p>
+                      <a:pPr algn="ctr"/>
+                      <a:r>
+                        <a:rPr sz="1010" b="1">
+                          <a:solidFill>
+                            <a:srgbClr val="0E1726"/>
+                          </a:solidFill>
+                          <a:latin typeface="Inter"/>
+                        </a:rPr>
+                        <a:t>—</a:t>
+                      </a:r>
+                    </a:p>
+                  </a:txBody>
+                  <a:tcPr marL="64008" marR="54864" marT="27432" marB="27432" anchor="ctr">
+                    <a:solidFill>
+                      <a:srgbClr val="FFFFFF"/>
+                    </a:solidFill>
+                  </a:tcPr>
+                </a:tc>
+                <a:tc>
+                  <a:txBody>
+                    <a:bodyPr wrap="square"/>
+                    <a:lstStyle/>
+                    <a:p>
+                      <a:pPr algn="ctr"/>
+                      <a:r>
+                        <a:rPr sz="1010" b="1">
+                          <a:solidFill>
+                            <a:srgbClr val="0E1726"/>
+                          </a:solidFill>
+                          <a:latin typeface="Inter"/>
+                        </a:rPr>
+                        <a:t>—</a:t>
+                      </a:r>
+                    </a:p>
+                  </a:txBody>
+                  <a:tcPr marL="64008" marR="54864" marT="27432" marB="27432" anchor="ctr">
+                    <a:solidFill>
+                      <a:srgbClr val="FFFFFF"/>
+                    </a:solidFill>
+                  </a:tcPr>
+                </a:tc>
+                <a:tc>
+                  <a:txBody>
+                    <a:bodyPr wrap="square"/>
+                    <a:lstStyle/>
+                    <a:p>
+                      <a:pPr algn="l"/>
+                      <a:r>
+                        <a:rPr sz="860" b="0">
+                          <a:solidFill>
+                            <a:srgbClr val="C0332B"/>
+                          </a:solidFill>
+                          <a:latin typeface="Inter"/>
+                        </a:rPr>
+                        <a:t>✘ страница пустая</a:t>
+                      </a:r>
+                    </a:p>
+                  </a:txBody>
+                  <a:tcPr marL="64008" marR="54864" marT="27432" marB="27432" anchor="ctr">
+                    <a:solidFill>
+                      <a:srgbClr val="FFFFFF"/>
+                    </a:solidFill>
+                  </a:tcPr>
+                </a:tc>
+                <a:tc>
+                  <a:txBody>
+                    <a:bodyPr wrap="square"/>
+                    <a:lstStyle/>
+                    <a:p>
+                      <a:pPr algn="l"/>
+                      <a:r>
+                        <a:rPr sz="860" b="0">
+                          <a:solidFill>
+                            <a:srgbClr val="0E1726"/>
+                          </a:solidFill>
+                          <a:latin typeface="Inter"/>
+                        </a:rPr>
+                        <a:t>sber-global, page=16: чисел нет; 58% — слайды 22 и 26</a:t>
+                      </a:r>
+                    </a:p>
+                  </a:txBody>
+                  <a:tcPr marL="64008" marR="54864" marT="27432" marB="27432" anchor="ctr">
+                    <a:solidFill>
+                      <a:srgbClr val="FFFFFF"/>
                     </a:solidFill>
                   </a:tcPr>
                 </a:tc>
@@ -12320,7 +12922,7 @@
                 </a:solidFill>
                 <a:latin typeface="Inter"/>
               </a:rPr>
-              <a:t>Счёт по этой таблице: Клод 8 из 8 (где участвовал), Грок 2 из 3, Гемини 1 из 9. Полный счёт по всем 103 проверкам — 18 из 18, 5 из 7 и 46 из 78 (приложение A пояснения).</a:t>
+              <a:t>Счёт по таблице: Клод 8 из 8 (где участвовал), Грок 2 из 3, Гемини — 1 из 9 в первой итерации и 9 из 9 во второй. Полный счёт по 91 проверке — 18 из 18, 5 из 7 и 65 из 66 (приложение A пояснения).</a:t>
             </a:r>
           </a:p>
         </p:txBody>
@@ -15133,7 +15735,7 @@
                 </a:solidFill>
                 <a:latin typeface="Inter"/>
               </a:rPr>
-              <a:t>Самый подробный разбор продукта — с пометками: зелёное подтверждено колодой, красное нет</a:t>
+              <a:t>Во второй итерации подтверждается всё, кроме одной ссылки: 65 из 66 проверок</a:t>
             </a:r>
           </a:p>
         </p:txBody>
@@ -15278,7 +15880,7 @@
         </p:nvGraphicFramePr>
         <p:xfrm>
           <a:off x="658368" y="1828800"/>
-          <a:ext cx="10881360" cy="3529584"/>
+          <a:ext cx="10881360" cy="3931920"/>
         </p:xfrm>
         <a:graphic>
           <a:graphicData uri="http://schemas.openxmlformats.org/drawingml/2006/table">
@@ -15287,9 +15889,10 @@
                 <a:tableStyleId>{5C22544A-7EE6-4342-B048-85BDC9FD1C3A}</a:tableStyleId>
               </a:tblPr>
               <a:tblGrid>
-                <a:gridCol w="5943600"/>
-                <a:gridCol w="1325880"/>
-                <a:gridCol w="3611880"/>
+                <a:gridCol w="5760720"/>
+                <a:gridCol w="1051560"/>
+                <a:gridCol w="1051560"/>
+                <a:gridCol w="3017520"/>
               </a:tblGrid>
               <a:tr h="310896">
                 <a:tc>
@@ -15305,7 +15908,7 @@
                           </a:solidFill>
                           <a:latin typeface="Inter"/>
                         </a:rPr>
-                        <a:t>Находка</a:t>
+                        <a:t>Что разобрано</a:t>
                       </a:r>
                     </a:p>
                   </a:txBody>
@@ -15328,6 +15931,29 @@
                           </a:solidFill>
                           <a:latin typeface="Inter"/>
                         </a:rPr>
+                        <a:t>Объём</a:t>
+                      </a:r>
+                    </a:p>
+                  </a:txBody>
+                  <a:tcPr marL="64008" marR="54864" marT="27432" marB="27432" anchor="ctr">
+                    <a:solidFill>
+                      <a:srgbClr val="0E1726"/>
+                    </a:solidFill>
+                  </a:tcPr>
+                </a:tc>
+                <a:tc>
+                  <a:txBody>
+                    <a:bodyPr wrap="square"/>
+                    <a:lstStyle/>
+                    <a:p>
+                      <a:pPr algn="l"/>
+                      <a:r>
+                        <a:rPr sz="950" b="1">
+                          <a:solidFill>
+                            <a:srgbClr val="FFFFFF"/>
+                          </a:solidFill>
+                          <a:latin typeface="Inter"/>
+                        </a:rPr>
                         <a:t>Статус</a:t>
                       </a:r>
                     </a:p>
@@ -15362,21 +15988,21 @@
                   </a:tcPr>
                 </a:tc>
               </a:tr>
-              <a:tr h="402336">
-                <a:tc>
-                  <a:txBody>
-                    <a:bodyPr wrap="square"/>
-                    <a:lstStyle/>
-                    <a:p>
-                      <a:pPr algn="l"/>
-                      <a:r>
-                        <a:rPr sz="880" b="0">
+              <a:tr h="329184">
+                <a:tc>
+                  <a:txBody>
+                    <a:bodyPr wrap="square"/>
+                    <a:lstStyle/>
+                    <a:p>
+                      <a:pPr algn="l"/>
+                      <a:r>
+                        <a:rPr sz="860" b="0">
                           <a:solidFill>
                             <a:srgbClr val="0E1726"/>
                           </a:solidFill>
                           <a:latin typeface="Inter"/>
                         </a:rPr>
-                        <a:t>Городская структура выборки: Москва 300, СПб 150, Екатеринбург 150; Минск 150, Брест 75, Гомель 75</a:t>
+                        <a:t>Демография и профиль выборки: пол, дети, восемь возрастных групп, доход</a:t>
                       </a:r>
                     </a:p>
                   </a:txBody>
@@ -15393,13 +16019,930 @@
                     <a:p>
                       <a:pPr algn="l"/>
                       <a:r>
-                        <a:rPr sz="880" b="0">
+                        <a:rPr sz="860" b="0">
+                          <a:solidFill>
+                            <a:srgbClr val="0E1726"/>
+                          </a:solidFill>
+                          <a:latin typeface="Inter"/>
+                        </a:rPr>
+                        <a:t>6 чисел</a:t>
+                      </a:r>
+                    </a:p>
+                  </a:txBody>
+                  <a:tcPr marL="64008" marR="54864" marT="27432" marB="27432" anchor="ctr">
+                    <a:solidFill>
+                      <a:srgbClr val="FFFFFF"/>
+                    </a:solidFill>
+                  </a:tcPr>
+                </a:tc>
+                <a:tc>
+                  <a:txBody>
+                    <a:bodyPr wrap="square"/>
+                    <a:lstStyle/>
+                    <a:p>
+                      <a:pPr algn="l"/>
+                      <a:r>
+                        <a:rPr sz="860" b="0">
+                          <a:solidFill>
+                            <a:srgbClr val="1E8A5F"/>
+                          </a:solidFill>
+                          <a:latin typeface="Inter"/>
+                        </a:rPr>
+                        <a:t>подтв.</a:t>
+                      </a:r>
+                    </a:p>
+                  </a:txBody>
+                  <a:tcPr marL="64008" marR="54864" marT="27432" marB="27432" anchor="ctr">
+                    <a:solidFill>
+                      <a:srgbClr val="FFFFFF"/>
+                    </a:solidFill>
+                  </a:tcPr>
+                </a:tc>
+                <a:tc>
+                  <a:txBody>
+                    <a:bodyPr wrap="square"/>
+                    <a:lstStyle/>
+                    <a:p>
+                      <a:pPr algn="l"/>
+                      <a:r>
+                        <a:rPr sz="860" b="0">
+                          <a:solidFill>
+                            <a:srgbClr val="0E1726"/>
+                          </a:solidFill>
+                          <a:latin typeface="Inter"/>
+                        </a:rPr>
+                        <a:t>слайды 2, 65–68</a:t>
+                      </a:r>
+                    </a:p>
+                  </a:txBody>
+                  <a:tcPr marL="64008" marR="54864" marT="27432" marB="27432" anchor="ctr">
+                    <a:solidFill>
+                      <a:srgbClr val="FFFFFF"/>
+                    </a:solidFill>
+                  </a:tcPr>
+                </a:tc>
+              </a:tr>
+              <a:tr h="329184">
+                <a:tc>
+                  <a:txBody>
+                    <a:bodyPr wrap="square"/>
+                    <a:lstStyle/>
+                    <a:p>
+                      <a:pPr algn="l"/>
+                      <a:r>
+                        <a:rPr sz="860" b="0">
+                          <a:solidFill>
+                            <a:srgbClr val="0E1726"/>
+                          </a:solidFill>
+                          <a:latin typeface="Inter"/>
+                        </a:rPr>
+                        <a:t>Репертуар: 12 позиций в двух странах и кратности 2,6 и 2,8 раза</a:t>
+                      </a:r>
+                    </a:p>
+                  </a:txBody>
+                  <a:tcPr marL="64008" marR="54864" marT="27432" marB="27432" anchor="ctr">
+                    <a:solidFill>
+                      <a:srgbClr val="F2F5F9"/>
+                    </a:solidFill>
+                  </a:tcPr>
+                </a:tc>
+                <a:tc>
+                  <a:txBody>
+                    <a:bodyPr wrap="square"/>
+                    <a:lstStyle/>
+                    <a:p>
+                      <a:pPr algn="l"/>
+                      <a:r>
+                        <a:rPr sz="860" b="0">
+                          <a:solidFill>
+                            <a:srgbClr val="0E1726"/>
+                          </a:solidFill>
+                          <a:latin typeface="Inter"/>
+                        </a:rPr>
+                        <a:t>13 пар</a:t>
+                      </a:r>
+                    </a:p>
+                  </a:txBody>
+                  <a:tcPr marL="64008" marR="54864" marT="27432" marB="27432" anchor="ctr">
+                    <a:solidFill>
+                      <a:srgbClr val="F2F5F9"/>
+                    </a:solidFill>
+                  </a:tcPr>
+                </a:tc>
+                <a:tc>
+                  <a:txBody>
+                    <a:bodyPr wrap="square"/>
+                    <a:lstStyle/>
+                    <a:p>
+                      <a:pPr algn="l"/>
+                      <a:r>
+                        <a:rPr sz="860" b="0">
+                          <a:solidFill>
+                            <a:srgbClr val="1E8A5F"/>
+                          </a:solidFill>
+                          <a:latin typeface="Inter"/>
+                        </a:rPr>
+                        <a:t>подтв.</a:t>
+                      </a:r>
+                    </a:p>
+                  </a:txBody>
+                  <a:tcPr marL="64008" marR="54864" marT="27432" marB="27432" anchor="ctr">
+                    <a:solidFill>
+                      <a:srgbClr val="F2F5F9"/>
+                    </a:solidFill>
+                  </a:tcPr>
+                </a:tc>
+                <a:tc>
+                  <a:txBody>
+                    <a:bodyPr wrap="square"/>
+                    <a:lstStyle/>
+                    <a:p>
+                      <a:pPr algn="l"/>
+                      <a:r>
+                        <a:rPr sz="860" b="0">
+                          <a:solidFill>
+                            <a:srgbClr val="0E1726"/>
+                          </a:solidFill>
+                          <a:latin typeface="Inter"/>
+                        </a:rPr>
+                        <a:t>слайд 7</a:t>
+                      </a:r>
+                    </a:p>
+                  </a:txBody>
+                  <a:tcPr marL="64008" marR="54864" marT="27432" marB="27432" anchor="ctr">
+                    <a:solidFill>
+                      <a:srgbClr val="F2F5F9"/>
+                    </a:solidFill>
+                  </a:tcPr>
+                </a:tc>
+              </a:tr>
+              <a:tr h="329184">
+                <a:tc>
+                  <a:txBody>
+                    <a:bodyPr wrap="square"/>
+                    <a:lstStyle/>
+                    <a:p>
+                      <a:pPr algn="l"/>
+                      <a:r>
+                        <a:rPr sz="860" b="0">
+                          <a:solidFill>
+                            <a:srgbClr val="0E1726"/>
+                          </a:solidFill>
+                          <a:latin typeface="Inter"/>
+                        </a:rPr>
+                        <a:t>Нарезка: сценарии по странам, характер покупки, барьеры упаковки</a:t>
+                      </a:r>
+                    </a:p>
+                  </a:txBody>
+                  <a:tcPr marL="64008" marR="54864" marT="27432" marB="27432" anchor="ctr">
+                    <a:solidFill>
+                      <a:srgbClr val="FFFFFF"/>
+                    </a:solidFill>
+                  </a:tcPr>
+                </a:tc>
+                <a:tc>
+                  <a:txBody>
+                    <a:bodyPr wrap="square"/>
+                    <a:lstStyle/>
+                    <a:p>
+                      <a:pPr algn="l"/>
+                      <a:r>
+                        <a:rPr sz="860" b="0">
+                          <a:solidFill>
+                            <a:srgbClr val="0E1726"/>
+                          </a:solidFill>
+                          <a:latin typeface="Inter"/>
+                        </a:rPr>
+                        <a:t>11 чисел</a:t>
+                      </a:r>
+                    </a:p>
+                  </a:txBody>
+                  <a:tcPr marL="64008" marR="54864" marT="27432" marB="27432" anchor="ctr">
+                    <a:solidFill>
+                      <a:srgbClr val="FFFFFF"/>
+                    </a:solidFill>
+                  </a:tcPr>
+                </a:tc>
+                <a:tc>
+                  <a:txBody>
+                    <a:bodyPr wrap="square"/>
+                    <a:lstStyle/>
+                    <a:p>
+                      <a:pPr algn="l"/>
+                      <a:r>
+                        <a:rPr sz="860" b="0">
+                          <a:solidFill>
+                            <a:srgbClr val="1E8A5F"/>
+                          </a:solidFill>
+                          <a:latin typeface="Inter"/>
+                        </a:rPr>
+                        <a:t>подтв.</a:t>
+                      </a:r>
+                    </a:p>
+                  </a:txBody>
+                  <a:tcPr marL="64008" marR="54864" marT="27432" marB="27432" anchor="ctr">
+                    <a:solidFill>
+                      <a:srgbClr val="FFFFFF"/>
+                    </a:solidFill>
+                  </a:tcPr>
+                </a:tc>
+                <a:tc>
+                  <a:txBody>
+                    <a:bodyPr wrap="square"/>
+                    <a:lstStyle/>
+                    <a:p>
+                      <a:pPr algn="l"/>
+                      <a:r>
+                        <a:rPr sz="860" b="0">
+                          <a:solidFill>
+                            <a:srgbClr val="0E1726"/>
+                          </a:solidFill>
+                          <a:latin typeface="Inter"/>
+                        </a:rPr>
+                        <a:t>слайды 19–20, 23</a:t>
+                      </a:r>
+                    </a:p>
+                  </a:txBody>
+                  <a:tcPr marL="64008" marR="54864" marT="27432" marB="27432" anchor="ctr">
+                    <a:solidFill>
+                      <a:srgbClr val="FFFFFF"/>
+                    </a:solidFill>
+                  </a:tcPr>
+                </a:tc>
+              </a:tr>
+              <a:tr h="329184">
+                <a:tc>
+                  <a:txBody>
+                    <a:bodyPr wrap="square"/>
+                    <a:lstStyle/>
+                    <a:p>
+                      <a:pPr algn="l"/>
+                      <a:r>
+                        <a:rPr sz="860" b="0">
+                          <a:solidFill>
+                            <a:srgbClr val="0E1726"/>
+                          </a:solidFill>
+                          <a:latin typeface="Inter"/>
+                        </a:rPr>
+                        <a:t>Сервелат: частоты РФ и РБ, маркеры сорта, сценарии</a:t>
+                      </a:r>
+                    </a:p>
+                  </a:txBody>
+                  <a:tcPr marL="64008" marR="54864" marT="27432" marB="27432" anchor="ctr">
+                    <a:solidFill>
+                      <a:srgbClr val="F2F5F9"/>
+                    </a:solidFill>
+                  </a:tcPr>
+                </a:tc>
+                <a:tc>
+                  <a:txBody>
+                    <a:bodyPr wrap="square"/>
+                    <a:lstStyle/>
+                    <a:p>
+                      <a:pPr algn="l"/>
+                      <a:r>
+                        <a:rPr sz="860" b="0">
+                          <a:solidFill>
+                            <a:srgbClr val="0E1726"/>
+                          </a:solidFill>
+                          <a:latin typeface="Inter"/>
+                        </a:rPr>
+                        <a:t>14 чисел</a:t>
+                      </a:r>
+                    </a:p>
+                  </a:txBody>
+                  <a:tcPr marL="64008" marR="54864" marT="27432" marB="27432" anchor="ctr">
+                    <a:solidFill>
+                      <a:srgbClr val="F2F5F9"/>
+                    </a:solidFill>
+                  </a:tcPr>
+                </a:tc>
+                <a:tc>
+                  <a:txBody>
+                    <a:bodyPr wrap="square"/>
+                    <a:lstStyle/>
+                    <a:p>
+                      <a:pPr algn="l"/>
+                      <a:r>
+                        <a:rPr sz="860" b="0">
+                          <a:solidFill>
+                            <a:srgbClr val="1E8A5F"/>
+                          </a:solidFill>
+                          <a:latin typeface="Inter"/>
+                        </a:rPr>
+                        <a:t>подтв.</a:t>
+                      </a:r>
+                    </a:p>
+                  </a:txBody>
+                  <a:tcPr marL="64008" marR="54864" marT="27432" marB="27432" anchor="ctr">
+                    <a:solidFill>
+                      <a:srgbClr val="F2F5F9"/>
+                    </a:solidFill>
+                  </a:tcPr>
+                </a:tc>
+                <a:tc>
+                  <a:txBody>
+                    <a:bodyPr wrap="square"/>
+                    <a:lstStyle/>
+                    <a:p>
+                      <a:pPr algn="l"/>
+                      <a:r>
+                        <a:rPr sz="860" b="0">
+                          <a:solidFill>
+                            <a:srgbClr val="0E1726"/>
+                          </a:solidFill>
+                          <a:latin typeface="Inter"/>
+                        </a:rPr>
+                        <a:t>слайды 25–27</a:t>
+                      </a:r>
+                    </a:p>
+                  </a:txBody>
+                  <a:tcPr marL="64008" marR="54864" marT="27432" marB="27432" anchor="ctr">
+                    <a:solidFill>
+                      <a:srgbClr val="F2F5F9"/>
+                    </a:solidFill>
+                  </a:tcPr>
+                </a:tc>
+              </a:tr>
+              <a:tr h="329184">
+                <a:tc>
+                  <a:txBody>
+                    <a:bodyPr wrap="square"/>
+                    <a:lstStyle/>
+                    <a:p>
+                      <a:pPr algn="l"/>
+                      <a:r>
+                        <a:rPr sz="860" b="0">
+                          <a:solidFill>
+                            <a:srgbClr val="0E1726"/>
+                          </a:solidFill>
+                          <a:latin typeface="Inter"/>
+                        </a:rPr>
+                        <a:t>Белок: важность 66,9 / 68,1 и клеймо 55,3 / 58,9 — суммы по столбцам</a:t>
+                      </a:r>
+                    </a:p>
+                  </a:txBody>
+                  <a:tcPr marL="64008" marR="54864" marT="27432" marB="27432" anchor="ctr">
+                    <a:solidFill>
+                      <a:srgbClr val="FFFFFF"/>
+                    </a:solidFill>
+                  </a:tcPr>
+                </a:tc>
+                <a:tc>
+                  <a:txBody>
+                    <a:bodyPr wrap="square"/>
+                    <a:lstStyle/>
+                    <a:p>
+                      <a:pPr algn="l"/>
+                      <a:r>
+                        <a:rPr sz="860" b="0">
+                          <a:solidFill>
+                            <a:srgbClr val="0E1726"/>
+                          </a:solidFill>
+                          <a:latin typeface="Inter"/>
+                        </a:rPr>
+                        <a:t>8 чисел</a:t>
+                      </a:r>
+                    </a:p>
+                  </a:txBody>
+                  <a:tcPr marL="64008" marR="54864" marT="27432" marB="27432" anchor="ctr">
+                    <a:solidFill>
+                      <a:srgbClr val="FFFFFF"/>
+                    </a:solidFill>
+                  </a:tcPr>
+                </a:tc>
+                <a:tc>
+                  <a:txBody>
+                    <a:bodyPr wrap="square"/>
+                    <a:lstStyle/>
+                    <a:p>
+                      <a:pPr algn="l"/>
+                      <a:r>
+                        <a:rPr sz="860" b="0">
+                          <a:solidFill>
+                            <a:srgbClr val="1E8A5F"/>
+                          </a:solidFill>
+                          <a:latin typeface="Inter"/>
+                        </a:rPr>
+                        <a:t>подтв.</a:t>
+                      </a:r>
+                    </a:p>
+                  </a:txBody>
+                  <a:tcPr marL="64008" marR="54864" marT="27432" marB="27432" anchor="ctr">
+                    <a:solidFill>
+                      <a:srgbClr val="FFFFFF"/>
+                    </a:solidFill>
+                  </a:tcPr>
+                </a:tc>
+                <a:tc>
+                  <a:txBody>
+                    <a:bodyPr wrap="square"/>
+                    <a:lstStyle/>
+                    <a:p>
+                      <a:pPr algn="l"/>
+                      <a:r>
+                        <a:rPr sz="860" b="0">
+                          <a:solidFill>
+                            <a:srgbClr val="0E1726"/>
+                          </a:solidFill>
+                          <a:latin typeface="Inter"/>
+                        </a:rPr>
+                        <a:t>слайды 29–31, 44, 46</a:t>
+                      </a:r>
+                    </a:p>
+                  </a:txBody>
+                  <a:tcPr marL="64008" marR="54864" marT="27432" marB="27432" anchor="ctr">
+                    <a:solidFill>
+                      <a:srgbClr val="FFFFFF"/>
+                    </a:solidFill>
+                  </a:tcPr>
+                </a:tc>
+              </a:tr>
+              <a:tr h="329184">
+                <a:tc>
+                  <a:txBody>
+                    <a:bodyPr wrap="square"/>
+                    <a:lstStyle/>
+                    <a:p>
+                      <a:pPr algn="l"/>
+                      <a:r>
+                        <a:rPr sz="860" b="0">
+                          <a:solidFill>
+                            <a:srgbClr val="0E1726"/>
+                          </a:solidFill>
+                          <a:latin typeface="Inter"/>
+                        </a:rPr>
+                        <a:t>Упаковка и вес: оформление, обязательные элементы, антипатии, форматы</a:t>
+                      </a:r>
+                    </a:p>
+                  </a:txBody>
+                  <a:tcPr marL="64008" marR="54864" marT="27432" marB="27432" anchor="ctr">
+                    <a:solidFill>
+                      <a:srgbClr val="F2F5F9"/>
+                    </a:solidFill>
+                  </a:tcPr>
+                </a:tc>
+                <a:tc>
+                  <a:txBody>
+                    <a:bodyPr wrap="square"/>
+                    <a:lstStyle/>
+                    <a:p>
+                      <a:pPr algn="l"/>
+                      <a:r>
+                        <a:rPr sz="860" b="0">
+                          <a:solidFill>
+                            <a:srgbClr val="0E1726"/>
+                          </a:solidFill>
+                          <a:latin typeface="Inter"/>
+                        </a:rPr>
+                        <a:t>20 чисел</a:t>
+                      </a:r>
+                    </a:p>
+                  </a:txBody>
+                  <a:tcPr marL="64008" marR="54864" marT="27432" marB="27432" anchor="ctr">
+                    <a:solidFill>
+                      <a:srgbClr val="F2F5F9"/>
+                    </a:solidFill>
+                  </a:tcPr>
+                </a:tc>
+                <a:tc>
+                  <a:txBody>
+                    <a:bodyPr wrap="square"/>
+                    <a:lstStyle/>
+                    <a:p>
+                      <a:pPr algn="l"/>
+                      <a:r>
+                        <a:rPr sz="860" b="0">
+                          <a:solidFill>
+                            <a:srgbClr val="1E8A5F"/>
+                          </a:solidFill>
+                          <a:latin typeface="Inter"/>
+                        </a:rPr>
+                        <a:t>подтв.</a:t>
+                      </a:r>
+                    </a:p>
+                  </a:txBody>
+                  <a:tcPr marL="64008" marR="54864" marT="27432" marB="27432" anchor="ctr">
+                    <a:solidFill>
+                      <a:srgbClr val="F2F5F9"/>
+                    </a:solidFill>
+                  </a:tcPr>
+                </a:tc>
+                <a:tc>
+                  <a:txBody>
+                    <a:bodyPr wrap="square"/>
+                    <a:lstStyle/>
+                    <a:p>
+                      <a:pPr algn="l"/>
+                      <a:r>
+                        <a:rPr sz="860" b="0">
+                          <a:solidFill>
+                            <a:srgbClr val="0E1726"/>
+                          </a:solidFill>
+                          <a:latin typeface="Inter"/>
+                        </a:rPr>
+                        <a:t>слайды 33–36</a:t>
+                      </a:r>
+                    </a:p>
+                  </a:txBody>
+                  <a:tcPr marL="64008" marR="54864" marT="27432" marB="27432" anchor="ctr">
+                    <a:solidFill>
+                      <a:srgbClr val="F2F5F9"/>
+                    </a:solidFill>
+                  </a:tcPr>
+                </a:tc>
+              </a:tr>
+              <a:tr h="329184">
+                <a:tc>
+                  <a:txBody>
+                    <a:bodyPr wrap="square"/>
+                    <a:lstStyle/>
+                    <a:p>
+                      <a:pPr algn="l"/>
+                      <a:r>
+                        <a:rPr sz="860" b="0">
+                          <a:solidFill>
+                            <a:srgbClr val="0E1726"/>
+                          </a:solidFill>
+                          <a:latin typeface="Inter"/>
+                        </a:rPr>
+                        <a:t>Премиум-варёная и ГОСТ: принятие, доказательства, коридор доплаты</a:t>
+                      </a:r>
+                    </a:p>
+                  </a:txBody>
+                  <a:tcPr marL="64008" marR="54864" marT="27432" marB="27432" anchor="ctr">
+                    <a:solidFill>
+                      <a:srgbClr val="FFFFFF"/>
+                    </a:solidFill>
+                  </a:tcPr>
+                </a:tc>
+                <a:tc>
+                  <a:txBody>
+                    <a:bodyPr wrap="square"/>
+                    <a:lstStyle/>
+                    <a:p>
+                      <a:pPr algn="l"/>
+                      <a:r>
+                        <a:rPr sz="860" b="0">
+                          <a:solidFill>
+                            <a:srgbClr val="0E1726"/>
+                          </a:solidFill>
+                          <a:latin typeface="Inter"/>
+                        </a:rPr>
+                        <a:t>12 чисел</a:t>
+                      </a:r>
+                    </a:p>
+                  </a:txBody>
+                  <a:tcPr marL="64008" marR="54864" marT="27432" marB="27432" anchor="ctr">
+                    <a:solidFill>
+                      <a:srgbClr val="FFFFFF"/>
+                    </a:solidFill>
+                  </a:tcPr>
+                </a:tc>
+                <a:tc>
+                  <a:txBody>
+                    <a:bodyPr wrap="square"/>
+                    <a:lstStyle/>
+                    <a:p>
+                      <a:pPr algn="l"/>
+                      <a:r>
+                        <a:rPr sz="860" b="0">
+                          <a:solidFill>
+                            <a:srgbClr val="1E8A5F"/>
+                          </a:solidFill>
+                          <a:latin typeface="Inter"/>
+                        </a:rPr>
+                        <a:t>подтв.</a:t>
+                      </a:r>
+                    </a:p>
+                  </a:txBody>
+                  <a:tcPr marL="64008" marR="54864" marT="27432" marB="27432" anchor="ctr">
+                    <a:solidFill>
+                      <a:srgbClr val="FFFFFF"/>
+                    </a:solidFill>
+                  </a:tcPr>
+                </a:tc>
+                <a:tc>
+                  <a:txBody>
+                    <a:bodyPr wrap="square"/>
+                    <a:lstStyle/>
+                    <a:p>
+                      <a:pPr algn="l"/>
+                      <a:r>
+                        <a:rPr sz="860" b="0">
+                          <a:solidFill>
+                            <a:srgbClr val="0E1726"/>
+                          </a:solidFill>
+                          <a:latin typeface="Inter"/>
+                        </a:rPr>
+                        <a:t>слайды 38–39, 43</a:t>
+                      </a:r>
+                    </a:p>
+                  </a:txBody>
+                  <a:tcPr marL="64008" marR="54864" marT="27432" marB="27432" anchor="ctr">
+                    <a:solidFill>
+                      <a:srgbClr val="FFFFFF"/>
+                    </a:solidFill>
+                  </a:tcPr>
+                </a:tc>
+              </a:tr>
+              <a:tr h="329184">
+                <a:tc>
+                  <a:txBody>
+                    <a:bodyPr wrap="square"/>
+                    <a:lstStyle/>
+                    <a:p>
+                      <a:pPr algn="l"/>
+                      <a:r>
+                        <a:rPr sz="860" b="0">
+                          <a:solidFill>
+                            <a:srgbClr val="0E1726"/>
+                          </a:solidFill>
+                          <a:latin typeface="Inter"/>
+                        </a:rPr>
+                        <a:t>Бренды: воронка 9 брендов, причины непокупки, средние оценки, атрибуты БТ, Natura и Гостинца</a:t>
+                      </a:r>
+                    </a:p>
+                  </a:txBody>
+                  <a:tcPr marL="64008" marR="54864" marT="27432" marB="27432" anchor="ctr">
+                    <a:solidFill>
+                      <a:srgbClr val="F2F5F9"/>
+                    </a:solidFill>
+                  </a:tcPr>
+                </a:tc>
+                <a:tc>
+                  <a:txBody>
+                    <a:bodyPr wrap="square"/>
+                    <a:lstStyle/>
+                    <a:p>
+                      <a:pPr algn="l"/>
+                      <a:r>
+                        <a:rPr sz="860" b="0">
+                          <a:solidFill>
+                            <a:srgbClr val="0E1726"/>
+                          </a:solidFill>
+                          <a:latin typeface="Inter"/>
+                        </a:rPr>
+                        <a:t>24 числа</a:t>
+                      </a:r>
+                    </a:p>
+                  </a:txBody>
+                  <a:tcPr marL="64008" marR="54864" marT="27432" marB="27432" anchor="ctr">
+                    <a:solidFill>
+                      <a:srgbClr val="F2F5F9"/>
+                    </a:solidFill>
+                  </a:tcPr>
+                </a:tc>
+                <a:tc>
+                  <a:txBody>
+                    <a:bodyPr wrap="square"/>
+                    <a:lstStyle/>
+                    <a:p>
+                      <a:pPr algn="l"/>
+                      <a:r>
+                        <a:rPr sz="860" b="0">
+                          <a:solidFill>
+                            <a:srgbClr val="1E8A5F"/>
+                          </a:solidFill>
+                          <a:latin typeface="Inter"/>
+                        </a:rPr>
+                        <a:t>подтв.</a:t>
+                      </a:r>
+                    </a:p>
+                  </a:txBody>
+                  <a:tcPr marL="64008" marR="54864" marT="27432" marB="27432" anchor="ctr">
+                    <a:solidFill>
+                      <a:srgbClr val="F2F5F9"/>
+                    </a:solidFill>
+                  </a:tcPr>
+                </a:tc>
+                <a:tc>
+                  <a:txBody>
+                    <a:bodyPr wrap="square"/>
+                    <a:lstStyle/>
+                    <a:p>
+                      <a:pPr algn="l"/>
+                      <a:r>
+                        <a:rPr sz="860" b="0">
+                          <a:solidFill>
+                            <a:srgbClr val="0E1726"/>
+                          </a:solidFill>
+                          <a:latin typeface="Inter"/>
+                        </a:rPr>
+                        <a:t>слайды 49–63</a:t>
+                      </a:r>
+                    </a:p>
+                  </a:txBody>
+                  <a:tcPr marL="64008" marR="54864" marT="27432" marB="27432" anchor="ctr">
+                    <a:solidFill>
+                      <a:srgbClr val="F2F5F9"/>
+                    </a:solidFill>
+                  </a:tcPr>
+                </a:tc>
+              </a:tr>
+              <a:tr h="329184">
+                <a:tc>
+                  <a:txBody>
+                    <a:bodyPr wrap="square"/>
+                    <a:lstStyle/>
+                    <a:p>
+                      <a:pPr algn="l"/>
+                      <a:r>
+                        <a:rPr sz="860" b="0">
+                          <a:solidFill>
+                            <a:srgbClr val="0E1726"/>
+                          </a:solidFill>
+                          <a:latin typeface="Inter"/>
+                        </a:rPr>
+                        <a:t>Смежные колоды: Нильсен, РОМИР, СберМаркетинг, ЭКОПСИ</a:t>
+                      </a:r>
+                    </a:p>
+                  </a:txBody>
+                  <a:tcPr marL="64008" marR="54864" marT="27432" marB="27432" anchor="ctr">
+                    <a:solidFill>
+                      <a:srgbClr val="FFFFFF"/>
+                    </a:solidFill>
+                  </a:tcPr>
+                </a:tc>
+                <a:tc>
+                  <a:txBody>
+                    <a:bodyPr wrap="square"/>
+                    <a:lstStyle/>
+                    <a:p>
+                      <a:pPr algn="l"/>
+                      <a:r>
+                        <a:rPr sz="860" b="0">
+                          <a:solidFill>
+                            <a:srgbClr val="0E1726"/>
+                          </a:solidFill>
+                          <a:latin typeface="Inter"/>
+                        </a:rPr>
+                        <a:t>19 из 20</a:t>
+                      </a:r>
+                    </a:p>
+                  </a:txBody>
+                  <a:tcPr marL="64008" marR="54864" marT="27432" marB="27432" anchor="ctr">
+                    <a:solidFill>
+                      <a:srgbClr val="FFFFFF"/>
+                    </a:solidFill>
+                  </a:tcPr>
+                </a:tc>
+                <a:tc>
+                  <a:txBody>
+                    <a:bodyPr wrap="square"/>
+                    <a:lstStyle/>
+                    <a:p>
+                      <a:pPr algn="l"/>
+                      <a:r>
+                        <a:rPr sz="860" b="0">
+                          <a:solidFill>
+                            <a:srgbClr val="1E8A5F"/>
+                          </a:solidFill>
+                          <a:latin typeface="Inter"/>
+                        </a:rPr>
+                        <a:t>подтв.</a:t>
+                      </a:r>
+                    </a:p>
+                  </a:txBody>
+                  <a:tcPr marL="64008" marR="54864" marT="27432" marB="27432" anchor="ctr">
+                    <a:solidFill>
+                      <a:srgbClr val="FFFFFF"/>
+                    </a:solidFill>
+                  </a:tcPr>
+                </a:tc>
+                <a:tc>
+                  <a:txBody>
+                    <a:bodyPr wrap="square"/>
+                    <a:lstStyle/>
+                    <a:p>
+                      <a:pPr algn="l"/>
+                      <a:r>
+                        <a:rPr sz="860" b="0">
+                          <a:solidFill>
+                            <a:srgbClr val="0E1726"/>
+                          </a:solidFill>
+                          <a:latin typeface="Inter"/>
+                        </a:rPr>
+                        <a:t>page=5, 8, 15, 22, 33–35; romir 4, 7, 18, 21; sber 5, 7, 9, 25; ekopsi 10, 19</a:t>
+                      </a:r>
+                    </a:p>
+                  </a:txBody>
+                  <a:tcPr marL="64008" marR="54864" marT="27432" marB="27432" anchor="ctr">
+                    <a:solidFill>
+                      <a:srgbClr val="FFFFFF"/>
+                    </a:solidFill>
+                  </a:tcPr>
+                </a:tc>
+              </a:tr>
+              <a:tr h="329184">
+                <a:tc>
+                  <a:txBody>
+                    <a:bodyPr wrap="square"/>
+                    <a:lstStyle/>
+                    <a:p>
+                      <a:pPr algn="l"/>
+                      <a:r>
+                        <a:rPr sz="860" b="0">
+                          <a:solidFill>
+                            <a:srgbClr val="0E1726"/>
+                          </a:solidFill>
+                          <a:latin typeface="Inter"/>
+                        </a:rPr>
+                        <a:t>«58% ориентируются на курируемые предложения» со ссылкой на page=16</a:t>
+                      </a:r>
+                    </a:p>
+                  </a:txBody>
+                  <a:tcPr marL="64008" marR="54864" marT="27432" marB="27432" anchor="ctr">
+                    <a:solidFill>
+                      <a:srgbClr val="F2F5F9"/>
+                    </a:solidFill>
+                  </a:tcPr>
+                </a:tc>
+                <a:tc>
+                  <a:txBody>
+                    <a:bodyPr wrap="square"/>
+                    <a:lstStyle/>
+                    <a:p>
+                      <a:pPr algn="l"/>
+                      <a:r>
+                        <a:rPr sz="860" b="0">
+                          <a:solidFill>
+                            <a:srgbClr val="0E1726"/>
+                          </a:solidFill>
+                          <a:latin typeface="Inter"/>
+                        </a:rPr>
+                        <a:t>1 число</a:t>
+                      </a:r>
+                    </a:p>
+                  </a:txBody>
+                  <a:tcPr marL="64008" marR="54864" marT="27432" marB="27432" anchor="ctr">
+                    <a:solidFill>
+                      <a:srgbClr val="F2F5F9"/>
+                    </a:solidFill>
+                  </a:tcPr>
+                </a:tc>
+                <a:tc>
+                  <a:txBody>
+                    <a:bodyPr wrap="square"/>
+                    <a:lstStyle/>
+                    <a:p>
+                      <a:pPr algn="l"/>
+                      <a:r>
+                        <a:rPr sz="860" b="0">
                           <a:solidFill>
                             <a:srgbClr val="C0332B"/>
                           </a:solidFill>
                           <a:latin typeface="Inter"/>
                         </a:rPr>
-                        <a:t>не подтв.</a:t>
+                        <a:t>искаж.</a:t>
+                      </a:r>
+                    </a:p>
+                  </a:txBody>
+                  <a:tcPr marL="64008" marR="54864" marT="27432" marB="27432" anchor="ctr">
+                    <a:solidFill>
+                      <a:srgbClr val="F2F5F9"/>
+                    </a:solidFill>
+                  </a:tcPr>
+                </a:tc>
+                <a:tc>
+                  <a:txBody>
+                    <a:bodyPr wrap="square"/>
+                    <a:lstStyle/>
+                    <a:p>
+                      <a:pPr algn="l"/>
+                      <a:r>
+                        <a:rPr sz="860" b="0">
+                          <a:solidFill>
+                            <a:srgbClr val="0E1726"/>
+                          </a:solidFill>
+                          <a:latin typeface="Inter"/>
+                        </a:rPr>
+                        <a:t>на page=16 чисел нет; 58% — слайды 22 и 26, о другом</a:t>
+                      </a:r>
+                    </a:p>
+                  </a:txBody>
+                  <a:tcPr marL="64008" marR="54864" marT="27432" marB="27432" anchor="ctr">
+                    <a:solidFill>
+                      <a:srgbClr val="F2F5F9"/>
+                    </a:solidFill>
+                  </a:tcPr>
+                </a:tc>
+              </a:tr>
+              <a:tr h="329184">
+                <a:tc>
+                  <a:txBody>
+                    <a:bodyPr wrap="square"/>
+                    <a:lstStyle/>
+                    <a:p>
+                      <a:pPr algn="l"/>
+                      <a:r>
+                        <a:rPr sz="860" b="0">
+                          <a:solidFill>
+                            <a:srgbClr val="0E1726"/>
+                          </a:solidFill>
+                          <a:latin typeface="Inter"/>
+                        </a:rPr>
+                        <a:t>Формула белка на пачке: «X г белка на 100 г • мяса Y% • без соевого белка»</a:t>
                       </a:r>
                     </a:p>
                   </a:txBody>
@@ -15416,13 +16959,13 @@
                     <a:p>
                       <a:pPr algn="l"/>
                       <a:r>
-                        <a:rPr sz="880" b="0">
+                        <a:rPr sz="860" b="0">
                           <a:solidFill>
                             <a:srgbClr val="0E1726"/>
                           </a:solidFill>
                           <a:latin typeface="Inter"/>
                         </a:rPr>
-                        <a:t>в колоде только «РФ 600 / РБ 300», слайд 2</a:t>
+                        <a:t>шаблон</a:t>
                       </a:r>
                     </a:p>
                   </a:txBody>
@@ -15432,500 +16975,49 @@
                     </a:solidFill>
                   </a:tcPr>
                 </a:tc>
-              </a:tr>
-              <a:tr h="402336">
-                <a:tc>
-                  <a:txBody>
-                    <a:bodyPr wrap="square"/>
-                    <a:lstStyle/>
-                    <a:p>
-                      <a:pPr algn="l"/>
-                      <a:r>
-                        <a:rPr sz="880" b="0">
+                <a:tc>
+                  <a:txBody>
+                    <a:bodyPr wrap="square"/>
+                    <a:lstStyle/>
+                    <a:p>
+                      <a:pPr algn="l"/>
+                      <a:r>
+                        <a:rPr sz="860" b="0">
+                          <a:solidFill>
+                            <a:srgbClr val="1E8A5F"/>
+                          </a:solidFill>
+                          <a:latin typeface="Inter"/>
+                        </a:rPr>
+                        <a:t>подтв.</a:t>
+                      </a:r>
+                    </a:p>
+                  </a:txBody>
+                  <a:tcPr marL="64008" marR="54864" marT="27432" marB="27432" anchor="ctr">
+                    <a:solidFill>
+                      <a:srgbClr val="FFFFFF"/>
+                    </a:solidFill>
+                  </a:tcPr>
+                </a:tc>
+                <a:tc>
+                  <a:txBody>
+                    <a:bodyPr wrap="square"/>
+                    <a:lstStyle/>
+                    <a:p>
+                      <a:pPr algn="l"/>
+                      <a:r>
+                        <a:rPr sz="860" b="0">
                           <a:solidFill>
                             <a:srgbClr val="0E1726"/>
                           </a:solidFill>
                           <a:latin typeface="Inter"/>
                         </a:rPr>
-                        <a:t>Декомпозиция рынка 2025: 11,7% = 11,0 инфляция + 0,8 реальный спрос; СТМ 15,2%, онлайн 10,2%</a:t>
-                      </a:r>
-                    </a:p>
-                  </a:txBody>
-                  <a:tcPr marL="64008" marR="54864" marT="27432" marB="27432" anchor="ctr">
-                    <a:solidFill>
-                      <a:srgbClr val="F2F5F9"/>
-                    </a:solidFill>
-                  </a:tcPr>
-                </a:tc>
-                <a:tc>
-                  <a:txBody>
-                    <a:bodyPr wrap="square"/>
-                    <a:lstStyle/>
-                    <a:p>
-                      <a:pPr algn="l"/>
-                      <a:r>
-                        <a:rPr sz="880" b="0">
-                          <a:solidFill>
-                            <a:srgbClr val="1E8A5F"/>
-                          </a:solidFill>
-                          <a:latin typeface="Inter"/>
-                        </a:rPr>
-                        <a:t>подтв.</a:t>
-                      </a:r>
-                    </a:p>
-                  </a:txBody>
-                  <a:tcPr marL="64008" marR="54864" marT="27432" marB="27432" anchor="ctr">
-                    <a:solidFill>
-                      <a:srgbClr val="F2F5F9"/>
-                    </a:solidFill>
-                  </a:tcPr>
-                </a:tc>
-                <a:tc>
-                  <a:txBody>
-                    <a:bodyPr wrap="square"/>
-                    <a:lstStyle/>
-                    <a:p>
-                      <a:pPr algn="l"/>
-                      <a:r>
-                        <a:rPr sz="880" b="0">
-                          <a:solidFill>
-                            <a:srgbClr val="0E1726"/>
-                          </a:solidFill>
-                          <a:latin typeface="Inter"/>
-                        </a:rPr>
-                        <a:t>nielsen-itogi, слайды 5, 33, 35</a:t>
-                      </a:r>
-                    </a:p>
-                  </a:txBody>
-                  <a:tcPr marL="64008" marR="54864" marT="27432" marB="27432" anchor="ctr">
-                    <a:solidFill>
-                      <a:srgbClr val="F2F5F9"/>
-                    </a:solidFill>
-                  </a:tcPr>
-                </a:tc>
-              </a:tr>
-              <a:tr h="402336">
-                <a:tc>
-                  <a:txBody>
-                    <a:bodyPr wrap="square"/>
-                    <a:lstStyle/>
-                    <a:p>
-                      <a:pPr algn="l"/>
-                      <a:r>
-                        <a:rPr sz="880" b="0">
-                          <a:solidFill>
-                            <a:srgbClr val="0E1726"/>
-                          </a:solidFill>
-                          <a:latin typeface="Inter"/>
-                        </a:rPr>
-                        <a:t>Нарезка: ситуации — завтрак 64,3%, перекус 60,3%, дорога 49,8%, гости 49,7% (РФ); дорога 54,2% (РБ)</a:t>
+                        <a:t>значения дают рецептура и протокол; опора — 21% скепсиса и 8% страха сои, page=31</a:t>
                       </a:r>
                     </a:p>
                   </a:txBody>
                   <a:tcPr marL="64008" marR="54864" marT="27432" marB="27432" anchor="ctr">
                     <a:solidFill>
                       <a:srgbClr val="FFFFFF"/>
-                    </a:solidFill>
-                  </a:tcPr>
-                </a:tc>
-                <a:tc>
-                  <a:txBody>
-                    <a:bodyPr wrap="square"/>
-                    <a:lstStyle/>
-                    <a:p>
-                      <a:pPr algn="l"/>
-                      <a:r>
-                        <a:rPr sz="880" b="0">
-                          <a:solidFill>
-                            <a:srgbClr val="1E8A5F"/>
-                          </a:solidFill>
-                          <a:latin typeface="Inter"/>
-                        </a:rPr>
-                        <a:t>подтв.</a:t>
-                      </a:r>
-                    </a:p>
-                  </a:txBody>
-                  <a:tcPr marL="64008" marR="54864" marT="27432" marB="27432" anchor="ctr">
-                    <a:solidFill>
-                      <a:srgbClr val="FFFFFF"/>
-                    </a:solidFill>
-                  </a:tcPr>
-                </a:tc>
-                <a:tc>
-                  <a:txBody>
-                    <a:bodyPr wrap="square"/>
-                    <a:lstStyle/>
-                    <a:p>
-                      <a:pPr algn="l"/>
-                      <a:r>
-                        <a:rPr sz="880" b="0">
-                          <a:solidFill>
-                            <a:srgbClr val="0E1726"/>
-                          </a:solidFill>
-                          <a:latin typeface="Inter"/>
-                        </a:rPr>
-                        <a:t>слайд 19</a:t>
-                      </a:r>
-                    </a:p>
-                  </a:txBody>
-                  <a:tcPr marL="64008" marR="54864" marT="27432" marB="27432" anchor="ctr">
-                    <a:solidFill>
-                      <a:srgbClr val="FFFFFF"/>
-                    </a:solidFill>
-                  </a:tcPr>
-                </a:tc>
-              </a:tr>
-              <a:tr h="402336">
-                <a:tc>
-                  <a:txBody>
-                    <a:bodyPr wrap="square"/>
-                    <a:lstStyle/>
-                    <a:p>
-                      <a:pPr algn="l"/>
-                      <a:r>
-                        <a:rPr sz="880" b="0">
-                          <a:solidFill>
-                            <a:srgbClr val="0E1726"/>
-                          </a:solidFill>
-                          <a:latin typeface="Inter"/>
-                        </a:rPr>
-                        <a:t>Нарезка: барьеры — переплата за упаковку 58,2% / 62,1%, привычка резать 51,4% / 55,0%</a:t>
-                      </a:r>
-                    </a:p>
-                  </a:txBody>
-                  <a:tcPr marL="64008" marR="54864" marT="27432" marB="27432" anchor="ctr">
-                    <a:solidFill>
-                      <a:srgbClr val="F2F5F9"/>
-                    </a:solidFill>
-                  </a:tcPr>
-                </a:tc>
-                <a:tc>
-                  <a:txBody>
-                    <a:bodyPr wrap="square"/>
-                    <a:lstStyle/>
-                    <a:p>
-                      <a:pPr algn="l"/>
-                      <a:r>
-                        <a:rPr sz="880" b="0">
-                          <a:solidFill>
-                            <a:srgbClr val="C0332B"/>
-                          </a:solidFill>
-                          <a:latin typeface="Inter"/>
-                        </a:rPr>
-                        <a:t>не подтв.</a:t>
-                      </a:r>
-                    </a:p>
-                  </a:txBody>
-                  <a:tcPr marL="64008" marR="54864" marT="27432" marB="27432" anchor="ctr">
-                    <a:solidFill>
-                      <a:srgbClr val="F2F5F9"/>
-                    </a:solidFill>
-                  </a:tcPr>
-                </a:tc>
-                <a:tc>
-                  <a:txBody>
-                    <a:bodyPr wrap="square"/>
-                    <a:lstStyle/>
-                    <a:p>
-                      <a:pPr algn="l"/>
-                      <a:r>
-                        <a:rPr sz="880" b="0">
-                          <a:solidFill>
-                            <a:srgbClr val="0E1726"/>
-                          </a:solidFill>
-                          <a:latin typeface="Inter"/>
-                        </a:rPr>
-                        <a:t>слайд 23: трудно открыть ≈34%, не закрыть ≈28%</a:t>
-                      </a:r>
-                    </a:p>
-                  </a:txBody>
-                  <a:tcPr marL="64008" marR="54864" marT="27432" marB="27432" anchor="ctr">
-                    <a:solidFill>
-                      <a:srgbClr val="F2F5F9"/>
-                    </a:solidFill>
-                  </a:tcPr>
-                </a:tc>
-              </a:tr>
-              <a:tr h="402336">
-                <a:tc>
-                  <a:txBody>
-                    <a:bodyPr wrap="square"/>
-                    <a:lstStyle/>
-                    <a:p>
-                      <a:pPr algn="l"/>
-                      <a:r>
-                        <a:rPr sz="880" b="0">
-                          <a:solidFill>
-                            <a:srgbClr val="0E1726"/>
-                          </a:solidFill>
-                          <a:latin typeface="Inter"/>
-                        </a:rPr>
-                        <a:t>Сервелат: частоты и коды сорта — пряный вкус 31%, шпик 23%, копчёность 20%</a:t>
-                      </a:r>
-                    </a:p>
-                  </a:txBody>
-                  <a:tcPr marL="64008" marR="54864" marT="27432" marB="27432" anchor="ctr">
-                    <a:solidFill>
-                      <a:srgbClr val="FFFFFF"/>
-                    </a:solidFill>
-                  </a:tcPr>
-                </a:tc>
-                <a:tc>
-                  <a:txBody>
-                    <a:bodyPr wrap="square"/>
-                    <a:lstStyle/>
-                    <a:p>
-                      <a:pPr algn="l"/>
-                      <a:r>
-                        <a:rPr sz="880" b="0">
-                          <a:solidFill>
-                            <a:srgbClr val="D1820E"/>
-                          </a:solidFill>
-                          <a:latin typeface="Inter"/>
-                        </a:rPr>
-                        <a:t>частично</a:t>
-                      </a:r>
-                    </a:p>
-                  </a:txBody>
-                  <a:tcPr marL="64008" marR="54864" marT="27432" marB="27432" anchor="ctr">
-                    <a:solidFill>
-                      <a:srgbClr val="FFFFFF"/>
-                    </a:solidFill>
-                  </a:tcPr>
-                </a:tc>
-                <a:tc>
-                  <a:txBody>
-                    <a:bodyPr wrap="square"/>
-                    <a:lstStyle/>
-                    <a:p>
-                      <a:pPr algn="l"/>
-                      <a:r>
-                        <a:rPr sz="880" b="0">
-                          <a:solidFill>
-                            <a:srgbClr val="0E1726"/>
-                          </a:solidFill>
-                          <a:latin typeface="Inter"/>
-                        </a:rPr>
-                        <a:t>РФ верно (слайды 25–26), РБ — 31,6 / 31,6 / 29,6, а не 41,2 / 28,1 / 24,2</a:t>
-                      </a:r>
-                    </a:p>
-                  </a:txBody>
-                  <a:tcPr marL="64008" marR="54864" marT="27432" marB="27432" anchor="ctr">
-                    <a:solidFill>
-                      <a:srgbClr val="FFFFFF"/>
-                    </a:solidFill>
-                  </a:tcPr>
-                </a:tc>
-              </a:tr>
-              <a:tr h="402336">
-                <a:tc>
-                  <a:txBody>
-                    <a:bodyPr wrap="square"/>
-                    <a:lstStyle/>
-                    <a:p>
-                      <a:pPr algn="l"/>
-                      <a:r>
-                        <a:rPr sz="880" b="0">
-                          <a:solidFill>
-                            <a:srgbClr val="0E1726"/>
-                          </a:solidFill>
-                          <a:latin typeface="Inter"/>
-                        </a:rPr>
-                        <a:t>Премиум: скептики 32,7% / 36,3%; цена 16,2% и упаковка 16,0% премию не делают</a:t>
-                      </a:r>
-                    </a:p>
-                  </a:txBody>
-                  <a:tcPr marL="64008" marR="54864" marT="27432" marB="27432" anchor="ctr">
-                    <a:solidFill>
-                      <a:srgbClr val="F2F5F9"/>
-                    </a:solidFill>
-                  </a:tcPr>
-                </a:tc>
-                <a:tc>
-                  <a:txBody>
-                    <a:bodyPr wrap="square"/>
-                    <a:lstStyle/>
-                    <a:p>
-                      <a:pPr algn="l"/>
-                      <a:r>
-                        <a:rPr sz="880" b="0">
-                          <a:solidFill>
-                            <a:srgbClr val="1E8A5F"/>
-                          </a:solidFill>
-                          <a:latin typeface="Inter"/>
-                        </a:rPr>
-                        <a:t>подтв.</a:t>
-                      </a:r>
-                    </a:p>
-                  </a:txBody>
-                  <a:tcPr marL="64008" marR="54864" marT="27432" marB="27432" anchor="ctr">
-                    <a:solidFill>
-                      <a:srgbClr val="F2F5F9"/>
-                    </a:solidFill>
-                  </a:tcPr>
-                </a:tc>
-                <a:tc>
-                  <a:txBody>
-                    <a:bodyPr wrap="square"/>
-                    <a:lstStyle/>
-                    <a:p>
-                      <a:pPr algn="l"/>
-                      <a:r>
-                        <a:rPr sz="880" b="0">
-                          <a:solidFill>
-                            <a:srgbClr val="0E1726"/>
-                          </a:solidFill>
-                          <a:latin typeface="Inter"/>
-                        </a:rPr>
-                        <a:t>слайды 38–39</a:t>
-                      </a:r>
-                    </a:p>
-                  </a:txBody>
-                  <a:tcPr marL="64008" marR="54864" marT="27432" marB="27432" anchor="ctr">
-                    <a:solidFill>
-                      <a:srgbClr val="F2F5F9"/>
-                    </a:solidFill>
-                  </a:tcPr>
-                </a:tc>
-              </a:tr>
-              <a:tr h="402336">
-                <a:tc>
-                  <a:txBody>
-                    <a:bodyPr wrap="square"/>
-                    <a:lstStyle/>
-                    <a:p>
-                      <a:pPr algn="l"/>
-                      <a:r>
-                        <a:rPr sz="880" b="0">
-                          <a:solidFill>
-                            <a:srgbClr val="0E1726"/>
-                          </a:solidFill>
-                          <a:latin typeface="Inter"/>
-                        </a:rPr>
-                        <a:t>Сегменты 55–75: консервативные 31%, обеспеченные 23%, свободные 21%, усталые 19%, работящие 6%</a:t>
-                      </a:r>
-                    </a:p>
-                  </a:txBody>
-                  <a:tcPr marL="64008" marR="54864" marT="27432" marB="27432" anchor="ctr">
-                    <a:solidFill>
-                      <a:srgbClr val="FFFFFF"/>
-                    </a:solidFill>
-                  </a:tcPr>
-                </a:tc>
-                <a:tc>
-                  <a:txBody>
-                    <a:bodyPr wrap="square"/>
-                    <a:lstStyle/>
-                    <a:p>
-                      <a:pPr algn="l"/>
-                      <a:r>
-                        <a:rPr sz="880" b="0">
-                          <a:solidFill>
-                            <a:srgbClr val="1E8A5F"/>
-                          </a:solidFill>
-                          <a:latin typeface="Inter"/>
-                        </a:rPr>
-                        <a:t>подтв.</a:t>
-                      </a:r>
-                    </a:p>
-                  </a:txBody>
-                  <a:tcPr marL="64008" marR="54864" marT="27432" marB="27432" anchor="ctr">
-                    <a:solidFill>
-                      <a:srgbClr val="FFFFFF"/>
-                    </a:solidFill>
-                  </a:tcPr>
-                </a:tc>
-                <a:tc>
-                  <a:txBody>
-                    <a:bodyPr wrap="square"/>
-                    <a:lstStyle/>
-                    <a:p>
-                      <a:pPr algn="l"/>
-                      <a:r>
-                        <a:rPr sz="880" b="0">
-                          <a:solidFill>
-                            <a:srgbClr val="0E1726"/>
-                          </a:solidFill>
-                          <a:latin typeface="Inter"/>
-                        </a:rPr>
-                        <a:t>серебряный возраст, слайд 5</a:t>
-                      </a:r>
-                    </a:p>
-                  </a:txBody>
-                  <a:tcPr marL="64008" marR="54864" marT="27432" marB="27432" anchor="ctr">
-                    <a:solidFill>
-                      <a:srgbClr val="FFFFFF"/>
-                    </a:solidFill>
-                  </a:tcPr>
-                </a:tc>
-              </a:tr>
-              <a:tr h="402336">
-                <a:tc>
-                  <a:txBody>
-                    <a:bodyPr wrap="square"/>
-                    <a:lstStyle/>
-                    <a:p>
-                      <a:pPr algn="l"/>
-                      <a:r>
-                        <a:rPr sz="880" b="0">
-                          <a:solidFill>
-                            <a:srgbClr val="0E1726"/>
-                          </a:solidFill>
-                          <a:latin typeface="Inter"/>
-                        </a:rPr>
-                        <a:t>Шаблон формулы на пачке: «X г белка на 100 г • мяса Y% • без соевого белка»</a:t>
-                      </a:r>
-                    </a:p>
-                  </a:txBody>
-                  <a:tcPr marL="64008" marR="54864" marT="27432" marB="27432" anchor="ctr">
-                    <a:solidFill>
-                      <a:srgbClr val="F2F5F9"/>
-                    </a:solidFill>
-                  </a:tcPr>
-                </a:tc>
-                <a:tc>
-                  <a:txBody>
-                    <a:bodyPr wrap="square"/>
-                    <a:lstStyle/>
-                    <a:p>
-                      <a:pPr algn="l"/>
-                      <a:r>
-                        <a:rPr sz="880" b="0">
-                          <a:solidFill>
-                            <a:srgbClr val="D1820E"/>
-                          </a:solidFill>
-                          <a:latin typeface="Inter"/>
-                        </a:rPr>
-                        <a:t>шаблон</a:t>
-                      </a:r>
-                    </a:p>
-                  </a:txBody>
-                  <a:tcPr marL="64008" marR="54864" marT="27432" marB="27432" anchor="ctr">
-                    <a:solidFill>
-                      <a:srgbClr val="F2F5F9"/>
-                    </a:solidFill>
-                  </a:tcPr>
-                </a:tc>
-                <a:tc>
-                  <a:txBody>
-                    <a:bodyPr wrap="square"/>
-                    <a:lstStyle/>
-                    <a:p>
-                      <a:pPr algn="l"/>
-                      <a:r>
-                        <a:rPr sz="880" b="0">
-                          <a:solidFill>
-                            <a:srgbClr val="0E1726"/>
-                          </a:solidFill>
-                          <a:latin typeface="Inter"/>
-                        </a:rPr>
-                        <a:t>значения дают рецептура и лабораторный протокол; идея опирается на 21% скепсиса и 8% страха сои, page=31</a:t>
-                      </a:r>
-                    </a:p>
-                  </a:txBody>
-                  <a:tcPr marL="64008" marR="54864" marT="27432" marB="27432" anchor="ctr">
-                    <a:solidFill>
-                      <a:srgbClr val="F2F5F9"/>
                     </a:solidFill>
                   </a:tcPr>
                 </a:tc>
@@ -15942,8 +17034,8 @@
         </p:nvSpPr>
         <p:spPr>
           <a:xfrm>
-            <a:off x="658368" y="5779008"/>
-            <a:ext cx="10881360" cy="457200"/>
+            <a:off x="658368" y="5870448"/>
+            <a:ext cx="10881360" cy="384048"/>
           </a:xfrm>
           <a:prstGeom prst="rect">
             <a:avLst/>
@@ -15968,7 +17060,7 @@
                 </a:solidFill>
                 <a:latin typeface="Inter"/>
               </a:rPr>
-              <a:t>Итого: четыре находки подтверждаются и ценны (декомпозиция рынка, сценарии нарезки, механика премиума, сегменты 55–75), одна частично, две нет. Формула белка — шаблон с заполнителями, а не значение из колоды: числа дают рецептура и лабораторный протокол.</a:t>
+              <a:t>Итого: 65 из 66. Единственное расхождение — ссылка на page=16, где нет ни одного числа. В первой итерации у Гемини было 27 значений, которых нет в колоде, и 5 искажений; во второй их нет.</a:t>
             </a:r>
           </a:p>
         </p:txBody>
@@ -16457,11 +17549,11 @@
                       <a:r>
                         <a:rPr sz="1050" b="1">
                           <a:solidFill>
-                            <a:srgbClr val="606B7A"/>
-                          </a:solidFill>
-                          <a:latin typeface="Inter"/>
-                        </a:rPr>
-                        <a:t>~</a:t>
+                            <a:srgbClr val="1E8A5F"/>
+                          </a:solidFill>
+                          <a:latin typeface="Inter"/>
+                        </a:rPr>
+                        <a:t>✔</a:t>
                       </a:r>
                     </a:p>
                   </a:txBody>
@@ -17491,11 +18583,11 @@
                       <a:r>
                         <a:rPr sz="1050" b="1">
                           <a:solidFill>
-                            <a:srgbClr val="606B7A"/>
-                          </a:solidFill>
-                          <a:latin typeface="Inter"/>
-                        </a:rPr>
-                        <a:t>~</a:t>
+                            <a:srgbClr val="1E8A5F"/>
+                          </a:solidFill>
+                          <a:latin typeface="Inter"/>
+                        </a:rPr>
+                        <a:t>✔</a:t>
                       </a:r>
                     </a:p>
                   </a:txBody>
@@ -17898,7 +18990,7 @@
                 </a:solidFill>
                 <a:latin typeface="Inter"/>
               </a:rPr>
-              <a:t>У Гемини провал в неймах.</a:t>
+              <a:t>У Гемини во второй итерации закрыт весь продукт.</a:t>
             </a:r>
             <a:r>
               <a:rPr sz="1000">
@@ -17916,7 +19008,7 @@
                 </a:solidFill>
                 <a:latin typeface="Inter"/>
               </a:rPr>
-              <a:t>Ассоциации и тесты названий — почти без деталей, хотя по продукту он глубже всех.</a:t>
+              <a:t>Демография, нарезка, сервелат, упаковка, премиум и неймы — с цифрами и адресами.</a:t>
             </a:r>
           </a:p>
         </p:txBody>
@@ -19165,7 +20257,7 @@
                 </a:solidFill>
                 <a:latin typeface="Inter"/>
               </a:rPr>
-              <a:t>КРАСНЫЕ ФЛАГИ</a:t>
+              <a:t>ЧТО ОСТАЛОСЬ</a:t>
             </a:r>
           </a:p>
         </p:txBody>
@@ -19204,7 +20296,7 @@
                 </a:solidFill>
                 <a:latin typeface="Inter"/>
               </a:rPr>
-              <a:t>Значений нет в колоде — в работу не переносить</a:t>
+              <a:t>После второй итерации: одно искажение и два ярлыка</a:t>
             </a:r>
           </a:p>
         </p:txBody>
@@ -19239,7 +20331,7 @@
                 </a:solidFill>
                 <a:latin typeface="Inter"/>
               </a:rPr>
-              <a:t>Все — из работы Гемини; правдоподобны, поэтому опасны. Ниже — отдельным блоком пять искажений</a:t>
+              <a:t>Было 27 значений, которых нет в колоде, и 5 искажений — осталось одно искажение и два спорных ярлыка</a:t>
             </a:r>
           </a:p>
         </p:txBody>
@@ -19384,7 +20476,7 @@
         </p:nvGraphicFramePr>
         <p:xfrm>
           <a:off x="658368" y="1828800"/>
-          <a:ext cx="10881360" cy="3680460"/>
+          <a:ext cx="10881359" cy="2139696"/>
         </p:xfrm>
         <a:graphic>
           <a:graphicData uri="http://schemas.openxmlformats.org/drawingml/2006/table">
@@ -19393,8 +20485,9 @@
                 <a:tableStyleId>{5C22544A-7EE6-4342-B048-85BDC9FD1C3A}</a:tableStyleId>
               </a:tblPr>
               <a:tblGrid>
-                <a:gridCol w="4709160"/>
-                <a:gridCol w="6172200"/>
+                <a:gridCol w="3977639"/>
+                <a:gridCol w="914400"/>
+                <a:gridCol w="5989320"/>
               </a:tblGrid>
               <a:tr h="310896">
                 <a:tc>
@@ -19410,7 +20503,7 @@
                           </a:solidFill>
                           <a:latin typeface="Inter"/>
                         </a:rPr>
-                        <a:t>Утверждение Agent 3</a:t>
+                        <a:t>Что осталось</a:t>
                       </a:r>
                     </a:p>
                   </a:txBody>
@@ -19433,6 +20526,29 @@
                           </a:solidFill>
                           <a:latin typeface="Inter"/>
                         </a:rPr>
+                        <a:t>Агент</a:t>
+                      </a:r>
+                    </a:p>
+                  </a:txBody>
+                  <a:tcPr marL="64008" marR="54864" marT="27432" marB="27432" anchor="ctr">
+                    <a:solidFill>
+                      <a:srgbClr val="0E1726"/>
+                    </a:solidFill>
+                  </a:tcPr>
+                </a:tc>
+                <a:tc>
+                  <a:txBody>
+                    <a:bodyPr wrap="square"/>
+                    <a:lstStyle/>
+                    <a:p>
+                      <a:pPr algn="l"/>
+                      <a:r>
+                        <a:rPr sz="950" b="1">
+                          <a:solidFill>
+                            <a:srgbClr val="FFFFFF"/>
+                          </a:solidFill>
+                          <a:latin typeface="Inter"/>
+                        </a:rPr>
                         <a:t>Что в колоде на самом деле</a:t>
                       </a:r>
                     </a:p>
@@ -19444,21 +20560,21 @@
                   </a:tcPr>
                 </a:tc>
               </a:tr>
-              <a:tr h="306324">
-                <a:tc>
-                  <a:txBody>
-                    <a:bodyPr wrap="square"/>
-                    <a:lstStyle/>
-                    <a:p>
-                      <a:pPr algn="l"/>
-                      <a:r>
-                        <a:rPr sz="860" b="0">
+              <a:tr h="457200">
+                <a:tc>
+                  <a:txBody>
+                    <a:bodyPr wrap="square"/>
+                    <a:lstStyle/>
+                    <a:p>
+                      <a:pPr algn="l"/>
+                      <a:r>
+                        <a:rPr sz="900" b="0">
                           <a:solidFill>
                             <a:srgbClr val="C0332B"/>
                           </a:solidFill>
                           <a:latin typeface="Inter"/>
                         </a:rPr>
-                        <a:t>Онлайн-рынок вырос на +24,3%</a:t>
+                        <a:t>«58% ориентируются на курируемые предложения и спрос» · page=16</a:t>
                       </a:r>
                     </a:p>
                   </a:txBody>
@@ -19475,13 +20591,13 @@
                     <a:p>
                       <a:pPr algn="l"/>
                       <a:r>
-                        <a:rPr sz="860" b="0">
+                        <a:rPr sz="900" b="0">
                           <a:solidFill>
                             <a:srgbClr val="0E1726"/>
                           </a:solidFill>
                           <a:latin typeface="Inter"/>
                         </a:rPr>
-                        <a:t>+35,0% в деньгах, +37,6% в упаковках · nielsen-fmcg, сл. 5, 11, 13</a:t>
+                        <a:t>A3</a:t>
                       </a:r>
                     </a:p>
                   </a:txBody>
@@ -19491,22 +20607,45 @@
                     </a:solidFill>
                   </a:tcPr>
                 </a:tc>
+                <a:tc>
+                  <a:txBody>
+                    <a:bodyPr wrap="square"/>
+                    <a:lstStyle/>
+                    <a:p>
+                      <a:pPr algn="l"/>
+                      <a:r>
+                        <a:rPr sz="900" b="0">
+                          <a:solidFill>
+                            <a:srgbClr val="0E1726"/>
+                          </a:solidFill>
+                          <a:latin typeface="Inter"/>
+                        </a:rPr>
+                        <a:t>на page=16 нет ни одного числа; 58% есть на page=22 (курируемые впечатления) и page=26 (стресс) и к предложениям не относится</a:t>
+                      </a:r>
+                    </a:p>
+                  </a:txBody>
+                  <a:tcPr marL="64008" marR="54864" marT="27432" marB="27432" anchor="ctr">
+                    <a:solidFill>
+                      <a:srgbClr val="FFFFFF"/>
+                    </a:solidFill>
+                  </a:tcPr>
+                </a:tc>
               </a:tr>
-              <a:tr h="306324">
-                <a:tc>
-                  <a:txBody>
-                    <a:bodyPr wrap="square"/>
-                    <a:lstStyle/>
-                    <a:p>
-                      <a:pPr algn="l"/>
-                      <a:r>
-                        <a:rPr sz="860" b="0">
+              <a:tr h="457200">
+                <a:tc>
+                  <a:txBody>
+                    <a:bodyPr wrap="square"/>
+                    <a:lstStyle/>
+                    <a:p>
+                      <a:pPr algn="l"/>
+                      <a:r>
+                        <a:rPr sz="900" b="0">
                           <a:solidFill>
                             <a:srgbClr val="C0332B"/>
                           </a:solidFill>
                           <a:latin typeface="Inter"/>
                         </a:rPr>
-                        <a:t>Доля СТМ в продовольствии 13,8%</a:t>
+                        <a:t>«36% — доля 55+ в панели РОМИР» · page=4</a:t>
                       </a:r>
                     </a:p>
                   </a:txBody>
@@ -19523,13 +20662,13 @@
                     <a:p>
                       <a:pPr algn="l"/>
                       <a:r>
-                        <a:rPr sz="860" b="0">
+                        <a:rPr sz="900" b="0">
                           <a:solidFill>
                             <a:srgbClr val="0E1726"/>
                           </a:solidFill>
                           <a:latin typeface="Inter"/>
                         </a:rPr>
-                        <a:t>15,3% и в 2025, и в 2026 · сл. 8</a:t>
+                        <a:t>A1, A3</a:t>
                       </a:r>
                     </a:p>
                   </a:txBody>
@@ -19539,22 +20678,45 @@
                     </a:solidFill>
                   </a:tcPr>
                 </a:tc>
+                <a:tc>
+                  <a:txBody>
+                    <a:bodyPr wrap="square"/>
+                    <a:lstStyle/>
+                    <a:p>
+                      <a:pPr algn="l"/>
+                      <a:r>
+                        <a:rPr sz="900" b="0">
+                          <a:solidFill>
+                            <a:srgbClr val="0E1726"/>
+                          </a:solidFill>
+                          <a:latin typeface="Inter"/>
+                        </a:rPr>
+                        <a:t>число верное, но на слайде это «процент у скобки группы», база панели не указана: «панель РОМИР» — интерпретация</a:t>
+                      </a:r>
+                    </a:p>
+                  </a:txBody>
+                  <a:tcPr marL="64008" marR="54864" marT="27432" marB="27432" anchor="ctr">
+                    <a:solidFill>
+                      <a:srgbClr val="F2F5F9"/>
+                    </a:solidFill>
+                  </a:tcPr>
+                </a:tc>
               </a:tr>
-              <a:tr h="306324">
-                <a:tc>
-                  <a:txBody>
-                    <a:bodyPr wrap="square"/>
-                    <a:lstStyle/>
-                    <a:p>
-                      <a:pPr algn="l"/>
-                      <a:r>
-                        <a:rPr sz="860" b="0">
+              <a:tr h="457200">
+                <a:tc>
+                  <a:txBody>
+                    <a:bodyPr wrap="square"/>
+                    <a:lstStyle/>
+                    <a:p>
+                      <a:pPr algn="l"/>
+                      <a:r>
+                        <a:rPr sz="900" b="0">
                           <a:solidFill>
                             <a:srgbClr val="C0332B"/>
                           </a:solidFill>
                           <a:latin typeface="Inter"/>
                         </a:rPr>
-                        <a:t>73% покупателей ищут через GEO и ИИ</a:t>
+                        <a:t>Нарезка 45,2% подписана page=41 в таблице портфеля</a:t>
                       </a:r>
                     </a:p>
                   </a:txBody>
@@ -19571,13 +20733,13 @@
                     <a:p>
                       <a:pPr algn="l"/>
                       <a:r>
-                        <a:rPr sz="860" b="0">
+                        <a:rPr sz="900" b="0">
                           <a:solidFill>
                             <a:srgbClr val="0E1726"/>
                           </a:solidFill>
                           <a:latin typeface="Inter"/>
                         </a:rPr>
-                        <a:t>23% начинают поиск с генеративного AI · сл. 7; 73% — «используют AI в быту» · сл. 9</a:t>
+                        <a:t>A3</a:t>
                       </a:r>
                     </a:p>
                   </a:txBody>
@@ -19587,22 +20749,45 @@
                     </a:solidFill>
                   </a:tcPr>
                 </a:tc>
+                <a:tc>
+                  <a:txBody>
+                    <a:bodyPr wrap="square"/>
+                    <a:lstStyle/>
+                    <a:p>
+                      <a:pPr algn="l"/>
+                      <a:r>
+                        <a:rPr sz="900" b="0">
+                          <a:solidFill>
+                            <a:srgbClr val="0E1726"/>
+                          </a:solidFill>
+                          <a:latin typeface="Inter"/>
+                        </a:rPr>
+                        <a:t>45,2% — это репертуар, page=7; на page=41 идеи новинок (рулеты 20, ассорти 15, начинки 13)</a:t>
+                      </a:r>
+                    </a:p>
+                  </a:txBody>
+                  <a:tcPr marL="64008" marR="54864" marT="27432" marB="27432" anchor="ctr">
+                    <a:solidFill>
+                      <a:srgbClr val="FFFFFF"/>
+                    </a:solidFill>
+                  </a:tcPr>
+                </a:tc>
               </a:tr>
-              <a:tr h="306324">
-                <a:tc>
-                  <a:txBody>
-                    <a:bodyPr wrap="square"/>
-                    <a:lstStyle/>
-                    <a:p>
-                      <a:pPr algn="l"/>
-                      <a:r>
-                        <a:rPr sz="860" b="0">
+              <a:tr h="457200">
+                <a:tc>
+                  <a:txBody>
+                    <a:bodyPr wrap="square"/>
+                    <a:lstStyle/>
+                    <a:p>
+                      <a:pPr algn="l"/>
+                      <a:r>
+                        <a:rPr sz="900" b="0">
                           <a:solidFill>
                             <a:srgbClr val="C0332B"/>
                           </a:solidFill>
                           <a:latin typeface="Inter"/>
                         </a:rPr>
-                        <a:t>81% проверяют составы «под микроскопом»</a:t>
+                        <a:t>«Без нитритной соли» как дифференциатор</a:t>
                       </a:r>
                     </a:p>
                   </a:txBody>
@@ -19619,13 +20804,13 @@
                     <a:p>
                       <a:pPr algn="l"/>
                       <a:r>
-                        <a:rPr sz="860" b="0">
+                        <a:rPr sz="900" b="0">
                           <a:solidFill>
                             <a:srgbClr val="0E1726"/>
                           </a:solidFill>
                           <a:latin typeface="Inter"/>
                         </a:rPr>
-                        <a:t>такого значения нет; 74% — это директора по маркетингу · сл. 15</a:t>
+                        <a:t>A2</a:t>
                       </a:r>
                     </a:p>
                   </a:txBody>
@@ -19635,339 +20820,26 @@
                     </a:solidFill>
                   </a:tcPr>
                 </a:tc>
-              </a:tr>
-              <a:tr h="306324">
-                <a:tc>
-                  <a:txBody>
-                    <a:bodyPr wrap="square"/>
-                    <a:lstStyle/>
-                    <a:p>
-                      <a:pPr algn="l"/>
-                      <a:r>
-                        <a:rPr sz="860" b="0">
-                          <a:solidFill>
-                            <a:srgbClr val="C0332B"/>
-                          </a:solidFill>
-                          <a:latin typeface="Inter"/>
-                        </a:rPr>
-                        <a:t>58% готовы платить за прозрачность</a:t>
-                      </a:r>
-                    </a:p>
-                  </a:txBody>
-                  <a:tcPr marL="64008" marR="54864" marT="27432" marB="27432" anchor="ctr">
-                    <a:solidFill>
-                      <a:srgbClr val="FFFFFF"/>
-                    </a:solidFill>
-                  </a:tcPr>
-                </a:tc>
-                <a:tc>
-                  <a:txBody>
-                    <a:bodyPr wrap="square"/>
-                    <a:lstStyle/>
-                    <a:p>
-                      <a:pPr algn="l"/>
-                      <a:r>
-                        <a:rPr sz="860" b="0">
+                <a:tc>
+                  <a:txBody>
+                    <a:bodyPr wrap="square"/>
+                    <a:lstStyle/>
+                    <a:p>
+                      <a:pPr algn="l"/>
+                      <a:r>
+                        <a:rPr sz="900" b="0">
                           <a:solidFill>
                             <a:srgbClr val="0E1726"/>
                           </a:solidFill>
                           <a:latin typeface="Inter"/>
                         </a:rPr>
-                        <a:t>58% — про курируемые впечатления и про стресс · сл. 22, 26</a:t>
-                      </a:r>
-                    </a:p>
-                  </a:txBody>
-                  <a:tcPr marL="64008" marR="54864" marT="27432" marB="27432" anchor="ctr">
-                    <a:solidFill>
-                      <a:srgbClr val="FFFFFF"/>
-                    </a:solidFill>
-                  </a:tcPr>
-                </a:tc>
-              </a:tr>
-              <a:tr h="306324">
-                <a:tc>
-                  <a:txBody>
-                    <a:bodyPr wrap="square"/>
-                    <a:lstStyle/>
-                    <a:p>
-                      <a:pPr algn="l"/>
-                      <a:r>
-                        <a:rPr sz="860" b="0">
-                          <a:solidFill>
-                            <a:srgbClr val="C0332B"/>
-                          </a:solidFill>
-                          <a:latin typeface="Inter"/>
-                        </a:rPr>
-                        <a:t>64% ритейлеров внедряют AI-агентов</a:t>
+                        <a:t>60,7% / 58,7% считают это маркетингом; реальное преимущество — натуральные красители 65,0 / 76,1% · page=42</a:t>
                       </a:r>
                     </a:p>
                   </a:txBody>
                   <a:tcPr marL="64008" marR="54864" marT="27432" marB="27432" anchor="ctr">
                     <a:solidFill>
                       <a:srgbClr val="F2F5F9"/>
-                    </a:solidFill>
-                  </a:tcPr>
-                </a:tc>
-                <a:tc>
-                  <a:txBody>
-                    <a:bodyPr wrap="square"/>
-                    <a:lstStyle/>
-                    <a:p>
-                      <a:pPr algn="l"/>
-                      <a:r>
-                        <a:rPr sz="860" b="0">
-                          <a:solidFill>
-                            <a:srgbClr val="0E1726"/>
-                          </a:solidFill>
-                          <a:latin typeface="Inter"/>
-                        </a:rPr>
-                        <a:t>такого значения нет · сл. 9</a:t>
-                      </a:r>
-                    </a:p>
-                  </a:txBody>
-                  <a:tcPr marL="64008" marR="54864" marT="27432" marB="27432" anchor="ctr">
-                    <a:solidFill>
-                      <a:srgbClr val="F2F5F9"/>
-                    </a:solidFill>
-                  </a:tcPr>
-                </a:tc>
-              </a:tr>
-              <a:tr h="306324">
-                <a:tc>
-                  <a:txBody>
-                    <a:bodyPr wrap="square"/>
-                    <a:lstStyle/>
-                    <a:p>
-                      <a:pPr algn="l"/>
-                      <a:r>
-                        <a:rPr sz="860" b="0">
-                          <a:solidFill>
-                            <a:srgbClr val="C0332B"/>
-                          </a:solidFill>
-                          <a:latin typeface="Inter"/>
-                        </a:rPr>
-                        <a:t>28% e-com у 50+, чек 3 450 ₽, 74% берут доставку, 22% ЗОЖ в корзине</a:t>
-                      </a:r>
-                    </a:p>
-                  </a:txBody>
-                  <a:tcPr marL="64008" marR="54864" marT="27432" marB="27432" anchor="ctr">
-                    <a:solidFill>
-                      <a:srgbClr val="FFFFFF"/>
-                    </a:solidFill>
-                  </a:tcPr>
-                </a:tc>
-                <a:tc>
-                  <a:txBody>
-                    <a:bodyPr wrap="square"/>
-                    <a:lstStyle/>
-                    <a:p>
-                      <a:pPr algn="l"/>
-                      <a:r>
-                        <a:rPr sz="860" b="0">
-                          <a:solidFill>
-                            <a:srgbClr val="0E1726"/>
-                          </a:solidFill>
-                          <a:latin typeface="Inter"/>
-                        </a:rPr>
-                        <a:t>ни одного из четырёх значений; блока про e-commerce в этой колоде нет · сл. 22–26</a:t>
-                      </a:r>
-                    </a:p>
-                  </a:txBody>
-                  <a:tcPr marL="64008" marR="54864" marT="27432" marB="27432" anchor="ctr">
-                    <a:solidFill>
-                      <a:srgbClr val="FFFFFF"/>
-                    </a:solidFill>
-                  </a:tcPr>
-                </a:tc>
-              </a:tr>
-              <a:tr h="306324">
-                <a:tc>
-                  <a:txBody>
-                    <a:bodyPr wrap="square"/>
-                    <a:lstStyle/>
-                    <a:p>
-                      <a:pPr algn="l"/>
-                      <a:r>
-                        <a:rPr sz="860" b="0">
-                          <a:solidFill>
-                            <a:srgbClr val="C0332B"/>
-                          </a:solidFill>
-                          <a:latin typeface="Inter"/>
-                        </a:rPr>
-                        <a:t>Пол 54/46, дети 42/45, доход 68/62, возраст 12/28/31/29, 55+ = 0%</a:t>
-                      </a:r>
-                    </a:p>
-                  </a:txBody>
-                  <a:tcPr marL="64008" marR="54864" marT="27432" marB="27432" anchor="ctr">
-                    <a:solidFill>
-                      <a:srgbClr val="F2F5F9"/>
-                    </a:solidFill>
-                  </a:tcPr>
-                </a:tc>
-                <a:tc>
-                  <a:txBody>
-                    <a:bodyPr wrap="square"/>
-                    <a:lstStyle/>
-                    <a:p>
-                      <a:pPr algn="l"/>
-                      <a:r>
-                        <a:rPr sz="860" b="0">
-                          <a:solidFill>
-                            <a:srgbClr val="0E1726"/>
-                          </a:solidFill>
-                          <a:latin typeface="Inter"/>
-                        </a:rPr>
-                        <a:t>61/39, дети 52%, доход 70%, восемь групп до «Untitled 1» 10,2% · сл. 65–68</a:t>
-                      </a:r>
-                    </a:p>
-                  </a:txBody>
-                  <a:tcPr marL="64008" marR="54864" marT="27432" marB="27432" anchor="ctr">
-                    <a:solidFill>
-                      <a:srgbClr val="F2F5F9"/>
-                    </a:solidFill>
-                  </a:tcPr>
-                </a:tc>
-              </a:tr>
-              <a:tr h="306324">
-                <a:tc>
-                  <a:txBody>
-                    <a:bodyPr wrap="square"/>
-                    <a:lstStyle/>
-                    <a:p>
-                      <a:pPr algn="l"/>
-                      <a:r>
-                        <a:rPr sz="860" b="0">
-                          <a:solidFill>
-                            <a:srgbClr val="C0332B"/>
-                          </a:solidFill>
-                          <a:latin typeface="Inter"/>
-                        </a:rPr>
-                        <a:t>ЭКОПСИ: Z — 23% рынка труда, Y — 54% руководителей, X — 41%, разрыв 3,8 из 5</a:t>
-                      </a:r>
-                    </a:p>
-                  </a:txBody>
-                  <a:tcPr marL="64008" marR="54864" marT="27432" marB="27432" anchor="ctr">
-                    <a:solidFill>
-                      <a:srgbClr val="FFFFFF"/>
-                    </a:solidFill>
-                  </a:tcPr>
-                </a:tc>
-                <a:tc>
-                  <a:txBody>
-                    <a:bodyPr wrap="square"/>
-                    <a:lstStyle/>
-                    <a:p>
-                      <a:pPr algn="l"/>
-                      <a:r>
-                        <a:rPr sz="860" b="0">
-                          <a:solidFill>
-                            <a:srgbClr val="0E1726"/>
-                          </a:solidFill>
-                          <a:latin typeface="Inter"/>
-                        </a:rPr>
-                        <a:t>ни одного из значений; вывод колоды обратный — «отличий между поколениями нет» · сл. 19</a:t>
-                      </a:r>
-                    </a:p>
-                  </a:txBody>
-                  <a:tcPr marL="64008" marR="54864" marT="27432" marB="27432" anchor="ctr">
-                    <a:solidFill>
-                      <a:srgbClr val="FFFFFF"/>
-                    </a:solidFill>
-                  </a:tcPr>
-                </a:tc>
-              </a:tr>
-              <a:tr h="306324">
-                <a:tc>
-                  <a:txBody>
-                    <a:bodyPr wrap="square"/>
-                    <a:lstStyle/>
-                    <a:p>
-                      <a:pPr algn="l"/>
-                      <a:r>
-                        <a:rPr sz="860" b="0">
-                          <a:solidFill>
-                            <a:srgbClr val="C0332B"/>
-                          </a:solidFill>
-                          <a:latin typeface="Inter"/>
-                        </a:rPr>
-                        <a:t>Нарезка 58,2% / 51,4%; сервелат РБ 41,2 / 28,1 / 24,2; «66,7% ставят 7–10»</a:t>
-                      </a:r>
-                    </a:p>
-                  </a:txBody>
-                  <a:tcPr marL="64008" marR="54864" marT="27432" marB="27432" anchor="ctr">
-                    <a:solidFill>
-                      <a:srgbClr val="F2F5F9"/>
-                    </a:solidFill>
-                  </a:tcPr>
-                </a:tc>
-                <a:tc>
-                  <a:txBody>
-                    <a:bodyPr wrap="square"/>
-                    <a:lstStyle/>
-                    <a:p>
-                      <a:pPr algn="l"/>
-                      <a:r>
-                        <a:rPr sz="860" b="0">
-                          <a:solidFill>
-                            <a:srgbClr val="0E1726"/>
-                          </a:solidFill>
-                          <a:latin typeface="Inter"/>
-                        </a:rPr>
-                        <a:t>34 / 28% · сл. 23; 31,6 / 31,6 / 29,6 · сл. 25; 58,5% · сл. 53</a:t>
-                      </a:r>
-                    </a:p>
-                  </a:txBody>
-                  <a:tcPr marL="64008" marR="54864" marT="27432" marB="27432" anchor="ctr">
-                    <a:solidFill>
-                      <a:srgbClr val="F2F5F9"/>
-                    </a:solidFill>
-                  </a:tcPr>
-                </a:tc>
-              </a:tr>
-              <a:tr h="306324">
-                <a:tc>
-                  <a:txBody>
-                    <a:bodyPr wrap="square"/>
-                    <a:lstStyle/>
-                    <a:p>
-                      <a:pPr algn="l"/>
-                      <a:r>
-                        <a:rPr sz="860" b="0">
-                          <a:solidFill>
-                            <a:srgbClr val="C0332B"/>
-                          </a:solidFill>
-                          <a:latin typeface="Inter"/>
-                        </a:rPr>
-                        <a:t>«48,2% пробуют новинки со скидкой», «92% мяса», «окно ≥60% площади»</a:t>
-                      </a:r>
-                    </a:p>
-                  </a:txBody>
-                  <a:tcPr marL="64008" marR="54864" marT="27432" marB="27432" anchor="ctr">
-                    <a:solidFill>
-                      <a:srgbClr val="FFFFFF"/>
-                    </a:solidFill>
-                  </a:tcPr>
-                </a:tc>
-                <a:tc>
-                  <a:txBody>
-                    <a:bodyPr wrap="square"/>
-                    <a:lstStyle/>
-                    <a:p>
-                      <a:pPr algn="l"/>
-                      <a:r>
-                        <a:rPr sz="860" b="0">
-                          <a:solidFill>
-                            <a:srgbClr val="0E1726"/>
-                          </a:solidFill>
-                          <a:latin typeface="Inter"/>
-                        </a:rPr>
-                        <a:t>ни одного из трёх значений в колоде нет</a:t>
-                      </a:r>
-                    </a:p>
-                  </a:txBody>
-                  <a:tcPr marL="64008" marR="54864" marT="27432" marB="27432" anchor="ctr">
-                    <a:solidFill>
-                      <a:srgbClr val="FFFFFF"/>
                     </a:solidFill>
                   </a:tcPr>
                 </a:tc>
@@ -19978,16 +20850,16 @@
       </p:graphicFrame>
       <p:sp>
         <p:nvSpPr>
-          <p:cNvPr id="11" name="Rectangle 10"/>
+          <p:cNvPr id="11" name="Rounded Rectangle 10"/>
           <p:cNvSpPr/>
           <p:nvPr/>
         </p:nvSpPr>
         <p:spPr>
           <a:xfrm>
-            <a:off x="658368" y="5577840"/>
-            <a:ext cx="10881360" cy="694944"/>
-          </a:xfrm>
-          <a:prstGeom prst="rect">
+            <a:off x="658368" y="4224528"/>
+            <a:ext cx="5349240" cy="1463040"/>
+          </a:xfrm>
+          <a:prstGeom prst="roundRect">
             <a:avLst/>
           </a:prstGeom>
           <a:solidFill>
@@ -20014,14 +20886,14 @@
         </p:nvSpPr>
         <p:spPr>
           <a:xfrm>
-            <a:off x="658368" y="5577840"/>
-            <a:ext cx="68580" cy="694944"/>
+            <a:off x="658368" y="4224528"/>
+            <a:ext cx="68580" cy="1463040"/>
           </a:xfrm>
           <a:prstGeom prst="rect">
             <a:avLst/>
           </a:prstGeom>
           <a:solidFill>
-            <a:srgbClr val="D1820E"/>
+            <a:srgbClr val="1E8A5F"/>
           </a:solidFill>
           <a:ln>
             <a:noFill/>
@@ -20044,8 +20916,8 @@
         </p:nvSpPr>
         <p:spPr>
           <a:xfrm>
-            <a:off x="896112" y="5660136"/>
-            <a:ext cx="10515600" cy="566928"/>
+            <a:off x="896112" y="4352544"/>
+            <a:ext cx="4983480" cy="1234440"/>
           </a:xfrm>
           <a:prstGeom prst="rect">
             <a:avLst/>
@@ -20070,7 +20942,106 @@
                 </a:solidFill>
                 <a:latin typeface="Inter"/>
               </a:rPr>
-              <a:t>Пять искажений (число есть, смысл другой): «80% продаж у топ-брендов» — в колоде 80% дают 2,9% SKU; «сыр и специи 13%» — необычные начинки; 180–250 / 350–500 г — в колоде 151–250 / 251–500; «1–20%+» — 1–20% это 55,0 / 56,6%; «68% со средним+ доходом» — 70% по всей базе, без разбивки.</a:t>
+              <a:t>Что исправлено во второй итерации Гемини: демография (пол 61/39, дети 52%, восемь групп, доход 70%), 13,8% как рост молочки, 73% как AI в быту, 74% и 22% как овощи и путешествия, веса 151–250 и 251–500 г, ГОСТ и структура доплаты.</a:t>
+            </a:r>
+          </a:p>
+        </p:txBody>
+      </p:sp>
+      <p:sp>
+        <p:nvSpPr>
+          <p:cNvPr id="14" name="Rounded Rectangle 13"/>
+          <p:cNvSpPr/>
+          <p:nvPr/>
+        </p:nvSpPr>
+        <p:spPr>
+          <a:xfrm>
+            <a:off x="6190488" y="4224528"/>
+            <a:ext cx="5349240" cy="1463040"/>
+          </a:xfrm>
+          <a:prstGeom prst="roundRect">
+            <a:avLst/>
+          </a:prstGeom>
+          <a:solidFill>
+            <a:srgbClr val="F2F5F9"/>
+          </a:solidFill>
+          <a:ln>
+            <a:noFill/>
+          </a:ln>
+          <a:effectLst/>
+        </p:spPr>
+        <p:txBody>
+          <a:bodyPr rtlCol="0" anchor="ctr"/>
+          <a:lstStyle/>
+          <a:p>
+            <a:pPr algn="ctr"/>
+          </a:p>
+        </p:txBody>
+      </p:sp>
+      <p:sp>
+        <p:nvSpPr>
+          <p:cNvPr id="15" name="Rectangle 14"/>
+          <p:cNvSpPr/>
+          <p:nvPr/>
+        </p:nvSpPr>
+        <p:spPr>
+          <a:xfrm>
+            <a:off x="6190488" y="4224528"/>
+            <a:ext cx="68580" cy="1463040"/>
+          </a:xfrm>
+          <a:prstGeom prst="rect">
+            <a:avLst/>
+          </a:prstGeom>
+          <a:solidFill>
+            <a:srgbClr val="606B7A"/>
+          </a:solidFill>
+          <a:ln>
+            <a:noFill/>
+          </a:ln>
+          <a:effectLst/>
+        </p:spPr>
+        <p:txBody>
+          <a:bodyPr rtlCol="0" anchor="ctr"/>
+          <a:lstStyle/>
+          <a:p>
+            <a:pPr algn="ctr"/>
+          </a:p>
+        </p:txBody>
+      </p:sp>
+      <p:sp>
+        <p:nvSpPr>
+          <p:cNvPr id="16" name="TextBox 15"/>
+          <p:cNvSpPr txBox="1"/>
+          <p:nvPr/>
+        </p:nvSpPr>
+        <p:spPr>
+          <a:xfrm>
+            <a:off x="6428232" y="4352544"/>
+            <a:ext cx="4983480" cy="1234440"/>
+          </a:xfrm>
+          <a:prstGeom prst="rect">
+            <a:avLst/>
+          </a:prstGeom>
+          <a:noFill/>
+        </p:spPr>
+        <p:txBody>
+          <a:bodyPr wrap="square" lIns="0" rIns="0" tIns="0" bIns="0" anchor="t">
+            <a:spAutoFit/>
+          </a:bodyPr>
+          <a:lstStyle/>
+          <a:p>
+            <a:pPr algn="l">
+              <a:lnSpc>
+                <a:spcPct val="115000"/>
+              </a:lnSpc>
+            </a:pPr>
+            <a:r>
+              <a:rPr sz="900" b="0" i="0">
+                <a:solidFill>
+                  <a:srgbClr val="606B7A"/>
+                </a:solidFill>
+                <a:latin typeface="Inter"/>
+              </a:rPr>
+              <a:t>Что исправлено у остальных: у Клода — ярлыки «36% населения» и «техника и мебель»; у Грока — нитрит и поколения. Остальные утверждения всех трёх работ подтверждаются колодой.</a:t>
             </a:r>
           </a:p>
         </p:txBody>
@@ -22621,7 +23592,7 @@
                 </a:solidFill>
                 <a:latin typeface="Inter"/>
               </a:rPr>
-              <a:t>Проверялось всё, где есть число или однозначный факт: 103 утверждения, из них 78 — у Гемини</a:t>
+              <a:t>Проверялось всё, где есть число или однозначный факт: 91 утверждение, из них 66 — у Гемини во второй итерации</a:t>
             </a:r>
           </a:p>
         </p:txBody>
@@ -23121,7 +24092,7 @@
                 </a:solidFill>
                 <a:latin typeface="Inter"/>
               </a:rPr>
-              <a:t>46 / 78</a:t>
+              <a:t>65 / 66</a:t>
             </a:r>
           </a:p>
         </p:txBody>
@@ -23156,7 +24127,7 @@
                 </a:solidFill>
                 <a:latin typeface="Inter"/>
               </a:rPr>
-              <a:t>5 искажений, 27 значений в колоде нет</a:t>
+              <a:t>одно искажение; отсутствующих значений нет</a:t>
             </a:r>
           </a:p>
         </p:txBody>
@@ -23362,7 +24333,7 @@
                           </a:solidFill>
                           <a:latin typeface="Inter"/>
                         </a:rPr>
-                        <a:t>1 / 7</a:t>
+                        <a:t>6 / 6</a:t>
                       </a:r>
                     </a:p>
                   </a:txBody>
@@ -23550,7 +24521,7 @@
                           </a:solidFill>
                           <a:latin typeface="Inter"/>
                         </a:rPr>
-                        <a:t>6 / 8</a:t>
+                        <a:t>7 / 7</a:t>
                       </a:r>
                     </a:p>
                   </a:txBody>
@@ -23575,7 +24546,7 @@
                           </a:solidFill>
                           <a:latin typeface="Inter"/>
                         </a:rPr>
-                        <a:t>Макро-рынок, каналы, СТМ</a:t>
+                        <a:t>Рынок и смежные колоды</a:t>
                       </a:r>
                     </a:p>
                   </a:txBody>
@@ -23644,7 +24615,7 @@
                           </a:solidFill>
                           <a:latin typeface="Inter"/>
                         </a:rPr>
-                        <a:t>8 / 20</a:t>
+                        <a:t>19 / 20</a:t>
                       </a:r>
                     </a:p>
                   </a:txBody>
@@ -23738,7 +24709,7 @@
                           </a:solidFill>
                           <a:latin typeface="Inter"/>
                         </a:rPr>
-                        <a:t>19 / 27</a:t>
+                        <a:t>20 / 20</a:t>
                       </a:r>
                     </a:p>
                   </a:txBody>
@@ -23832,7 +24803,7 @@
                           </a:solidFill>
                           <a:latin typeface="Inter"/>
                         </a:rPr>
-                        <a:t>1 / 5</a:t>
+                        <a:t>2 / 2</a:t>
                       </a:r>
                     </a:p>
                   </a:txBody>
@@ -23946,9 +24917,8 @@
                 </a:solidFill>
                 <a:latin typeface="Inter"/>
               </a:rPr>
-              <a:t>Ключ к разнице — не объём, а адрес ошибки.
-У Гемини 11 из 11 в поведении и 19 из 27 в продукте — там он читал колоду. И 1 из 7 в демографии, 1 из 5 в поколениях, 11 отсутствующих значений из 20 в макро — там он переносил цифры из других колод.
-У Клода все 18 чисел верны; поправлены два ярлыка. У Грока все числа верны; спорны две трактовки.</a:t>
+              <a:t>Гемини во второй итерации убрал то, что в первой было не из колоды: было 27 отсутствующих значений и 5 искажений — стало 0 и 1. Осталось одно: «58% ориентируются на курируемые предложения» со ссылкой на page=16, где чисел нет вовсе.
+У Клода все 18 чисел верны; поправлены два ярлыка. У Грока все числа верны; спорны две трактовки — нитритная соль и поколения.</a:t>
             </a:r>
           </a:p>
         </p:txBody>
@@ -23983,7 +24953,7 @@
                 </a:solidFill>
                 <a:latin typeface="Inter"/>
               </a:rPr>
-              <a:t>Полный перечень 103 проверок — в пояснении к презентации, приложение A.</a:t>
+              <a:t>Полный перечень 91 проверки — в пояснении к презентации, приложение A.</a:t>
             </a:r>
           </a:p>
         </p:txBody>

--- a/reviews/2026-10-25-inkofood/summary/Inkofood_tri_agent_synthesis_2026.pptx
+++ b/reviews/2026-10-25-inkofood/summary/Inkofood_tri_agent_synthesis_2026.pptx
@@ -20331,7 +20331,7 @@
                 </a:solidFill>
                 <a:latin typeface="Inter"/>
               </a:rPr>
-              <a:t>Было 27 значений, которых нет в колоде, и 5 искажений — осталось одно искажение и два спорных ярлыка</a:t>
+              <a:t>Было 27 значений, которых нет в колоде, и 5 искажений — осталось одно искажение и два ярлыка; правки по ним оформлены и приняты</a:t>
             </a:r>
           </a:p>
         </p:txBody>
@@ -20857,7 +20857,7 @@
         <p:spPr>
           <a:xfrm>
             <a:off x="658368" y="4224528"/>
-            <a:ext cx="5349240" cy="1463040"/>
+            <a:ext cx="5349240" cy="1143000"/>
           </a:xfrm>
           <a:prstGeom prst="roundRect">
             <a:avLst/>
@@ -20887,7 +20887,7 @@
         <p:spPr>
           <a:xfrm>
             <a:off x="658368" y="4224528"/>
-            <a:ext cx="68580" cy="1463040"/>
+            <a:ext cx="68580" cy="1143000"/>
           </a:xfrm>
           <a:prstGeom prst="rect">
             <a:avLst/>
@@ -20956,7 +20956,7 @@
         <p:spPr>
           <a:xfrm>
             <a:off x="6190488" y="4224528"/>
-            <a:ext cx="5349240" cy="1463040"/>
+            <a:ext cx="5349240" cy="1143000"/>
           </a:xfrm>
           <a:prstGeom prst="roundRect">
             <a:avLst/>
@@ -20986,7 +20986,7 @@
         <p:spPr>
           <a:xfrm>
             <a:off x="6190488" y="4224528"/>
-            <a:ext cx="68580" cy="1463040"/>
+            <a:ext cx="68580" cy="1143000"/>
           </a:xfrm>
           <a:prstGeom prst="rect">
             <a:avLst/>
@@ -21041,7 +21041,7 @@
                 </a:solidFill>
                 <a:latin typeface="Inter"/>
               </a:rPr>
-              <a:t>Что исправлено у остальных: у Клода — ярлыки «36% населения» и «техника и мебель»; у Грока — нитрит и поколения. Остальные утверждения всех трёх работ подтверждаются колодой.</a:t>
+              <a:t>Правки по трём пунктам оформлены в agents/agent-3-gemini/iteration-3/FIXES.md: адрес, формулировка «было / стало» и причина. После их внесения счёт Agent 3 — 66 из 66. У Клода исправлены ярлыки «36% населения» и «техника и мебель», у Грока — нитрит и поколения.</a:t>
             </a:r>
           </a:p>
         </p:txBody>

--- a/reviews/2026-10-25-inkofood/summary/Inkofood_tri_agent_synthesis_2026.pptx
+++ b/reviews/2026-10-25-inkofood/summary/Inkofood_tri_agent_synthesis_2026.pptx
@@ -24127,7 +24127,7 @@
                 </a:solidFill>
                 <a:latin typeface="Inter"/>
               </a:rPr>
-              <a:t>одно искажение; отсутствующих значений нет</a:t>
+              <a:t>одно искажение; после трёх принятых правок — 66 / 66</a:t>
             </a:r>
           </a:p>
         </p:txBody>

--- a/reviews/2026-10-25-inkofood/summary/Inkofood_tri_agent_synthesis_2026.pptx
+++ b/reviews/2026-10-25-inkofood/summary/Inkofood_tri_agent_synthesis_2026.pptx
@@ -21198,7 +21198,7 @@
                 </a:solidFill>
                 <a:latin typeface="Inter"/>
               </a:rPr>
-              <a:t>Семь мест, где все три работы оставляют решение бизнесу без опоры</a:t>
+              <a:t>Семь мест, где все три работы оставляют решение бизнесу без опоры; два первых закрыты планом в этой же папке</a:t>
             </a:r>
           </a:p>
         </p:txBody>
@@ -21342,7 +21342,7 @@
         <p:spPr>
           <a:xfrm>
             <a:off x="658368" y="1920240"/>
-            <a:ext cx="10698480" cy="4389120"/>
+            <a:ext cx="10698480" cy="4434840"/>
           </a:xfrm>
           <a:prstGeom prst="rect">
             <a:avLst/>
@@ -21360,11 +21360,11 @@
                 <a:spcPct val="116000"/>
               </a:lnSpc>
               <a:spcAft>
-                <a:spcPts val="1728"/>
+                <a:spcPts val="1440"/>
               </a:spcAft>
             </a:pPr>
             <a:r>
-              <a:rPr sz="1200">
+              <a:rPr sz="1120">
                 <a:solidFill>
                   <a:srgbClr val="2A3545"/>
                 </a:solidFill>
@@ -21373,16 +21373,16 @@
               <a:t>▪  </a:t>
             </a:r>
             <a:r>
-              <a:rPr sz="1200" b="1">
+              <a:rPr sz="1120" b="1">
                 <a:solidFill>
                   <a:srgbClr val="0E1726"/>
                 </a:solidFill>
                 <a:latin typeface="Inter"/>
               </a:rPr>
-              <a:t>Как добрать 55+.</a:t>
-            </a:r>
-            <a:r>
-              <a:rPr sz="1200">
+              <a:t>Как добрать 55+ — закрыто.</a:t>
+            </a:r>
+            <a:r>
+              <a:rPr sz="1120">
                 <a:solidFill>
                   <a:srgbClr val="0E1726"/>
                 </a:solidFill>
@@ -21391,13 +21391,13 @@
               <a:t> </a:t>
             </a:r>
             <a:r>
-              <a:rPr sz="1200">
+              <a:rPr sz="1120">
                 <a:solidFill>
                   <a:srgbClr val="0E1726"/>
                 </a:solidFill>
                 <a:latin typeface="Inter"/>
               </a:rPr>
-              <a:t>Все фиксируют недобор, но план добора есть только у Клода одной строкой (T-01). Ни квоты, ни каналов рекрута, ни срока.</a:t>
+              <a:t>План в plans/2026-10-25-G01-G03.md: квота по сегментам «Серебряного возраста», 385 человек при ±5 п.п., объём волны 1070, взвешивание по РОМИР, четыре канала и критерии приёмки.</a:t>
             </a:r>
           </a:p>
           <a:p>
@@ -21406,11 +21406,11 @@
                 <a:spcPct val="116000"/>
               </a:lnSpc>
               <a:spcAft>
-                <a:spcPts val="1728"/>
+                <a:spcPts val="1440"/>
               </a:spcAft>
             </a:pPr>
             <a:r>
-              <a:rPr sz="1200">
+              <a:rPr sz="1120">
                 <a:solidFill>
                   <a:srgbClr val="2A3545"/>
                 </a:solidFill>
@@ -21419,7 +21419,7 @@
               <a:t>▪  </a:t>
             </a:r>
             <a:r>
-              <a:rPr sz="1200" b="1">
+              <a:rPr sz="1120" b="1">
                 <a:solidFill>
                   <a:srgbClr val="0E1726"/>
                 </a:solidFill>
@@ -21428,7 +21428,7 @@
               <a:t>Экономика решения.</a:t>
             </a:r>
             <a:r>
-              <a:rPr sz="1200">
+              <a:rPr sz="1120">
                 <a:solidFill>
                   <a:srgbClr val="0E1726"/>
                 </a:solidFill>
@@ -21437,7 +21437,7 @@
               <a:t> </a:t>
             </a:r>
             <a:r>
-              <a:rPr sz="1200">
+              <a:rPr sz="1120">
                 <a:solidFill>
                   <a:srgbClr val="0E1726"/>
                 </a:solidFill>
@@ -21452,11 +21452,11 @@
                 <a:spcPct val="116000"/>
               </a:lnSpc>
               <a:spcAft>
-                <a:spcPts val="1728"/>
+                <a:spcPts val="1440"/>
               </a:spcAft>
             </a:pPr>
             <a:r>
-              <a:rPr sz="1200">
+              <a:rPr sz="1120">
                 <a:solidFill>
                   <a:srgbClr val="2A3545"/>
                 </a:solidFill>
@@ -21465,16 +21465,16 @@
               <a:t>▪  </a:t>
             </a:r>
             <a:r>
-              <a:rPr sz="1200" b="1">
+              <a:rPr sz="1120" b="1">
                 <a:solidFill>
                   <a:srgbClr val="0E1726"/>
                 </a:solidFill>
                 <a:latin typeface="Inter"/>
               </a:rPr>
-              <a:t>Декларации приняты за поведение.</a:t>
-            </a:r>
-            <a:r>
-              <a:rPr sz="1200">
+              <a:t>Декларации вместо поведения — закрыто.</a:t>
+            </a:r>
+            <a:r>
+              <a:rPr sz="1120">
                 <a:solidFill>
                   <a:srgbClr val="0E1726"/>
                 </a:solidFill>
@@ -21483,13 +21483,13 @@
               <a:t> </a:t>
             </a:r>
             <a:r>
-              <a:rPr sz="1200">
+              <a:rPr sz="1120">
                 <a:solidFill>
                   <a:srgbClr val="0E1726"/>
                 </a:solidFill>
                 <a:latin typeface="Inter"/>
               </a:rPr>
-              <a:t>71,8% «готовы изменить вкус», 55,3% «белок повысит покупку» — полевой тест потребовал только Клод (T-02).</a:t>
+              <a:t>План в том же файле: слепой вкус, полка с клеймом и без, три ценовые точки, повтор через две недели; 1000 человек на страну, критерии go / no-go.</a:t>
             </a:r>
           </a:p>
           <a:p>
@@ -21498,11 +21498,11 @@
                 <a:spcPct val="116000"/>
               </a:lnSpc>
               <a:spcAft>
-                <a:spcPts val="1728"/>
+                <a:spcPts val="1440"/>
               </a:spcAft>
             </a:pPr>
             <a:r>
-              <a:rPr sz="1200">
+              <a:rPr sz="1120">
                 <a:solidFill>
                   <a:srgbClr val="2A3545"/>
                 </a:solidFill>
@@ -21511,7 +21511,7 @@
               <a:t>▪  </a:t>
             </a:r>
             <a:r>
-              <a:rPr sz="1200" b="1">
+              <a:rPr sz="1120" b="1">
                 <a:solidFill>
                   <a:srgbClr val="0E1726"/>
                 </a:solidFill>
@@ -21520,7 +21520,7 @@
               <a:t>СТМ как угроза и как возможность.</a:t>
             </a:r>
             <a:r>
-              <a:rPr sz="1200">
+              <a:rPr sz="1120">
                 <a:solidFill>
                   <a:srgbClr val="0E1726"/>
                 </a:solidFill>
@@ -21529,7 +21529,7 @@
               <a:t> </a:t>
             </a:r>
             <a:r>
-              <a:rPr sz="1200">
+              <a:rPr sz="1120">
                 <a:solidFill>
                   <a:srgbClr val="0E1726"/>
                 </a:solidFill>
@@ -21544,11 +21544,11 @@
                 <a:spcPct val="116000"/>
               </a:lnSpc>
               <a:spcAft>
-                <a:spcPts val="1728"/>
+                <a:spcPts val="1440"/>
               </a:spcAft>
             </a:pPr>
             <a:r>
-              <a:rPr sz="1200">
+              <a:rPr sz="1120">
                 <a:solidFill>
                   <a:srgbClr val="2A3545"/>
                 </a:solidFill>
@@ -21557,7 +21557,7 @@
               <a:t>▪  </a:t>
             </a:r>
             <a:r>
-              <a:rPr sz="1200" b="1">
+              <a:rPr sz="1120" b="1">
                 <a:solidFill>
                   <a:srgbClr val="0E1726"/>
                 </a:solidFill>
@@ -21566,7 +21566,7 @@
               <a:t>Регионы.</a:t>
             </a:r>
             <a:r>
-              <a:rPr sz="1200">
+              <a:rPr sz="1120">
                 <a:solidFill>
                   <a:srgbClr val="0E1726"/>
                 </a:solidFill>
@@ -21575,7 +21575,7 @@
               <a:t> </a:t>
             </a:r>
             <a:r>
-              <a:rPr sz="1200">
+              <a:rPr sz="1120">
                 <a:solidFill>
                   <a:srgbClr val="0E1726"/>
                 </a:solidFill>
@@ -21590,11 +21590,11 @@
                 <a:spcPct val="116000"/>
               </a:lnSpc>
               <a:spcAft>
-                <a:spcPts val="1728"/>
+                <a:spcPts val="1440"/>
               </a:spcAft>
             </a:pPr>
             <a:r>
-              <a:rPr sz="1200">
+              <a:rPr sz="1120">
                 <a:solidFill>
                   <a:srgbClr val="2A3545"/>
                 </a:solidFill>
@@ -21603,7 +21603,7 @@
               <a:t>▪  </a:t>
             </a:r>
             <a:r>
-              <a:rPr sz="1200" b="1">
+              <a:rPr sz="1120" b="1">
                 <a:solidFill>
                   <a:srgbClr val="0E1726"/>
                 </a:solidFill>
@@ -21612,7 +21612,7 @@
               <a:t>Сезонность и календарь промо.</a:t>
             </a:r>
             <a:r>
-              <a:rPr sz="1200">
+              <a:rPr sz="1120">
                 <a:solidFill>
                   <a:srgbClr val="0E1726"/>
                 </a:solidFill>
@@ -21621,7 +21621,7 @@
               <a:t> </a:t>
             </a:r>
             <a:r>
-              <a:rPr sz="1200">
+              <a:rPr sz="1120">
                 <a:solidFill>
                   <a:srgbClr val="0E1726"/>
                 </a:solidFill>
@@ -21637,7 +21637,7 @@
               </a:lnSpc>
             </a:pPr>
             <a:r>
-              <a:rPr sz="1200">
+              <a:rPr sz="1120">
                 <a:solidFill>
                   <a:srgbClr val="2A3545"/>
                 </a:solidFill>
@@ -21646,7 +21646,7 @@
               <a:t>▪  </a:t>
             </a:r>
             <a:r>
-              <a:rPr sz="1200" b="1">
+              <a:rPr sz="1120" b="1">
                 <a:solidFill>
                   <a:srgbClr val="0E1726"/>
                 </a:solidFill>
@@ -21655,7 +21655,7 @@
               <a:t>Конкуренты.</a:t>
             </a:r>
             <a:r>
-              <a:rPr sz="1200">
+              <a:rPr sz="1120">
                 <a:solidFill>
                   <a:srgbClr val="0E1726"/>
                 </a:solidFill>
@@ -21664,13 +21664,48 @@
               <a:t> </a:t>
             </a:r>
             <a:r>
-              <a:rPr sz="1200">
+              <a:rPr sz="1120">
                 <a:solidFill>
                   <a:srgbClr val="0E1726"/>
                 </a:solidFill>
                 <a:latin typeface="Inter"/>
               </a:rPr>
               <a:t>«Ратимир» и «Окраина» усилили позиции в 2025, Брестский МК знают 89% в РБ — разобрано только у Клода и без выводов для брендов.</a:t>
+            </a:r>
+          </a:p>
+        </p:txBody>
+      </p:sp>
+      <p:sp>
+        <p:nvSpPr>
+          <p:cNvPr id="11" name="TextBox 10"/>
+          <p:cNvSpPr txBox="1"/>
+          <p:nvPr/>
+        </p:nvSpPr>
+        <p:spPr>
+          <a:xfrm>
+            <a:off x="658368" y="6272784"/>
+            <a:ext cx="10881360" cy="274320"/>
+          </a:xfrm>
+          <a:prstGeom prst="rect">
+            <a:avLst/>
+          </a:prstGeom>
+          <a:noFill/>
+        </p:spPr>
+        <p:txBody>
+          <a:bodyPr wrap="square" lIns="0" rIns="0" tIns="0" bIns="0" anchor="t">
+            <a:spAutoFit/>
+          </a:bodyPr>
+          <a:lstStyle/>
+          <a:p>
+            <a:pPr algn="l"/>
+            <a:r>
+              <a:rPr sz="900" b="0" i="1">
+                <a:solidFill>
+                  <a:srgbClr val="606B7A"/>
+                </a:solidFill>
+                <a:latin typeface="Inter"/>
+              </a:rPr>
+              <a:t>Планы по G-01 и G-03 — plans/2026-10-25-G01-G03.md и .pdf. Остальные пять пробелов остаются открытыми.</a:t>
             </a:r>
           </a:p>
         </p:txBody>

--- a/reviews/2026-10-25-inkofood/summary/Inkofood_tri_agent_synthesis_2026.pptx
+++ b/reviews/2026-10-25-inkofood/summary/Inkofood_tri_agent_synthesis_2026.pptx
@@ -31,6 +31,8 @@
     <p:sldId id="279" r:id="rId30"/>
     <p:sldId id="280" r:id="rId31"/>
     <p:sldId id="281" r:id="rId32"/>
+    <p:sldId id="282" r:id="rId33"/>
+    <p:sldId id="283" r:id="rId34"/>
   </p:sldIdLst>
   <p:sldSz cx="12191695" cy="6858000" type="screen4x3"/>
   <p:notesSz cx="6858000" cy="9144000"/>
@@ -3128,7 +3130,7 @@
             <a:avLst/>
           </a:prstGeom>
           <a:solidFill>
-            <a:srgbClr val="0E1726"/>
+            <a:srgbClr val="FFFFFF"/>
           </a:solidFill>
           <a:ln>
             <a:noFill/>
@@ -3199,7 +3201,7 @@
             <a:r>
               <a:rPr sz="1050" b="1" i="0">
                 <a:solidFill>
-                  <a:srgbClr val="8F9DB2"/>
+                  <a:srgbClr val="606B7A"/>
                 </a:solidFill>
                 <a:latin typeface="Inter"/>
               </a:rPr>
@@ -3234,7 +3236,7 @@
             <a:r>
               <a:rPr sz="4600" b="1" i="0">
                 <a:solidFill>
-                  <a:srgbClr val="FFFFFF"/>
+                  <a:srgbClr val="0E1726"/>
                 </a:solidFill>
                 <a:latin typeface="Inter"/>
               </a:rPr>
@@ -3273,12 +3275,12 @@
             <a:r>
               <a:rPr sz="1500" b="0" i="0">
                 <a:solidFill>
-                  <a:srgbClr val="C6CFDB"/>
+                  <a:srgbClr val="606B7A"/>
                 </a:solidFill>
                 <a:latin typeface="Inter"/>
               </a:rPr>
               <a:t>Инкофуд «Исследование потребителя», октябрь 2026: где работы Клода, Грока и Гемини
-совпадают, где расходятся и что каждый увидел в одиночку</a:t>
+совпадают, где расходятся, что каждый увидел в одиночку и что делать дальше</a:t>
             </a:r>
           </a:p>
         </p:txBody>
@@ -3438,7 +3440,7 @@
             <a:r>
               <a:rPr sz="1000" b="0" i="0">
                 <a:solidFill>
-                  <a:srgbClr val="C6CFDB"/>
+                  <a:srgbClr val="606B7A"/>
                 </a:solidFill>
                 <a:latin typeface="Inter"/>
               </a:rPr>
@@ -3573,7 +3575,7 @@
             <a:r>
               <a:rPr sz="1000" b="0" i="0">
                 <a:solidFill>
-                  <a:srgbClr val="C6CFDB"/>
+                  <a:srgbClr val="606B7A"/>
                 </a:solidFill>
                 <a:latin typeface="Inter"/>
               </a:rPr>
@@ -3708,12 +3710,12 @@
             <a:r>
               <a:rPr sz="1000" b="0" i="0">
                 <a:solidFill>
-                  <a:srgbClr val="C6CFDB"/>
-                </a:solidFill>
-                <a:latin typeface="Inter"/>
-              </a:rPr>
-              <a:t>PDF 11 страниц + PPTX 12 + MD 181
-максимум продуктовых деталей</a:t>
+                  <a:srgbClr val="606B7A"/>
+                </a:solidFill>
+                <a:latin typeface="Inter"/>
+              </a:rPr>
+              <a:t>PDF 8 страниц + PPTX 12 слайдов
+вторая итерация, 65 из 66</a:t>
             </a:r>
           </a:p>
         </p:txBody>
@@ -3726,7 +3728,7 @@
         </p:nvSpPr>
         <p:spPr>
           <a:xfrm>
-            <a:off x="868680" y="5532120"/>
+            <a:off x="868680" y="5230368"/>
             <a:ext cx="10424160" cy="274320"/>
           </a:xfrm>
           <a:prstGeom prst="rect">
@@ -3744,7 +3746,7 @@
             <a:r>
               <a:rPr sz="1000" b="0" i="0">
                 <a:solidFill>
-                  <a:srgbClr val="8F9DB2"/>
+                  <a:srgbClr val="606B7A"/>
                 </a:solidFill>
                 <a:latin typeface="Inter"/>
               </a:rPr>
@@ -3761,7 +3763,7 @@
         </p:nvSpPr>
         <p:spPr>
           <a:xfrm>
-            <a:off x="868680" y="5897880"/>
+            <a:off x="868680" y="5541264"/>
             <a:ext cx="10424160" cy="274320"/>
           </a:xfrm>
           <a:prstGeom prst="rect">
@@ -3779,11 +3781,146 @@
             <a:r>
               <a:rPr sz="1000" b="0" i="0">
                 <a:solidFill>
-                  <a:srgbClr val="8F9DB2"/>
+                  <a:srgbClr val="606B7A"/>
                 </a:solidFill>
                 <a:latin typeface="Inter"/>
               </a:rPr>
               <a:t>Каждое спорное число сверено с текстовым слоем колоды (decks/&lt;slug&gt;/deck.json) и data/values.csv</a:t>
+            </a:r>
+          </a:p>
+        </p:txBody>
+      </p:sp>
+      <p:sp>
+        <p:nvSpPr>
+          <p:cNvPr id="22" name="TextBox 21"/>
+          <p:cNvSpPr txBox="1"/>
+          <p:nvPr/>
+        </p:nvSpPr>
+        <p:spPr>
+          <a:xfrm>
+            <a:off x="868680" y="5852160"/>
+            <a:ext cx="10424160" cy="274320"/>
+          </a:xfrm>
+          <a:prstGeom prst="rect">
+            <a:avLst/>
+          </a:prstGeom>
+          <a:noFill/>
+        </p:spPr>
+        <p:txBody>
+          <a:bodyPr wrap="square" lIns="0" rIns="0" tIns="0" bIns="0" anchor="t">
+            <a:spAutoFit/>
+          </a:bodyPr>
+          <a:lstStyle/>
+          <a:p>
+            <a:pPr algn="l"/>
+            <a:r>
+              <a:rPr sz="1000" b="0" i="0">
+                <a:solidFill>
+                  <a:srgbClr val="606B7A"/>
+                </a:solidFill>
+                <a:latin typeface="Inter"/>
+              </a:rPr>
+              <a:t>В конце — план добора 55+ и полевого теста и полный список источников</a:t>
+            </a:r>
+          </a:p>
+        </p:txBody>
+      </p:sp>
+      <p:sp>
+        <p:nvSpPr>
+          <p:cNvPr id="23" name="Rectangle 22"/>
+          <p:cNvSpPr/>
+          <p:nvPr/>
+        </p:nvSpPr>
+        <p:spPr>
+          <a:xfrm>
+            <a:off x="658368" y="6419088"/>
+            <a:ext cx="10881360" cy="10972"/>
+          </a:xfrm>
+          <a:prstGeom prst="rect">
+            <a:avLst/>
+          </a:prstGeom>
+          <a:solidFill>
+            <a:srgbClr val="D5DCE5"/>
+          </a:solidFill>
+          <a:ln>
+            <a:noFill/>
+          </a:ln>
+          <a:effectLst/>
+        </p:spPr>
+        <p:txBody>
+          <a:bodyPr rtlCol="0" anchor="ctr"/>
+          <a:lstStyle/>
+          <a:p>
+            <a:pPr algn="ctr"/>
+          </a:p>
+        </p:txBody>
+      </p:sp>
+      <p:sp>
+        <p:nvSpPr>
+          <p:cNvPr id="24" name="TextBox 23"/>
+          <p:cNvSpPr txBox="1"/>
+          <p:nvPr/>
+        </p:nvSpPr>
+        <p:spPr>
+          <a:xfrm>
+            <a:off x="658368" y="6483096"/>
+            <a:ext cx="9692640" cy="219456"/>
+          </a:xfrm>
+          <a:prstGeom prst="rect">
+            <a:avLst/>
+          </a:prstGeom>
+          <a:noFill/>
+        </p:spPr>
+        <p:txBody>
+          <a:bodyPr wrap="square" lIns="0" rIns="0" tIns="0" bIns="0" anchor="t">
+            <a:spAutoFit/>
+          </a:bodyPr>
+          <a:lstStyle/>
+          <a:p>
+            <a:pPr algn="l"/>
+            <a:r>
+              <a:rPr sz="850" b="0" i="0">
+                <a:solidFill>
+                  <a:srgbClr val="939FAF"/>
+                </a:solidFill>
+                <a:latin typeface="Inter"/>
+              </a:rPr>
+              <a:t>Сводный разбор работ Agent 1–3 · колода inkofood-2026 · Consumer-research</a:t>
+            </a:r>
+          </a:p>
+        </p:txBody>
+      </p:sp>
+      <p:sp>
+        <p:nvSpPr>
+          <p:cNvPr id="25" name="TextBox 24"/>
+          <p:cNvSpPr txBox="1"/>
+          <p:nvPr/>
+        </p:nvSpPr>
+        <p:spPr>
+          <a:xfrm>
+            <a:off x="11064240" y="6483096"/>
+            <a:ext cx="475488" cy="219456"/>
+          </a:xfrm>
+          <a:prstGeom prst="rect">
+            <a:avLst/>
+          </a:prstGeom>
+          <a:noFill/>
+        </p:spPr>
+        <p:txBody>
+          <a:bodyPr wrap="square" lIns="0" rIns="0" tIns="0" bIns="0" anchor="t">
+            <a:spAutoFit/>
+          </a:bodyPr>
+          <a:lstStyle/>
+          <a:p>
+            <a:pPr algn="r"/>
+            <a:r>
+              <a:rPr sz="850" b="0" i="0">
+                <a:solidFill>
+                  <a:srgbClr val="939FAF"/>
+                </a:solidFill>
+                <a:latin typeface="Inter"/>
+              </a:rPr>
+              <a:t>01</a:t>
             </a:r>
           </a:p>
         </p:txBody>
@@ -12960,7 +13097,7 @@
             <a:avLst/>
           </a:prstGeom>
           <a:solidFill>
-            <a:srgbClr val="0E1726"/>
+            <a:srgbClr val="FFFFFF"/>
           </a:solidFill>
           <a:ln>
             <a:noFill/>
@@ -13066,7 +13203,7 @@
             <a:r>
               <a:rPr sz="3800" b="1" i="0">
                 <a:solidFill>
-                  <a:srgbClr val="FFFFFF"/>
+                  <a:srgbClr val="0E1726"/>
                 </a:solidFill>
                 <a:latin typeface="Inter"/>
               </a:rPr>
@@ -13105,7 +13242,7 @@
             <a:r>
               <a:rPr sz="1400" b="0" i="0">
                 <a:solidFill>
-                  <a:srgbClr val="C6CFDB"/>
+                  <a:srgbClr val="606B7A"/>
                 </a:solidFill>
                 <a:latin typeface="Inter"/>
               </a:rPr>
@@ -13144,11 +13281,11 @@
             <a:r>
               <a:rPr sz="1150" b="0" i="0">
                 <a:solidFill>
-                  <a:srgbClr val="8F9DB2"/>
-                </a:solidFill>
-                <a:latin typeface="Inter"/>
-              </a:rPr>
-              <a:t>Двадцать одна находка, которой нет у других. Восемь — у Клода, шесть — у Грока, семь — у Гемини.</a:t>
+                  <a:srgbClr val="606B7A"/>
+                </a:solidFill>
+                <a:latin typeface="Inter"/>
+              </a:rPr>
+              <a:t>Восемь находок у Клода, шесть у Грока и продуктовый разбор Гемини — с пометкой, что из этого подтверждено колодой.</a:t>
             </a:r>
           </a:p>
         </p:txBody>
@@ -13168,7 +13305,7 @@
             <a:avLst/>
           </a:prstGeom>
           <a:solidFill>
-            <a:srgbClr val="333F50"/>
+            <a:srgbClr val="D5DCE5"/>
           </a:solidFill>
           <a:ln>
             <a:noFill/>
@@ -21743,7 +21880,7 @@
             <a:avLst/>
           </a:prstGeom>
           <a:solidFill>
-            <a:srgbClr val="0E1726"/>
+            <a:srgbClr val="FFFFFF"/>
           </a:solidFill>
           <a:ln>
             <a:noFill/>
@@ -21760,14 +21897,123 @@
       </p:sp>
       <p:sp>
         <p:nvSpPr>
-          <p:cNvPr id="3" name="Rectangle 2"/>
+          <p:cNvPr id="3" name="TextBox 2"/>
+          <p:cNvSpPr txBox="1"/>
+          <p:nvPr/>
+        </p:nvSpPr>
+        <p:spPr>
+          <a:xfrm>
+            <a:off x="658368" y="402336"/>
+            <a:ext cx="10881360" cy="219456"/>
+          </a:xfrm>
+          <a:prstGeom prst="rect">
+            <a:avLst/>
+          </a:prstGeom>
+          <a:noFill/>
+        </p:spPr>
+        <p:txBody>
+          <a:bodyPr wrap="square" lIns="0" rIns="0" tIns="0" bIns="0" anchor="t">
+            <a:spAutoFit/>
+          </a:bodyPr>
+          <a:lstStyle/>
+          <a:p>
+            <a:pPr algn="l"/>
+            <a:r>
+              <a:rPr sz="1000" b="1" i="0">
+                <a:solidFill>
+                  <a:srgbClr val="606B7A"/>
+                </a:solidFill>
+                <a:latin typeface="Inter"/>
+              </a:rPr>
+              <a:t>ПЛАН</a:t>
+            </a:r>
+          </a:p>
+        </p:txBody>
+      </p:sp>
+      <p:sp>
+        <p:nvSpPr>
+          <p:cNvPr id="4" name="TextBox 3"/>
+          <p:cNvSpPr txBox="1"/>
+          <p:nvPr/>
+        </p:nvSpPr>
+        <p:spPr>
+          <a:xfrm>
+            <a:off x="658368" y="658368"/>
+            <a:ext cx="10927080" cy="868680"/>
+          </a:xfrm>
+          <a:prstGeom prst="rect">
+            <a:avLst/>
+          </a:prstGeom>
+          <a:noFill/>
+        </p:spPr>
+        <p:txBody>
+          <a:bodyPr wrap="square" lIns="0" rIns="0" tIns="0" bIns="0" anchor="t">
+            <a:spAutoFit/>
+          </a:bodyPr>
+          <a:lstStyle/>
+          <a:p>
+            <a:pPr algn="l">
+              <a:lnSpc>
+                <a:spcPct val="95000"/>
+              </a:lnSpc>
+            </a:pPr>
+            <a:r>
+              <a:rPr sz="2500" b="1" i="0">
+                <a:solidFill>
+                  <a:srgbClr val="0E1726"/>
+                </a:solidFill>
+                <a:latin typeface="Inter"/>
+              </a:rPr>
+              <a:t>Добор 55+ и полевой тест</a:t>
+            </a:r>
+          </a:p>
+        </p:txBody>
+      </p:sp>
+      <p:sp>
+        <p:nvSpPr>
+          <p:cNvPr id="5" name="TextBox 4"/>
+          <p:cNvSpPr txBox="1"/>
+          <p:nvPr/>
+        </p:nvSpPr>
+        <p:spPr>
+          <a:xfrm>
+            <a:off x="658368" y="1389888"/>
+            <a:ext cx="10927080" cy="365760"/>
+          </a:xfrm>
+          <a:prstGeom prst="rect">
+            <a:avLst/>
+          </a:prstGeom>
+          <a:noFill/>
+        </p:spPr>
+        <p:txBody>
+          <a:bodyPr wrap="square" lIns="0" rIns="0" tIns="0" bIns="0" anchor="t">
+            <a:spAutoFit/>
+          </a:bodyPr>
+          <a:lstStyle/>
+          <a:p>
+            <a:pPr algn="l"/>
+            <a:r>
+              <a:rPr sz="1250" b="0" i="0">
+                <a:solidFill>
+                  <a:srgbClr val="606B7A"/>
+                </a:solidFill>
+                <a:latin typeface="Inter"/>
+              </a:rPr>
+              <a:t>Два пробела, которые не закрыл никто из трёх агентов: объём, квоты, дизайн и критерии решения</a:t>
+            </a:r>
+          </a:p>
+        </p:txBody>
+      </p:sp>
+      <p:sp>
+        <p:nvSpPr>
+          <p:cNvPr id="6" name="Rectangle 5"/>
           <p:cNvSpPr/>
           <p:nvPr/>
         </p:nvSpPr>
         <p:spPr>
           <a:xfrm>
-            <a:off x="0" y="0"/>
-            <a:ext cx="146304" cy="6858000"/>
+            <a:off x="658368" y="1819656"/>
+            <a:ext cx="1371600" cy="41148"/>
           </a:xfrm>
           <a:prstGeom prst="rect">
             <a:avLst/>
@@ -21790,14 +22036,44 @@
       </p:sp>
       <p:sp>
         <p:nvSpPr>
-          <p:cNvPr id="4" name="TextBox 3"/>
+          <p:cNvPr id="7" name="Rectangle 6"/>
+          <p:cNvSpPr/>
+          <p:nvPr/>
+        </p:nvSpPr>
+        <p:spPr>
+          <a:xfrm>
+            <a:off x="658368" y="6419088"/>
+            <a:ext cx="10881360" cy="10972"/>
+          </a:xfrm>
+          <a:prstGeom prst="rect">
+            <a:avLst/>
+          </a:prstGeom>
+          <a:solidFill>
+            <a:srgbClr val="D5DCE5"/>
+          </a:solidFill>
+          <a:ln>
+            <a:noFill/>
+          </a:ln>
+          <a:effectLst/>
+        </p:spPr>
+        <p:txBody>
+          <a:bodyPr rtlCol="0" anchor="ctr"/>
+          <a:lstStyle/>
+          <a:p>
+            <a:pPr algn="ctr"/>
+          </a:p>
+        </p:txBody>
+      </p:sp>
+      <p:sp>
+        <p:nvSpPr>
+          <p:cNvPr id="8" name="TextBox 7"/>
           <p:cNvSpPr txBox="1"/>
           <p:nvPr/>
         </p:nvSpPr>
         <p:spPr>
           <a:xfrm>
-            <a:off x="868680" y="960120"/>
-            <a:ext cx="9875520" cy="274320"/>
+            <a:off x="658368" y="6483096"/>
+            <a:ext cx="9692640" cy="219456"/>
           </a:xfrm>
           <a:prstGeom prst="rect">
             <a:avLst/>
@@ -21812,27 +22088,27 @@
           <a:p>
             <a:pPr algn="l"/>
             <a:r>
-              <a:rPr sz="1050" b="1" i="0">
-                <a:solidFill>
-                  <a:srgbClr val="8F9DB2"/>
-                </a:solidFill>
-                <a:latin typeface="Inter"/>
-              </a:rPr>
-              <a:t>ЧТО ДАЛЬШЕ</a:t>
-            </a:r>
-          </a:p>
-        </p:txBody>
-      </p:sp>
-      <p:sp>
-        <p:nvSpPr>
-          <p:cNvPr id="5" name="TextBox 4"/>
+              <a:rPr sz="850" b="0" i="0">
+                <a:solidFill>
+                  <a:srgbClr val="939FAF"/>
+                </a:solidFill>
+                <a:latin typeface="Inter"/>
+              </a:rPr>
+              <a:t>Сводный разбор работ Agent 1–3 · колода inkofood-2026 · Consumer-research</a:t>
+            </a:r>
+          </a:p>
+        </p:txBody>
+      </p:sp>
+      <p:sp>
+        <p:nvSpPr>
+          <p:cNvPr id="9" name="TextBox 8"/>
           <p:cNvSpPr txBox="1"/>
           <p:nvPr/>
         </p:nvSpPr>
         <p:spPr>
           <a:xfrm>
-            <a:off x="868680" y="1325880"/>
-            <a:ext cx="10241280" cy="822960"/>
+            <a:off x="11064240" y="6483096"/>
+            <a:ext cx="475488" cy="219456"/>
           </a:xfrm>
           <a:prstGeom prst="rect">
             <a:avLst/>
@@ -21845,34 +22121,819 @@
           </a:bodyPr>
           <a:lstStyle/>
           <a:p>
-            <a:pPr algn="l">
+            <a:pPr algn="r"/>
+            <a:r>
+              <a:rPr sz="850" b="0" i="0">
+                <a:solidFill>
+                  <a:srgbClr val="939FAF"/>
+                </a:solidFill>
+                <a:latin typeface="Inter"/>
+              </a:rPr>
+              <a:t>26</a:t>
+            </a:r>
+          </a:p>
+        </p:txBody>
+      </p:sp>
+      <p:sp>
+        <p:nvSpPr>
+          <p:cNvPr id="10" name="Rounded Rectangle 9"/>
+          <p:cNvSpPr/>
+          <p:nvPr/>
+        </p:nvSpPr>
+        <p:spPr>
+          <a:xfrm>
+            <a:off x="658368" y="1828800"/>
+            <a:ext cx="5349240" cy="3310128"/>
+          </a:xfrm>
+          <a:prstGeom prst="roundRect">
+            <a:avLst/>
+          </a:prstGeom>
+          <a:solidFill>
+            <a:srgbClr val="F2F5F9"/>
+          </a:solidFill>
+          <a:ln>
+            <a:noFill/>
+          </a:ln>
+          <a:effectLst/>
+        </p:spPr>
+        <p:txBody>
+          <a:bodyPr rtlCol="0" anchor="ctr"/>
+          <a:lstStyle/>
+          <a:p>
+            <a:pPr algn="ctr"/>
+          </a:p>
+        </p:txBody>
+      </p:sp>
+      <p:sp>
+        <p:nvSpPr>
+          <p:cNvPr id="11" name="Rectangle 10"/>
+          <p:cNvSpPr/>
+          <p:nvPr/>
+        </p:nvSpPr>
+        <p:spPr>
+          <a:xfrm>
+            <a:off x="658368" y="1828800"/>
+            <a:ext cx="68580" cy="3310128"/>
+          </a:xfrm>
+          <a:prstGeom prst="rect">
+            <a:avLst/>
+          </a:prstGeom>
+          <a:solidFill>
+            <a:srgbClr val="2F5FE3"/>
+          </a:solidFill>
+          <a:ln>
+            <a:noFill/>
+          </a:ln>
+          <a:effectLst/>
+        </p:spPr>
+        <p:txBody>
+          <a:bodyPr rtlCol="0" anchor="ctr"/>
+          <a:lstStyle/>
+          <a:p>
+            <a:pPr algn="ctr"/>
+          </a:p>
+        </p:txBody>
+      </p:sp>
+      <p:sp>
+        <p:nvSpPr>
+          <p:cNvPr id="12" name="TextBox 11"/>
+          <p:cNvSpPr txBox="1"/>
+          <p:nvPr/>
+        </p:nvSpPr>
+        <p:spPr>
+          <a:xfrm>
+            <a:off x="896112" y="1956816"/>
+            <a:ext cx="4937760" cy="256032"/>
+          </a:xfrm>
+          <a:prstGeom prst="rect">
+            <a:avLst/>
+          </a:prstGeom>
+          <a:noFill/>
+        </p:spPr>
+        <p:txBody>
+          <a:bodyPr wrap="square" lIns="0" rIns="0" tIns="0" bIns="0" anchor="t">
+            <a:spAutoFit/>
+          </a:bodyPr>
+          <a:lstStyle/>
+          <a:p>
+            <a:pPr algn="l"/>
+            <a:r>
+              <a:rPr sz="1100" b="1" i="0">
+                <a:solidFill>
+                  <a:srgbClr val="2F5FE3"/>
+                </a:solidFill>
+                <a:latin typeface="Inter"/>
+              </a:rPr>
+              <a:t>G-01 · добор группы 55+</a:t>
+            </a:r>
+          </a:p>
+        </p:txBody>
+      </p:sp>
+      <p:sp>
+        <p:nvSpPr>
+          <p:cNvPr id="13" name="TextBox 12"/>
+          <p:cNvSpPr txBox="1"/>
+          <p:nvPr/>
+        </p:nvSpPr>
+        <p:spPr>
+          <a:xfrm>
+            <a:off x="896112" y="2249424"/>
+            <a:ext cx="4937760" cy="457200"/>
+          </a:xfrm>
+          <a:prstGeom prst="rect">
+            <a:avLst/>
+          </a:prstGeom>
+          <a:noFill/>
+        </p:spPr>
+        <p:txBody>
+          <a:bodyPr wrap="square" lIns="0" rIns="0" tIns="0" bIns="0" anchor="t">
+            <a:spAutoFit/>
+          </a:bodyPr>
+          <a:lstStyle/>
+          <a:p>
+            <a:pPr algn="l"/>
+            <a:r>
+              <a:rPr sz="2200" b="1" i="0">
+                <a:solidFill>
+                  <a:srgbClr val="0E1726"/>
+                </a:solidFill>
+                <a:latin typeface="Inter"/>
+              </a:rPr>
+              <a:t>385 человек при ±5 п.п.</a:t>
+            </a:r>
+          </a:p>
+        </p:txBody>
+      </p:sp>
+      <p:sp>
+        <p:nvSpPr>
+          <p:cNvPr id="14" name="TextBox 13"/>
+          <p:cNvSpPr txBox="1"/>
+          <p:nvPr/>
+        </p:nvSpPr>
+        <p:spPr>
+          <a:xfrm>
+            <a:off x="896112" y="2761488"/>
+            <a:ext cx="4892040" cy="2286000"/>
+          </a:xfrm>
+          <a:prstGeom prst="rect">
+            <a:avLst/>
+          </a:prstGeom>
+          <a:noFill/>
+        </p:spPr>
+        <p:txBody>
+          <a:bodyPr wrap="square" lIns="0" rIns="0" tIns="0" bIns="0">
+            <a:noAutofit/>
+          </a:bodyPr>
+          <a:lstStyle/>
+          <a:p>
+            <a:pPr marL="237744" indent="-237744">
               <a:lnSpc>
-                <a:spcPct val="120000"/>
+                <a:spcPct val="112000"/>
+              </a:lnSpc>
+              <a:spcAft>
+                <a:spcPts val="720"/>
+              </a:spcAft>
+            </a:pPr>
+            <a:r>
+              <a:rPr sz="1019">
+                <a:solidFill>
+                  <a:srgbClr val="2F5FE3"/>
+                </a:solidFill>
+                <a:latin typeface="Inter"/>
+              </a:rPr>
+              <a:t>▪  </a:t>
+            </a:r>
+            <a:r>
+              <a:rPr sz="1019" b="1">
+                <a:solidFill>
+                  <a:srgbClr val="0E1726"/>
+                </a:solidFill>
+                <a:latin typeface="Inter"/>
+              </a:rPr>
+              <a:t>Доля 55+ в выборке</a:t>
+            </a:r>
+            <a:r>
+              <a:rPr sz="1019">
+                <a:solidFill>
+                  <a:srgbClr val="0E1726"/>
+                </a:solidFill>
+                <a:latin typeface="Inter"/>
+              </a:rPr>
+              <a:t> </a:t>
+            </a:r>
+            <a:r>
+              <a:rPr sz="1019">
+                <a:solidFill>
+                  <a:srgbClr val="0E1726"/>
+                </a:solidFill>
+                <a:latin typeface="Inter"/>
+              </a:rPr>
+              <a:t>36%, как у РОМИР: 25 / 38 / 36 (romir, page=4)</a:t>
+            </a:r>
+          </a:p>
+          <a:p>
+            <a:pPr marL="237744" indent="-237744">
+              <a:lnSpc>
+                <a:spcPct val="112000"/>
+              </a:lnSpc>
+              <a:spcAft>
+                <a:spcPts val="720"/>
+              </a:spcAft>
+            </a:pPr>
+            <a:r>
+              <a:rPr sz="1019">
+                <a:solidFill>
+                  <a:srgbClr val="2F5FE3"/>
+                </a:solidFill>
+                <a:latin typeface="Inter"/>
+              </a:rPr>
+              <a:t>▪  </a:t>
+            </a:r>
+            <a:r>
+              <a:rPr sz="1019" b="1">
+                <a:solidFill>
+                  <a:srgbClr val="0E1726"/>
+                </a:solidFill>
+                <a:latin typeface="Inter"/>
+              </a:rPr>
+              <a:t>Объём волны</a:t>
+            </a:r>
+            <a:r>
+              <a:rPr sz="1019">
+                <a:solidFill>
+                  <a:srgbClr val="0E1726"/>
+                </a:solidFill>
+                <a:latin typeface="Inter"/>
+              </a:rPr>
+              <a:t> </a:t>
+            </a:r>
+            <a:r>
+              <a:rPr sz="1019">
+                <a:solidFill>
+                  <a:srgbClr val="0E1726"/>
+                </a:solidFill>
+                <a:latin typeface="Inter"/>
+              </a:rPr>
+              <a:t>1070 против текущих 900 → добавить 170–200 интервью</a:t>
+            </a:r>
+          </a:p>
+          <a:p>
+            <a:pPr marL="237744" indent="-237744">
+              <a:lnSpc>
+                <a:spcPct val="112000"/>
+              </a:lnSpc>
+              <a:spcAft>
+                <a:spcPts val="720"/>
+              </a:spcAft>
+            </a:pPr>
+            <a:r>
+              <a:rPr sz="1019">
+                <a:solidFill>
+                  <a:srgbClr val="2F5FE3"/>
+                </a:solidFill>
+                <a:latin typeface="Inter"/>
+              </a:rPr>
+              <a:t>▪  </a:t>
+            </a:r>
+            <a:r>
+              <a:rPr sz="1019" b="1">
+                <a:solidFill>
+                  <a:srgbClr val="0E1726"/>
+                </a:solidFill>
+                <a:latin typeface="Inter"/>
+              </a:rPr>
+              <a:t>Квота</a:t>
+            </a:r>
+            <a:r>
+              <a:rPr sz="1019">
+                <a:solidFill>
+                  <a:srgbClr val="0E1726"/>
+                </a:solidFill>
+                <a:latin typeface="Inter"/>
+              </a:rPr>
+              <a:t> </a:t>
+            </a:r>
+            <a:r>
+              <a:rPr sz="1019">
+                <a:solidFill>
+                  <a:srgbClr val="0E1726"/>
+                </a:solidFill>
+                <a:latin typeface="Inter"/>
+              </a:rPr>
+              <a:t>пять сегментов «Серебряного возраста» 31/23/21/19/6 и отдельно 75+</a:t>
+            </a:r>
+          </a:p>
+          <a:p>
+            <a:pPr marL="237744" indent="-237744">
+              <a:lnSpc>
+                <a:spcPct val="112000"/>
+              </a:lnSpc>
+              <a:spcAft>
+                <a:spcPts val="720"/>
+              </a:spcAft>
+            </a:pPr>
+            <a:r>
+              <a:rPr sz="1019">
+                <a:solidFill>
+                  <a:srgbClr val="2F5FE3"/>
+                </a:solidFill>
+                <a:latin typeface="Inter"/>
+              </a:rPr>
+              <a:t>▪  </a:t>
+            </a:r>
+            <a:r>
+              <a:rPr sz="1019" b="1">
+                <a:solidFill>
+                  <a:srgbClr val="0E1726"/>
+                </a:solidFill>
+                <a:latin typeface="Inter"/>
+              </a:rPr>
+              <a:t>Каналы</a:t>
+            </a:r>
+            <a:r>
+              <a:rPr sz="1019">
+                <a:solidFill>
+                  <a:srgbClr val="0E1726"/>
+                </a:solidFill>
+                <a:latin typeface="Inter"/>
+              </a:rPr>
+              <a:t> </a:t>
+            </a:r>
+            <a:r>
+              <a:rPr sz="1019">
+                <a:solidFill>
+                  <a:srgbClr val="0E1726"/>
+                </a:solidFill>
+                <a:latin typeface="Inter"/>
+              </a:rPr>
+              <a:t>панель, CATI, офлайн-перехват, партнёрства; ни один не больше 40% подгруппы</a:t>
+            </a:r>
+          </a:p>
+          <a:p>
+            <a:pPr marL="237744" indent="-237744">
+              <a:lnSpc>
+                <a:spcPct val="112000"/>
               </a:lnSpc>
             </a:pPr>
             <a:r>
-              <a:rPr sz="3200" b="1" i="0">
-                <a:solidFill>
-                  <a:srgbClr val="FFFFFF"/>
-                </a:solidFill>
-                <a:latin typeface="Inter"/>
-              </a:rPr>
-              <a:t>Каркас — Клод, детали — Гемини,
-сценарии и рынок 2025 — Грок</a:t>
-            </a:r>
-          </a:p>
-        </p:txBody>
-      </p:sp>
-      <p:sp>
-        <p:nvSpPr>
-          <p:cNvPr id="6" name="Rectangle 5"/>
+              <a:rPr sz="1019">
+                <a:solidFill>
+                  <a:srgbClr val="2F5FE3"/>
+                </a:solidFill>
+                <a:latin typeface="Inter"/>
+              </a:rPr>
+              <a:t>▪  </a:t>
+            </a:r>
+            <a:r>
+              <a:rPr sz="1019" b="1">
+                <a:solidFill>
+                  <a:srgbClr val="0E1726"/>
+                </a:solidFill>
+                <a:latin typeface="Inter"/>
+              </a:rPr>
+              <a:t>Веса</a:t>
+            </a:r>
+            <a:r>
+              <a:rPr sz="1019">
+                <a:solidFill>
+                  <a:srgbClr val="0E1726"/>
+                </a:solidFill>
+                <a:latin typeface="Inter"/>
+              </a:rPr>
+              <a:t> </a:t>
+            </a:r>
+            <a:r>
+              <a:rPr sz="1019">
+                <a:solidFill>
+                  <a:srgbClr val="0E1726"/>
+                </a:solidFill>
+                <a:latin typeface="Inter"/>
+              </a:rPr>
+              <a:t>постстратификация по РОМИР, вес не выше 3,0</a:t>
+            </a:r>
+          </a:p>
+        </p:txBody>
+      </p:sp>
+      <p:sp>
+        <p:nvSpPr>
+          <p:cNvPr id="15" name="Rounded Rectangle 14"/>
           <p:cNvSpPr/>
           <p:nvPr/>
         </p:nvSpPr>
         <p:spPr>
           <a:xfrm>
-            <a:off x="868680" y="2788920"/>
-            <a:ext cx="1828800" cy="45720"/>
+            <a:off x="6190488" y="1828800"/>
+            <a:ext cx="5349240" cy="3310128"/>
+          </a:xfrm>
+          <a:prstGeom prst="roundRect">
+            <a:avLst/>
+          </a:prstGeom>
+          <a:solidFill>
+            <a:srgbClr val="F2F5F9"/>
+          </a:solidFill>
+          <a:ln>
+            <a:noFill/>
+          </a:ln>
+          <a:effectLst/>
+        </p:spPr>
+        <p:txBody>
+          <a:bodyPr rtlCol="0" anchor="ctr"/>
+          <a:lstStyle/>
+          <a:p>
+            <a:pPr algn="ctr"/>
+          </a:p>
+        </p:txBody>
+      </p:sp>
+      <p:sp>
+        <p:nvSpPr>
+          <p:cNvPr id="16" name="Rectangle 15"/>
+          <p:cNvSpPr/>
+          <p:nvPr/>
+        </p:nvSpPr>
+        <p:spPr>
+          <a:xfrm>
+            <a:off x="6190488" y="1828800"/>
+            <a:ext cx="68580" cy="3310128"/>
+          </a:xfrm>
+          <a:prstGeom prst="rect">
+            <a:avLst/>
+          </a:prstGeom>
+          <a:solidFill>
+            <a:srgbClr val="D1820E"/>
+          </a:solidFill>
+          <a:ln>
+            <a:noFill/>
+          </a:ln>
+          <a:effectLst/>
+        </p:spPr>
+        <p:txBody>
+          <a:bodyPr rtlCol="0" anchor="ctr"/>
+          <a:lstStyle/>
+          <a:p>
+            <a:pPr algn="ctr"/>
+          </a:p>
+        </p:txBody>
+      </p:sp>
+      <p:sp>
+        <p:nvSpPr>
+          <p:cNvPr id="17" name="TextBox 16"/>
+          <p:cNvSpPr txBox="1"/>
+          <p:nvPr/>
+        </p:nvSpPr>
+        <p:spPr>
+          <a:xfrm>
+            <a:off x="6428232" y="1956816"/>
+            <a:ext cx="4937760" cy="256032"/>
+          </a:xfrm>
+          <a:prstGeom prst="rect">
+            <a:avLst/>
+          </a:prstGeom>
+          <a:noFill/>
+        </p:spPr>
+        <p:txBody>
+          <a:bodyPr wrap="square" lIns="0" rIns="0" tIns="0" bIns="0" anchor="t">
+            <a:spAutoFit/>
+          </a:bodyPr>
+          <a:lstStyle/>
+          <a:p>
+            <a:pPr algn="l"/>
+            <a:r>
+              <a:rPr sz="1100" b="1" i="0">
+                <a:solidFill>
+                  <a:srgbClr val="D1820E"/>
+                </a:solidFill>
+                <a:latin typeface="Inter"/>
+              </a:rPr>
+              <a:t>G-03 · полевой тест «готовности к пользе»</a:t>
+            </a:r>
+          </a:p>
+        </p:txBody>
+      </p:sp>
+      <p:sp>
+        <p:nvSpPr>
+          <p:cNvPr id="18" name="TextBox 17"/>
+          <p:cNvSpPr txBox="1"/>
+          <p:nvPr/>
+        </p:nvSpPr>
+        <p:spPr>
+          <a:xfrm>
+            <a:off x="6428232" y="2249424"/>
+            <a:ext cx="4937760" cy="457200"/>
+          </a:xfrm>
+          <a:prstGeom prst="rect">
+            <a:avLst/>
+          </a:prstGeom>
+          <a:noFill/>
+        </p:spPr>
+        <p:txBody>
+          <a:bodyPr wrap="square" lIns="0" rIns="0" tIns="0" bIns="0" anchor="t">
+            <a:spAutoFit/>
+          </a:bodyPr>
+          <a:lstStyle/>
+          <a:p>
+            <a:pPr algn="l"/>
+            <a:r>
+              <a:rPr sz="2200" b="1" i="0">
+                <a:solidFill>
+                  <a:srgbClr val="0E1726"/>
+                </a:solidFill>
+                <a:latin typeface="Inter"/>
+              </a:rPr>
+              <a:t>1000 человек на страну</a:t>
+            </a:r>
+          </a:p>
+        </p:txBody>
+      </p:sp>
+      <p:sp>
+        <p:nvSpPr>
+          <p:cNvPr id="19" name="TextBox 18"/>
+          <p:cNvSpPr txBox="1"/>
+          <p:nvPr/>
+        </p:nvSpPr>
+        <p:spPr>
+          <a:xfrm>
+            <a:off x="6428232" y="2761488"/>
+            <a:ext cx="4892040" cy="2286000"/>
+          </a:xfrm>
+          <a:prstGeom prst="rect">
+            <a:avLst/>
+          </a:prstGeom>
+          <a:noFill/>
+        </p:spPr>
+        <p:txBody>
+          <a:bodyPr wrap="square" lIns="0" rIns="0" tIns="0" bIns="0">
+            <a:noAutofit/>
+          </a:bodyPr>
+          <a:lstStyle/>
+          <a:p>
+            <a:pPr marL="237744" indent="-237744">
+              <a:lnSpc>
+                <a:spcPct val="112000"/>
+              </a:lnSpc>
+              <a:spcAft>
+                <a:spcPts val="720"/>
+              </a:spcAft>
+            </a:pPr>
+            <a:r>
+              <a:rPr sz="1019">
+                <a:solidFill>
+                  <a:srgbClr val="D1820E"/>
+                </a:solidFill>
+                <a:latin typeface="Inter"/>
+              </a:rPr>
+              <a:t>▪  </a:t>
+            </a:r>
+            <a:r>
+              <a:rPr sz="1019" b="1">
+                <a:solidFill>
+                  <a:srgbClr val="0E1726"/>
+                </a:solidFill>
+                <a:latin typeface="Inter"/>
+              </a:rPr>
+              <a:t>Что проверяем</a:t>
+            </a:r>
+            <a:r>
+              <a:rPr sz="1019">
+                <a:solidFill>
+                  <a:srgbClr val="0E1726"/>
+                </a:solidFill>
+                <a:latin typeface="Inter"/>
+              </a:rPr>
+              <a:t> </a:t>
+            </a:r>
+            <a:r>
+              <a:rPr sz="1019">
+                <a:solidFill>
+                  <a:srgbClr val="0E1726"/>
+                </a:solidFill>
+                <a:latin typeface="Inter"/>
+              </a:rPr>
+              <a:t>71,8 / 79,7% деклараций против 20 / 14% выбора при равной цене (page=46, 44)</a:t>
+            </a:r>
+          </a:p>
+          <a:p>
+            <a:pPr marL="237744" indent="-237744">
+              <a:lnSpc>
+                <a:spcPct val="112000"/>
+              </a:lnSpc>
+              <a:spcAft>
+                <a:spcPts val="720"/>
+              </a:spcAft>
+            </a:pPr>
+            <a:r>
+              <a:rPr sz="1019">
+                <a:solidFill>
+                  <a:srgbClr val="D1820E"/>
+                </a:solidFill>
+                <a:latin typeface="Inter"/>
+              </a:rPr>
+              <a:t>▪  </a:t>
+            </a:r>
+            <a:r>
+              <a:rPr sz="1019" b="1">
+                <a:solidFill>
+                  <a:srgbClr val="0E1726"/>
+                </a:solidFill>
+                <a:latin typeface="Inter"/>
+              </a:rPr>
+              <a:t>Дизайн</a:t>
+            </a:r>
+            <a:r>
+              <a:rPr sz="1019">
+                <a:solidFill>
+                  <a:srgbClr val="0E1726"/>
+                </a:solidFill>
+                <a:latin typeface="Inter"/>
+              </a:rPr>
+              <a:t> </a:t>
+            </a:r>
+            <a:r>
+              <a:rPr sz="1019">
+                <a:solidFill>
+                  <a:srgbClr val="0E1726"/>
+                </a:solidFill>
+                <a:latin typeface="Inter"/>
+              </a:rPr>
+              <a:t>слепой вкус → полка с клеймом и без → повторная покупка через две недели</a:t>
+            </a:r>
+          </a:p>
+          <a:p>
+            <a:pPr marL="237744" indent="-237744">
+              <a:lnSpc>
+                <a:spcPct val="112000"/>
+              </a:lnSpc>
+              <a:spcAft>
+                <a:spcPts val="720"/>
+              </a:spcAft>
+            </a:pPr>
+            <a:r>
+              <a:rPr sz="1019">
+                <a:solidFill>
+                  <a:srgbClr val="D1820E"/>
+                </a:solidFill>
+                <a:latin typeface="Inter"/>
+              </a:rPr>
+              <a:t>▪  </a:t>
+            </a:r>
+            <a:r>
+              <a:rPr sz="1019" b="1">
+                <a:solidFill>
+                  <a:srgbClr val="0E1726"/>
+                </a:solidFill>
+                <a:latin typeface="Inter"/>
+              </a:rPr>
+              <a:t>Цена</a:t>
+            </a:r>
+            <a:r>
+              <a:rPr sz="1019">
+                <a:solidFill>
+                  <a:srgbClr val="0E1726"/>
+                </a:solidFill>
+                <a:latin typeface="Inter"/>
+              </a:rPr>
+              <a:t> </a:t>
+            </a:r>
+            <a:r>
+              <a:rPr sz="1019">
+                <a:solidFill>
+                  <a:srgbClr val="0E1726"/>
+                </a:solidFill>
+                <a:latin typeface="Inter"/>
+              </a:rPr>
+              <a:t>три точки: 0 / +5 / +10% к обычному SKU</a:t>
+            </a:r>
+          </a:p>
+          <a:p>
+            <a:pPr marL="237744" indent="-237744">
+              <a:lnSpc>
+                <a:spcPct val="112000"/>
+              </a:lnSpc>
+              <a:spcAft>
+                <a:spcPts val="720"/>
+              </a:spcAft>
+            </a:pPr>
+            <a:r>
+              <a:rPr sz="1019">
+                <a:solidFill>
+                  <a:srgbClr val="D1820E"/>
+                </a:solidFill>
+                <a:latin typeface="Inter"/>
+              </a:rPr>
+              <a:t>▪  </a:t>
+            </a:r>
+            <a:r>
+              <a:rPr sz="1019" b="1">
+                <a:solidFill>
+                  <a:srgbClr val="0E1726"/>
+                </a:solidFill>
+                <a:latin typeface="Inter"/>
+              </a:rPr>
+              <a:t>Мощность</a:t>
+            </a:r>
+            <a:r>
+              <a:rPr sz="1019">
+                <a:solidFill>
+                  <a:srgbClr val="0E1726"/>
+                </a:solidFill>
+                <a:latin typeface="Inter"/>
+              </a:rPr>
+              <a:t> </a:t>
+            </a:r>
+            <a:r>
+              <a:rPr sz="1019">
+                <a:solidFill>
+                  <a:srgbClr val="0E1726"/>
+                </a:solidFill>
+                <a:latin typeface="Inter"/>
+              </a:rPr>
+              <a:t>парный дизайн, эффект 6 п.п.: 783–1001 человек</a:t>
+            </a:r>
+          </a:p>
+          <a:p>
+            <a:pPr marL="237744" indent="-237744">
+              <a:lnSpc>
+                <a:spcPct val="112000"/>
+              </a:lnSpc>
+            </a:pPr>
+            <a:r>
+              <a:rPr sz="1019">
+                <a:solidFill>
+                  <a:srgbClr val="D1820E"/>
+                </a:solidFill>
+                <a:latin typeface="Inter"/>
+              </a:rPr>
+              <a:t>▪  </a:t>
+            </a:r>
+            <a:r>
+              <a:rPr sz="1019" b="1">
+                <a:solidFill>
+                  <a:srgbClr val="0E1726"/>
+                </a:solidFill>
+                <a:latin typeface="Inter"/>
+              </a:rPr>
+              <a:t>Анализ</a:t>
+            </a:r>
+            <a:r>
+              <a:rPr sz="1019">
+                <a:solidFill>
+                  <a:srgbClr val="0E1726"/>
+                </a:solidFill>
+                <a:latin typeface="Inter"/>
+              </a:rPr>
+              <a:t> </a:t>
+            </a:r>
+            <a:r>
+              <a:rPr sz="1019">
+                <a:solidFill>
+                  <a:srgbClr val="0E1726"/>
+                </a:solidFill>
+                <a:latin typeface="Inter"/>
+              </a:rPr>
+              <a:t>McNemar по парам, логистика с поправкой на сегмент, разрез «различили / нет»</a:t>
+            </a:r>
+          </a:p>
+        </p:txBody>
+      </p:sp>
+      <p:sp>
+        <p:nvSpPr>
+          <p:cNvPr id="20" name="Rectangle 19"/>
+          <p:cNvSpPr/>
+          <p:nvPr/>
+        </p:nvSpPr>
+        <p:spPr>
+          <a:xfrm>
+            <a:off x="658368" y="5285232"/>
+            <a:ext cx="10881360" cy="868680"/>
+          </a:xfrm>
+          <a:prstGeom prst="rect">
+            <a:avLst/>
+          </a:prstGeom>
+          <a:solidFill>
+            <a:srgbClr val="FFFFFF"/>
+          </a:solidFill>
+          <a:ln>
+            <a:noFill/>
+          </a:ln>
+          <a:effectLst/>
+        </p:spPr>
+        <p:txBody>
+          <a:bodyPr rtlCol="0" anchor="ctr"/>
+          <a:lstStyle/>
+          <a:p>
+            <a:pPr algn="ctr"/>
+          </a:p>
+        </p:txBody>
+      </p:sp>
+      <p:sp>
+        <p:nvSpPr>
+          <p:cNvPr id="21" name="Rectangle 20"/>
+          <p:cNvSpPr/>
+          <p:nvPr/>
+        </p:nvSpPr>
+        <p:spPr>
+          <a:xfrm>
+            <a:off x="658368" y="5285232"/>
+            <a:ext cx="68580" cy="868680"/>
           </a:xfrm>
           <a:prstGeom prst="rect">
             <a:avLst/>
@@ -21895,14 +22956,14 @@
       </p:sp>
       <p:sp>
         <p:nvSpPr>
-          <p:cNvPr id="7" name="TextBox 6"/>
+          <p:cNvPr id="22" name="TextBox 21"/>
           <p:cNvSpPr txBox="1"/>
           <p:nvPr/>
         </p:nvSpPr>
         <p:spPr>
           <a:xfrm>
-            <a:off x="868680" y="3108960"/>
-            <a:ext cx="10332720" cy="1737360"/>
+            <a:off x="896112" y="5376672"/>
+            <a:ext cx="10515600" cy="713232"/>
           </a:xfrm>
           <a:prstGeom prst="rect">
             <a:avLst/>
@@ -21910,163 +22971,62 @@
           <a:noFill/>
         </p:spPr>
         <p:txBody>
-          <a:bodyPr wrap="square" lIns="0" rIns="0" tIns="0" bIns="0">
-            <a:noAutofit/>
+          <a:bodyPr wrap="square" lIns="0" rIns="0" tIns="0" bIns="0" anchor="t">
+            <a:spAutoFit/>
           </a:bodyPr>
           <a:lstStyle/>
           <a:p>
-            <a:pPr marL="237744" indent="-237744">
+            <a:pPr algn="l">
               <a:lnSpc>
-                <a:spcPct val="125000"/>
-              </a:lnSpc>
-              <a:spcAft>
-                <a:spcPts val="1440"/>
-              </a:spcAft>
-            </a:pPr>
-            <a:r>
-              <a:rPr sz="1200">
-                <a:solidFill>
-                  <a:srgbClr val="1E8A5F"/>
-                </a:solidFill>
-                <a:latin typeface="Inter"/>
-              </a:rPr>
-              <a:t>▪  </a:t>
-            </a:r>
-            <a:r>
-              <a:rPr sz="1200" b="1">
-                <a:solidFill>
-                  <a:srgbClr val="FFFFFF"/>
-                </a:solidFill>
-                <a:latin typeface="Inter"/>
-              </a:rPr>
-              <a:t>Каркас: работа Agent 1.</a:t>
-            </a:r>
-            <a:r>
-              <a:rPr sz="1200">
-                <a:solidFill>
-                  <a:srgbClr val="DDE4EE"/>
-                </a:solidFill>
-                <a:latin typeface="Inter"/>
-              </a:rPr>
-              <a:t> </a:t>
-            </a:r>
-            <a:r>
-              <a:rPr sz="1200">
-                <a:solidFill>
-                  <a:srgbClr val="DDE4EE"/>
-                </a:solidFill>
-                <a:latin typeface="Inter"/>
-              </a:rPr>
-              <a:t>Она единственная, где каждое утверждение имеет слайд, расчёт помечен, а сомнение оформлено как ограничение. На неё можно опереться в решениях.</a:t>
-            </a:r>
-          </a:p>
-          <a:p>
-            <a:pPr marL="237744" indent="-237744">
-              <a:lnSpc>
-                <a:spcPct val="125000"/>
-              </a:lnSpc>
-              <a:spcAft>
-                <a:spcPts val="1440"/>
-              </a:spcAft>
-            </a:pPr>
-            <a:r>
-              <a:rPr sz="1200">
-                <a:solidFill>
-                  <a:srgbClr val="1E8A5F"/>
-                </a:solidFill>
-                <a:latin typeface="Inter"/>
-              </a:rPr>
-              <a:t>▪  </a:t>
-            </a:r>
-            <a:r>
-              <a:rPr sz="1200" b="1">
-                <a:solidFill>
-                  <a:srgbClr val="FFFFFF"/>
-                </a:solidFill>
-                <a:latin typeface="Inter"/>
-              </a:rPr>
-              <a:t>Детали: работа Agent 3, только подтверждённое.</a:t>
-            </a:r>
-            <a:r>
-              <a:rPr sz="1200">
-                <a:solidFill>
-                  <a:srgbClr val="DDE4EE"/>
-                </a:solidFill>
-                <a:latin typeface="Inter"/>
-              </a:rPr>
-              <a:t> </a:t>
-            </a:r>
-            <a:r>
-              <a:rPr sz="1200">
-                <a:solidFill>
-                  <a:srgbClr val="DDE4EE"/>
-                </a:solidFill>
-                <a:latin typeface="Inter"/>
-              </a:rPr>
-              <a:t>Нарезка, сервелат, механика премиума, сегменты 55–75 и формула белка. Всё остальное — после сверки.</a:t>
-            </a:r>
-          </a:p>
-          <a:p>
-            <a:pPr marL="237744" indent="-237744">
-              <a:lnSpc>
-                <a:spcPct val="125000"/>
+                <a:spcPct val="118000"/>
               </a:lnSpc>
             </a:pPr>
             <a:r>
-              <a:rPr sz="1200">
-                <a:solidFill>
-                  <a:srgbClr val="1E8A5F"/>
-                </a:solidFill>
-                <a:latin typeface="Inter"/>
-              </a:rPr>
-              <a:t>▪  </a:t>
-            </a:r>
-            <a:r>
-              <a:rPr sz="1200" b="1">
-                <a:solidFill>
-                  <a:srgbClr val="FFFFFF"/>
-                </a:solidFill>
-                <a:latin typeface="Inter"/>
-              </a:rPr>
-              <a:t>Сценарии и второй период рынка: Agent 2.</a:t>
-            </a:r>
-            <a:r>
-              <a:rPr sz="1200">
-                <a:solidFill>
-                  <a:srgbClr val="DDE4EE"/>
-                </a:solidFill>
-                <a:latin typeface="Inter"/>
-              </a:rPr>
-              <a:t> </a:t>
-            </a:r>
-            <a:r>
-              <a:rPr sz="1200">
-                <a:solidFill>
-                  <a:srgbClr val="DDE4EE"/>
-                </a:solidFill>
-                <a:latin typeface="Inter"/>
-              </a:rPr>
-              <a:t>План против импульса, «вечер наедине с собой» и мясо +9,9% за 2025.</a:t>
-            </a:r>
-          </a:p>
-        </p:txBody>
-      </p:sp>
-      <p:sp>
-        <p:nvSpPr>
-          <p:cNvPr id="8" name="Rounded Rectangle 7"/>
+              <a:rPr sz="1050" b="0" i="0">
+                <a:solidFill>
+                  <a:srgbClr val="0E1726"/>
+                </a:solidFill>
+                <a:latin typeface="Inter"/>
+              </a:rPr>
+              <a:t>Критерий решения по клейму: прирост выбора ≥5 п.п. при нулевой премии и ≥3 п.п. при +10% — клеймо идёт на пачку. Если слепой вкус различили меньше половины или эффект исчезает при +5% — вместо белка развиваем «мясо и состав»: при равной цене они уже обгоняют белок на 15 п.п. (page=44).</a:t>
+            </a:r>
+          </a:p>
+        </p:txBody>
+      </p:sp>
+    </p:spTree>
+  </p:cSld>
+  <p:clrMapOvr>
+    <a:masterClrMapping/>
+  </p:clrMapOvr>
+</p:sld>
+</file>
+
+<file path=ppt/slides/slide27.xml><?xml version="1.0" encoding="utf-8"?>
+<p:sld xmlns:a="http://schemas.openxmlformats.org/drawingml/2006/main" xmlns:p="http://schemas.openxmlformats.org/presentationml/2006/main" xmlns:r="http://schemas.openxmlformats.org/officeDocument/2006/relationships">
+  <p:cSld>
+    <p:spTree>
+      <p:nvGrpSpPr>
+        <p:cNvPr id="1" name=""/>
+        <p:cNvGrpSpPr/>
+        <p:nvPr/>
+      </p:nvGrpSpPr>
+      <p:grpSpPr/>
+      <p:sp>
+        <p:nvSpPr>
+          <p:cNvPr id="2" name="Rectangle 1"/>
           <p:cNvSpPr/>
           <p:nvPr/>
         </p:nvSpPr>
         <p:spPr>
           <a:xfrm>
-            <a:off x="868680" y="5074920"/>
-            <a:ext cx="10424160" cy="822960"/>
-          </a:xfrm>
-          <a:prstGeom prst="roundRect">
+            <a:off x="0" y="0"/>
+            <a:ext cx="12191695" cy="6858000"/>
+          </a:xfrm>
+          <a:prstGeom prst="rect">
             <a:avLst/>
           </a:prstGeom>
           <a:solidFill>
-            <a:srgbClr val="182538"/>
+            <a:srgbClr val="FFFFFF"/>
           </a:solidFill>
           <a:ln>
             <a:noFill/>
@@ -22083,14 +23043,14 @@
       </p:sp>
       <p:sp>
         <p:nvSpPr>
-          <p:cNvPr id="9" name="TextBox 8"/>
+          <p:cNvPr id="3" name="TextBox 2"/>
           <p:cNvSpPr txBox="1"/>
           <p:nvPr/>
         </p:nvSpPr>
         <p:spPr>
           <a:xfrm>
-            <a:off x="1097280" y="5212080"/>
-            <a:ext cx="9966960" cy="640080"/>
+            <a:off x="658368" y="402336"/>
+            <a:ext cx="10881360" cy="219456"/>
           </a:xfrm>
           <a:prstGeom prst="rect">
             <a:avLst/>
@@ -22103,39 +23063,109 @@
           </a:bodyPr>
           <a:lstStyle/>
           <a:p>
+            <a:pPr algn="l"/>
+            <a:r>
+              <a:rPr sz="1000" b="1" i="0">
+                <a:solidFill>
+                  <a:srgbClr val="606B7A"/>
+                </a:solidFill>
+                <a:latin typeface="Inter"/>
+              </a:rPr>
+              <a:t>ИСТОЧНИКИ</a:t>
+            </a:r>
+          </a:p>
+        </p:txBody>
+      </p:sp>
+      <p:sp>
+        <p:nvSpPr>
+          <p:cNvPr id="4" name="TextBox 3"/>
+          <p:cNvSpPr txBox="1"/>
+          <p:nvPr/>
+        </p:nvSpPr>
+        <p:spPr>
+          <a:xfrm>
+            <a:off x="658368" y="658368"/>
+            <a:ext cx="10927080" cy="868680"/>
+          </a:xfrm>
+          <a:prstGeom prst="rect">
+            <a:avLst/>
+          </a:prstGeom>
+          <a:noFill/>
+        </p:spPr>
+        <p:txBody>
+          <a:bodyPr wrap="square" lIns="0" rIns="0" tIns="0" bIns="0" anchor="t">
+            <a:spAutoFit/>
+          </a:bodyPr>
+          <a:lstStyle/>
+          <a:p>
             <a:pPr algn="l">
               <a:lnSpc>
-                <a:spcPct val="125000"/>
+                <a:spcPct val="95000"/>
               </a:lnSpc>
             </a:pPr>
             <a:r>
-              <a:rPr sz="1100" b="0" i="0">
-                <a:solidFill>
-                  <a:srgbClr val="C6CFDB"/>
-                </a:solidFill>
-                <a:latin typeface="Inter"/>
-              </a:rPr>
-              <a:t>Расхождения по рынку и демографии решены в пользу колоды. Расхождения по стратегии остаются выбором: данные позволяют взвесить ставки, но не отменяют решения.</a:t>
-            </a:r>
-          </a:p>
-        </p:txBody>
-      </p:sp>
-      <p:sp>
-        <p:nvSpPr>
-          <p:cNvPr id="10" name="Rectangle 9"/>
+              <a:rPr sz="2500" b="1" i="0">
+                <a:solidFill>
+                  <a:srgbClr val="0E1726"/>
+                </a:solidFill>
+                <a:latin typeface="Inter"/>
+              </a:rPr>
+              <a:t>Что читалось: одна колода и шесть для анализа</a:t>
+            </a:r>
+          </a:p>
+        </p:txBody>
+      </p:sp>
+      <p:sp>
+        <p:nvSpPr>
+          <p:cNvPr id="5" name="TextBox 4"/>
+          <p:cNvSpPr txBox="1"/>
+          <p:nvPr/>
+        </p:nvSpPr>
+        <p:spPr>
+          <a:xfrm>
+            <a:off x="658368" y="1389888"/>
+            <a:ext cx="10927080" cy="365760"/>
+          </a:xfrm>
+          <a:prstGeom prst="rect">
+            <a:avLst/>
+          </a:prstGeom>
+          <a:noFill/>
+        </p:spPr>
+        <p:txBody>
+          <a:bodyPr wrap="square" lIns="0" rIns="0" tIns="0" bIns="0" anchor="t">
+            <a:spAutoFit/>
+          </a:bodyPr>
+          <a:lstStyle/>
+          <a:p>
+            <a:pPr algn="l"/>
+            <a:r>
+              <a:rPr sz="1250" b="0" i="0">
+                <a:solidFill>
+                  <a:srgbClr val="606B7A"/>
+                </a:solidFill>
+                <a:latin typeface="Inter"/>
+              </a:rPr>
+              <a:t>Каждое число в презентации адресовано парой deck=&lt;папка&gt;, page=&lt;N&gt;; ниже — все семь колод</a:t>
+            </a:r>
+          </a:p>
+        </p:txBody>
+      </p:sp>
+      <p:sp>
+        <p:nvSpPr>
+          <p:cNvPr id="6" name="Rectangle 5"/>
           <p:cNvSpPr/>
           <p:nvPr/>
         </p:nvSpPr>
         <p:spPr>
           <a:xfrm>
-            <a:off x="658368" y="6419088"/>
-            <a:ext cx="10881360" cy="10972"/>
+            <a:off x="658368" y="1819656"/>
+            <a:ext cx="1371600" cy="41148"/>
           </a:xfrm>
           <a:prstGeom prst="rect">
             <a:avLst/>
           </a:prstGeom>
           <a:solidFill>
-            <a:srgbClr val="333F50"/>
+            <a:srgbClr val="2A3545"/>
           </a:solidFill>
           <a:ln>
             <a:noFill/>
@@ -22152,7 +23182,37 @@
       </p:sp>
       <p:sp>
         <p:nvSpPr>
-          <p:cNvPr id="11" name="TextBox 10"/>
+          <p:cNvPr id="7" name="Rectangle 6"/>
+          <p:cNvSpPr/>
+          <p:nvPr/>
+        </p:nvSpPr>
+        <p:spPr>
+          <a:xfrm>
+            <a:off x="658368" y="6419088"/>
+            <a:ext cx="10881360" cy="10972"/>
+          </a:xfrm>
+          <a:prstGeom prst="rect">
+            <a:avLst/>
+          </a:prstGeom>
+          <a:solidFill>
+            <a:srgbClr val="D5DCE5"/>
+          </a:solidFill>
+          <a:ln>
+            <a:noFill/>
+          </a:ln>
+          <a:effectLst/>
+        </p:spPr>
+        <p:txBody>
+          <a:bodyPr rtlCol="0" anchor="ctr"/>
+          <a:lstStyle/>
+          <a:p>
+            <a:pPr algn="ctr"/>
+          </a:p>
+        </p:txBody>
+      </p:sp>
+      <p:sp>
+        <p:nvSpPr>
+          <p:cNvPr id="8" name="TextBox 7"/>
           <p:cNvSpPr txBox="1"/>
           <p:nvPr/>
         </p:nvSpPr>
@@ -22187,7 +23247,7 @@
       </p:sp>
       <p:sp>
         <p:nvSpPr>
-          <p:cNvPr id="12" name="TextBox 11"/>
+          <p:cNvPr id="9" name="TextBox 8"/>
           <p:cNvSpPr txBox="1"/>
           <p:nvPr/>
         </p:nvSpPr>
@@ -22215,7 +23275,1500 @@
                 </a:solidFill>
                 <a:latin typeface="Inter"/>
               </a:rPr>
-              <a:t>26</a:t>
+              <a:t>27</a:t>
+            </a:r>
+          </a:p>
+        </p:txBody>
+      </p:sp>
+      <p:graphicFrame>
+        <p:nvGraphicFramePr>
+          <p:cNvPr id="10" name="Table 9"/>
+          <p:cNvGraphicFramePr>
+            <a:graphicFrameLocks noGrp="1"/>
+          </p:cNvGraphicFramePr>
+          <p:nvPr/>
+        </p:nvGraphicFramePr>
+        <p:xfrm>
+          <a:off x="658368" y="1828800"/>
+          <a:ext cx="10881360" cy="2999232"/>
+        </p:xfrm>
+        <a:graphic>
+          <a:graphicData uri="http://schemas.openxmlformats.org/drawingml/2006/table">
+            <a:tbl>
+              <a:tblPr firstRow="1">
+                <a:tableStyleId>{5C22544A-7EE6-4342-B048-85BDC9FD1C3A}</a:tableStyleId>
+              </a:tblPr>
+              <a:tblGrid>
+                <a:gridCol w="457200"/>
+                <a:gridCol w="3383280"/>
+                <a:gridCol w="6035040"/>
+                <a:gridCol w="1005840"/>
+              </a:tblGrid>
+              <a:tr h="310896">
+                <a:tc>
+                  <a:txBody>
+                    <a:bodyPr wrap="square"/>
+                    <a:lstStyle/>
+                    <a:p>
+                      <a:pPr algn="ctr"/>
+                      <a:r>
+                        <a:rPr sz="950" b="1">
+                          <a:solidFill>
+                            <a:srgbClr val="FFFFFF"/>
+                          </a:solidFill>
+                          <a:latin typeface="Inter"/>
+                        </a:rPr>
+                        <a:t>№</a:t>
+                      </a:r>
+                    </a:p>
+                  </a:txBody>
+                  <a:tcPr marL="64008" marR="54864" marT="27432" marB="27432" anchor="ctr">
+                    <a:solidFill>
+                      <a:srgbClr val="0E1726"/>
+                    </a:solidFill>
+                  </a:tcPr>
+                </a:tc>
+                <a:tc>
+                  <a:txBody>
+                    <a:bodyPr wrap="square"/>
+                    <a:lstStyle/>
+                    <a:p>
+                      <a:pPr algn="l"/>
+                      <a:r>
+                        <a:rPr sz="950" b="1">
+                          <a:solidFill>
+                            <a:srgbClr val="FFFFFF"/>
+                          </a:solidFill>
+                          <a:latin typeface="Inter"/>
+                        </a:rPr>
+                        <a:t>Колода (deck)</a:t>
+                      </a:r>
+                    </a:p>
+                  </a:txBody>
+                  <a:tcPr marL="64008" marR="54864" marT="27432" marB="27432" anchor="ctr">
+                    <a:solidFill>
+                      <a:srgbClr val="0E1726"/>
+                    </a:solidFill>
+                  </a:tcPr>
+                </a:tc>
+                <a:tc>
+                  <a:txBody>
+                    <a:bodyPr wrap="square"/>
+                    <a:lstStyle/>
+                    <a:p>
+                      <a:pPr algn="l"/>
+                      <a:r>
+                        <a:rPr sz="950" b="1">
+                          <a:solidFill>
+                            <a:srgbClr val="FFFFFF"/>
+                          </a:solidFill>
+                          <a:latin typeface="Inter"/>
+                        </a:rPr>
+                        <a:t>Что даёт</a:t>
+                      </a:r>
+                    </a:p>
+                  </a:txBody>
+                  <a:tcPr marL="64008" marR="54864" marT="27432" marB="27432" anchor="ctr">
+                    <a:solidFill>
+                      <a:srgbClr val="0E1726"/>
+                    </a:solidFill>
+                  </a:tcPr>
+                </a:tc>
+                <a:tc>
+                  <a:txBody>
+                    <a:bodyPr wrap="square"/>
+                    <a:lstStyle/>
+                    <a:p>
+                      <a:pPr algn="ctr"/>
+                      <a:r>
+                        <a:rPr sz="950" b="1">
+                          <a:solidFill>
+                            <a:srgbClr val="FFFFFF"/>
+                          </a:solidFill>
+                          <a:latin typeface="Inter"/>
+                        </a:rPr>
+                        <a:t>Слайдов</a:t>
+                      </a:r>
+                    </a:p>
+                  </a:txBody>
+                  <a:tcPr marL="64008" marR="54864" marT="27432" marB="27432" anchor="ctr">
+                    <a:solidFill>
+                      <a:srgbClr val="0E1726"/>
+                    </a:solidFill>
+                  </a:tcPr>
+                </a:tc>
+              </a:tr>
+              <a:tr h="384048">
+                <a:tc>
+                  <a:txBody>
+                    <a:bodyPr wrap="square"/>
+                    <a:lstStyle/>
+                    <a:p>
+                      <a:pPr algn="ctr"/>
+                      <a:r>
+                        <a:rPr sz="930" b="1">
+                          <a:solidFill>
+                            <a:srgbClr val="0E1726"/>
+                          </a:solidFill>
+                          <a:latin typeface="Inter"/>
+                        </a:rPr>
+                        <a:t>1</a:t>
+                      </a:r>
+                    </a:p>
+                  </a:txBody>
+                  <a:tcPr marL="64008" marR="54864" marT="27432" marB="27432" anchor="ctr">
+                    <a:solidFill>
+                      <a:srgbClr val="FFFFFF"/>
+                    </a:solidFill>
+                  </a:tcPr>
+                </a:tc>
+                <a:tc>
+                  <a:txBody>
+                    <a:bodyPr wrap="square"/>
+                    <a:lstStyle/>
+                    <a:p>
+                      <a:pPr algn="l"/>
+                      <a:r>
+                        <a:rPr sz="930" b="0">
+                          <a:solidFill>
+                            <a:srgbClr val="2F5FE3"/>
+                          </a:solidFill>
+                          <a:latin typeface="Inter"/>
+                        </a:rPr>
+                        <a:t>inkofood-2026</a:t>
+                      </a:r>
+                    </a:p>
+                  </a:txBody>
+                  <a:tcPr marL="64008" marR="54864" marT="27432" marB="27432" anchor="ctr">
+                    <a:solidFill>
+                      <a:srgbClr val="FFFFFF"/>
+                    </a:solidFill>
+                  </a:tcPr>
+                </a:tc>
+                <a:tc>
+                  <a:txBody>
+                    <a:bodyPr wrap="square"/>
+                    <a:lstStyle/>
+                    <a:p>
+                      <a:pPr algn="l"/>
+                      <a:r>
+                        <a:rPr sz="930" b="0">
+                          <a:solidFill>
+                            <a:srgbClr val="0E1726"/>
+                          </a:solidFill>
+                          <a:latin typeface="Inter"/>
+                        </a:rPr>
+                        <a:t>U&amp;A мясной гастрономии, октябрь 2026: n=900, РФ 600 / РБ 300 — первоисточник</a:t>
+                      </a:r>
+                    </a:p>
+                  </a:txBody>
+                  <a:tcPr marL="64008" marR="54864" marT="27432" marB="27432" anchor="ctr">
+                    <a:solidFill>
+                      <a:srgbClr val="FFFFFF"/>
+                    </a:solidFill>
+                  </a:tcPr>
+                </a:tc>
+                <a:tc>
+                  <a:txBody>
+                    <a:bodyPr wrap="square"/>
+                    <a:lstStyle/>
+                    <a:p>
+                      <a:pPr algn="ctr"/>
+                      <a:r>
+                        <a:rPr sz="930" b="0">
+                          <a:solidFill>
+                            <a:srgbClr val="0E1726"/>
+                          </a:solidFill>
+                          <a:latin typeface="Inter"/>
+                        </a:rPr>
+                        <a:t>69</a:t>
+                      </a:r>
+                    </a:p>
+                  </a:txBody>
+                  <a:tcPr marL="64008" marR="54864" marT="27432" marB="27432" anchor="ctr">
+                    <a:solidFill>
+                      <a:srgbClr val="FFFFFF"/>
+                    </a:solidFill>
+                  </a:tcPr>
+                </a:tc>
+              </a:tr>
+              <a:tr h="384048">
+                <a:tc>
+                  <a:txBody>
+                    <a:bodyPr wrap="square"/>
+                    <a:lstStyle/>
+                    <a:p>
+                      <a:pPr algn="ctr"/>
+                      <a:r>
+                        <a:rPr sz="930" b="1">
+                          <a:solidFill>
+                            <a:srgbClr val="0E1726"/>
+                          </a:solidFill>
+                          <a:latin typeface="Inter"/>
+                        </a:rPr>
+                        <a:t>2</a:t>
+                      </a:r>
+                    </a:p>
+                  </a:txBody>
+                  <a:tcPr marL="64008" marR="54864" marT="27432" marB="27432" anchor="ctr">
+                    <a:solidFill>
+                      <a:srgbClr val="F2F5F9"/>
+                    </a:solidFill>
+                  </a:tcPr>
+                </a:tc>
+                <a:tc>
+                  <a:txBody>
+                    <a:bodyPr wrap="square"/>
+                    <a:lstStyle/>
+                    <a:p>
+                      <a:pPr algn="l"/>
+                      <a:r>
+                        <a:rPr sz="930" b="0">
+                          <a:solidFill>
+                            <a:srgbClr val="0E1726"/>
+                          </a:solidFill>
+                          <a:latin typeface="Inter"/>
+                        </a:rPr>
+                        <a:t>nielsen-itogi-2025-vektory-2026</a:t>
+                      </a:r>
+                    </a:p>
+                  </a:txBody>
+                  <a:tcPr marL="64008" marR="54864" marT="27432" marB="27432" anchor="ctr">
+                    <a:solidFill>
+                      <a:srgbClr val="F2F5F9"/>
+                    </a:solidFill>
+                  </a:tcPr>
+                </a:tc>
+                <a:tc>
+                  <a:txBody>
+                    <a:bodyPr wrap="square"/>
+                    <a:lstStyle/>
+                    <a:p>
+                      <a:pPr algn="l"/>
+                      <a:r>
+                        <a:rPr sz="930" b="0">
+                          <a:solidFill>
+                            <a:srgbClr val="0E1726"/>
+                          </a:solidFill>
+                          <a:latin typeface="Inter"/>
+                        </a:rPr>
+                        <a:t>Рынок FMCG за 2025: рост 11,7%, мясо +9,9%, СТМ 15%, 80% продаж у 2,9% SKU</a:t>
+                      </a:r>
+                    </a:p>
+                  </a:txBody>
+                  <a:tcPr marL="64008" marR="54864" marT="27432" marB="27432" anchor="ctr">
+                    <a:solidFill>
+                      <a:srgbClr val="F2F5F9"/>
+                    </a:solidFill>
+                  </a:tcPr>
+                </a:tc>
+                <a:tc>
+                  <a:txBody>
+                    <a:bodyPr wrap="square"/>
+                    <a:lstStyle/>
+                    <a:p>
+                      <a:pPr algn="ctr"/>
+                      <a:r>
+                        <a:rPr sz="930" b="0">
+                          <a:solidFill>
+                            <a:srgbClr val="0E1726"/>
+                          </a:solidFill>
+                          <a:latin typeface="Inter"/>
+                        </a:rPr>
+                        <a:t>39</a:t>
+                      </a:r>
+                    </a:p>
+                  </a:txBody>
+                  <a:tcPr marL="64008" marR="54864" marT="27432" marB="27432" anchor="ctr">
+                    <a:solidFill>
+                      <a:srgbClr val="F2F5F9"/>
+                    </a:solidFill>
+                  </a:tcPr>
+                </a:tc>
+              </a:tr>
+              <a:tr h="384048">
+                <a:tc>
+                  <a:txBody>
+                    <a:bodyPr wrap="square"/>
+                    <a:lstStyle/>
+                    <a:p>
+                      <a:pPr algn="ctr"/>
+                      <a:r>
+                        <a:rPr sz="930" b="1">
+                          <a:solidFill>
+                            <a:srgbClr val="0E1726"/>
+                          </a:solidFill>
+                          <a:latin typeface="Inter"/>
+                        </a:rPr>
+                        <a:t>3</a:t>
+                      </a:r>
+                    </a:p>
+                  </a:txBody>
+                  <a:tcPr marL="64008" marR="54864" marT="27432" marB="27432" anchor="ctr">
+                    <a:solidFill>
+                      <a:srgbClr val="FFFFFF"/>
+                    </a:solidFill>
+                  </a:tcPr>
+                </a:tc>
+                <a:tc>
+                  <a:txBody>
+                    <a:bodyPr wrap="square"/>
+                    <a:lstStyle/>
+                    <a:p>
+                      <a:pPr algn="l"/>
+                      <a:r>
+                        <a:rPr sz="930" b="0">
+                          <a:solidFill>
+                            <a:srgbClr val="0E1726"/>
+                          </a:solidFill>
+                          <a:latin typeface="Inter"/>
+                        </a:rPr>
+                        <a:t>nielsen-fmcg-do-avgusta-2026</a:t>
+                      </a:r>
+                    </a:p>
+                  </a:txBody>
+                  <a:tcPr marL="64008" marR="54864" marT="27432" marB="27432" anchor="ctr">
+                    <a:solidFill>
+                      <a:srgbClr val="FFFFFF"/>
+                    </a:solidFill>
+                  </a:tcPr>
+                </a:tc>
+                <a:tc>
+                  <a:txBody>
+                    <a:bodyPr wrap="square"/>
+                    <a:lstStyle/>
+                    <a:p>
+                      <a:pPr algn="l"/>
+                      <a:r>
+                        <a:rPr sz="930" b="0">
+                          <a:solidFill>
+                            <a:srgbClr val="0E1726"/>
+                          </a:solidFill>
+                          <a:latin typeface="Inter"/>
+                        </a:rPr>
+                        <a:t>Январь–август 2026: рост 10,6%, онлайн +35,0%, СТМ 15,3% в продовольствии</a:t>
+                      </a:r>
+                    </a:p>
+                  </a:txBody>
+                  <a:tcPr marL="64008" marR="54864" marT="27432" marB="27432" anchor="ctr">
+                    <a:solidFill>
+                      <a:srgbClr val="FFFFFF"/>
+                    </a:solidFill>
+                  </a:tcPr>
+                </a:tc>
+                <a:tc>
+                  <a:txBody>
+                    <a:bodyPr wrap="square"/>
+                    <a:lstStyle/>
+                    <a:p>
+                      <a:pPr algn="ctr"/>
+                      <a:r>
+                        <a:rPr sz="930" b="0">
+                          <a:solidFill>
+                            <a:srgbClr val="0E1726"/>
+                          </a:solidFill>
+                          <a:latin typeface="Inter"/>
+                        </a:rPr>
+                        <a:t>18</a:t>
+                      </a:r>
+                    </a:p>
+                  </a:txBody>
+                  <a:tcPr marL="64008" marR="54864" marT="27432" marB="27432" anchor="ctr">
+                    <a:solidFill>
+                      <a:srgbClr val="FFFFFF"/>
+                    </a:solidFill>
+                  </a:tcPr>
+                </a:tc>
+              </a:tr>
+              <a:tr h="384048">
+                <a:tc>
+                  <a:txBody>
+                    <a:bodyPr wrap="square"/>
+                    <a:lstStyle/>
+                    <a:p>
+                      <a:pPr algn="ctr"/>
+                      <a:r>
+                        <a:rPr sz="930" b="1">
+                          <a:solidFill>
+                            <a:srgbClr val="0E1726"/>
+                          </a:solidFill>
+                          <a:latin typeface="Inter"/>
+                        </a:rPr>
+                        <a:t>4</a:t>
+                      </a:r>
+                    </a:p>
+                  </a:txBody>
+                  <a:tcPr marL="64008" marR="54864" marT="27432" marB="27432" anchor="ctr">
+                    <a:solidFill>
+                      <a:srgbClr val="F2F5F9"/>
+                    </a:solidFill>
+                  </a:tcPr>
+                </a:tc>
+                <a:tc>
+                  <a:txBody>
+                    <a:bodyPr wrap="square"/>
+                    <a:lstStyle/>
+                    <a:p>
+                      <a:pPr algn="l"/>
+                      <a:r>
+                        <a:rPr sz="930" b="0">
+                          <a:solidFill>
+                            <a:srgbClr val="0E1726"/>
+                          </a:solidFill>
+                          <a:latin typeface="Inter"/>
+                        </a:rPr>
+                        <a:t>romir-trendy-2026</a:t>
+                      </a:r>
+                    </a:p>
+                  </a:txBody>
+                  <a:tcPr marL="64008" marR="54864" marT="27432" marB="27432" anchor="ctr">
+                    <a:solidFill>
+                      <a:srgbClr val="F2F5F9"/>
+                    </a:solidFill>
+                  </a:tcPr>
+                </a:tc>
+                <a:tc>
+                  <a:txBody>
+                    <a:bodyPr wrap="square"/>
+                    <a:lstStyle/>
+                    <a:p>
+                      <a:pPr algn="l"/>
+                      <a:r>
+                        <a:rPr sz="930" b="0">
+                          <a:solidFill>
+                            <a:srgbClr val="0E1726"/>
+                          </a:solidFill>
+                          <a:latin typeface="Inter"/>
+                        </a:rPr>
+                        <a:t>Потребительская панель: 25/38/36% по возрасту, траты, индекс уверенности +11 → −9</a:t>
+                      </a:r>
+                    </a:p>
+                  </a:txBody>
+                  <a:tcPr marL="64008" marR="54864" marT="27432" marB="27432" anchor="ctr">
+                    <a:solidFill>
+                      <a:srgbClr val="F2F5F9"/>
+                    </a:solidFill>
+                  </a:tcPr>
+                </a:tc>
+                <a:tc>
+                  <a:txBody>
+                    <a:bodyPr wrap="square"/>
+                    <a:lstStyle/>
+                    <a:p>
+                      <a:pPr algn="ctr"/>
+                      <a:r>
+                        <a:rPr sz="930" b="0">
+                          <a:solidFill>
+                            <a:srgbClr val="0E1726"/>
+                          </a:solidFill>
+                          <a:latin typeface="Inter"/>
+                        </a:rPr>
+                        <a:t>47</a:t>
+                      </a:r>
+                    </a:p>
+                  </a:txBody>
+                  <a:tcPr marL="64008" marR="54864" marT="27432" marB="27432" anchor="ctr">
+                    <a:solidFill>
+                      <a:srgbClr val="F2F5F9"/>
+                    </a:solidFill>
+                  </a:tcPr>
+                </a:tc>
+              </a:tr>
+              <a:tr h="384048">
+                <a:tc>
+                  <a:txBody>
+                    <a:bodyPr wrap="square"/>
+                    <a:lstStyle/>
+                    <a:p>
+                      <a:pPr algn="ctr"/>
+                      <a:r>
+                        <a:rPr sz="930" b="1">
+                          <a:solidFill>
+                            <a:srgbClr val="0E1726"/>
+                          </a:solidFill>
+                          <a:latin typeface="Inter"/>
+                        </a:rPr>
+                        <a:t>5</a:t>
+                      </a:r>
+                    </a:p>
+                  </a:txBody>
+                  <a:tcPr marL="64008" marR="54864" marT="27432" marB="27432" anchor="ctr">
+                    <a:solidFill>
+                      <a:srgbClr val="FFFFFF"/>
+                    </a:solidFill>
+                  </a:tcPr>
+                </a:tc>
+                <a:tc>
+                  <a:txBody>
+                    <a:bodyPr wrap="square"/>
+                    <a:lstStyle/>
+                    <a:p>
+                      <a:pPr algn="l"/>
+                      <a:r>
+                        <a:rPr sz="930" b="0">
+                          <a:solidFill>
+                            <a:srgbClr val="0E1726"/>
+                          </a:solidFill>
+                          <a:latin typeface="Inter"/>
+                        </a:rPr>
+                        <a:t>sbermarket-globalnye-trendy-2026</a:t>
+                      </a:r>
+                    </a:p>
+                  </a:txBody>
+                  <a:tcPr marL="64008" marR="54864" marT="27432" marB="27432" anchor="ctr">
+                    <a:solidFill>
+                      <a:srgbClr val="FFFFFF"/>
+                    </a:solidFill>
+                  </a:tcPr>
+                </a:tc>
+                <a:tc>
+                  <a:txBody>
+                    <a:bodyPr wrap="square"/>
+                    <a:lstStyle/>
+                    <a:p>
+                      <a:pPr algn="l"/>
+                      <a:r>
+                        <a:rPr sz="930" b="0">
+                          <a:solidFill>
+                            <a:srgbClr val="0E1726"/>
+                          </a:solidFill>
+                          <a:latin typeface="Inter"/>
+                        </a:rPr>
+                        <a:t>Макротренды ритейла и ИИ: 23% ищут с ИИ, 73% используют ИИ в быту</a:t>
+                      </a:r>
+                    </a:p>
+                  </a:txBody>
+                  <a:tcPr marL="64008" marR="54864" marT="27432" marB="27432" anchor="ctr">
+                    <a:solidFill>
+                      <a:srgbClr val="FFFFFF"/>
+                    </a:solidFill>
+                  </a:tcPr>
+                </a:tc>
+                <a:tc>
+                  <a:txBody>
+                    <a:bodyPr wrap="square"/>
+                    <a:lstStyle/>
+                    <a:p>
+                      <a:pPr algn="ctr"/>
+                      <a:r>
+                        <a:rPr sz="930" b="0">
+                          <a:solidFill>
+                            <a:srgbClr val="0E1726"/>
+                          </a:solidFill>
+                          <a:latin typeface="Inter"/>
+                        </a:rPr>
+                        <a:t>36</a:t>
+                      </a:r>
+                    </a:p>
+                  </a:txBody>
+                  <a:tcPr marL="64008" marR="54864" marT="27432" marB="27432" anchor="ctr">
+                    <a:solidFill>
+                      <a:srgbClr val="FFFFFF"/>
+                    </a:solidFill>
+                  </a:tcPr>
+                </a:tc>
+              </a:tr>
+              <a:tr h="384048">
+                <a:tc>
+                  <a:txBody>
+                    <a:bodyPr wrap="square"/>
+                    <a:lstStyle/>
+                    <a:p>
+                      <a:pPr algn="ctr"/>
+                      <a:r>
+                        <a:rPr sz="930" b="1">
+                          <a:solidFill>
+                            <a:srgbClr val="0E1726"/>
+                          </a:solidFill>
+                          <a:latin typeface="Inter"/>
+                        </a:rPr>
+                        <a:t>6</a:t>
+                      </a:r>
+                    </a:p>
+                  </a:txBody>
+                  <a:tcPr marL="64008" marR="54864" marT="27432" marB="27432" anchor="ctr">
+                    <a:solidFill>
+                      <a:srgbClr val="F2F5F9"/>
+                    </a:solidFill>
+                  </a:tcPr>
+                </a:tc>
+                <a:tc>
+                  <a:txBody>
+                    <a:bodyPr wrap="square"/>
+                    <a:lstStyle/>
+                    <a:p>
+                      <a:pPr algn="l"/>
+                      <a:r>
+                        <a:rPr sz="930" b="0">
+                          <a:solidFill>
+                            <a:srgbClr val="0E1726"/>
+                          </a:solidFill>
+                          <a:latin typeface="Inter"/>
+                        </a:rPr>
+                        <a:t>sbermarket-serebryanyy-vozrast-2026</a:t>
+                      </a:r>
+                    </a:p>
+                  </a:txBody>
+                  <a:tcPr marL="64008" marR="54864" marT="27432" marB="27432" anchor="ctr">
+                    <a:solidFill>
+                      <a:srgbClr val="F2F5F9"/>
+                    </a:solidFill>
+                  </a:tcPr>
+                </a:tc>
+                <a:tc>
+                  <a:txBody>
+                    <a:bodyPr wrap="square"/>
+                    <a:lstStyle/>
+                    <a:p>
+                      <a:pPr algn="l"/>
+                      <a:r>
+                        <a:rPr sz="930" b="0">
+                          <a:solidFill>
+                            <a:srgbClr val="0E1726"/>
+                          </a:solidFill>
+                          <a:latin typeface="Inter"/>
+                        </a:rPr>
+                        <a:t>Аудитория 55–75: пять сегментов 31/23/21/19/6, досуг, покупки</a:t>
+                      </a:r>
+                    </a:p>
+                  </a:txBody>
+                  <a:tcPr marL="64008" marR="54864" marT="27432" marB="27432" anchor="ctr">
+                    <a:solidFill>
+                      <a:srgbClr val="F2F5F9"/>
+                    </a:solidFill>
+                  </a:tcPr>
+                </a:tc>
+                <a:tc>
+                  <a:txBody>
+                    <a:bodyPr wrap="square"/>
+                    <a:lstStyle/>
+                    <a:p>
+                      <a:pPr algn="ctr"/>
+                      <a:r>
+                        <a:rPr sz="930" b="0">
+                          <a:solidFill>
+                            <a:srgbClr val="0E1726"/>
+                          </a:solidFill>
+                          <a:latin typeface="Inter"/>
+                        </a:rPr>
+                        <a:t>30</a:t>
+                      </a:r>
+                    </a:p>
+                  </a:txBody>
+                  <a:tcPr marL="64008" marR="54864" marT="27432" marB="27432" anchor="ctr">
+                    <a:solidFill>
+                      <a:srgbClr val="F2F5F9"/>
+                    </a:solidFill>
+                  </a:tcPr>
+                </a:tc>
+              </a:tr>
+              <a:tr h="384048">
+                <a:tc>
+                  <a:txBody>
+                    <a:bodyPr wrap="square"/>
+                    <a:lstStyle/>
+                    <a:p>
+                      <a:pPr algn="ctr"/>
+                      <a:r>
+                        <a:rPr sz="930" b="1">
+                          <a:solidFill>
+                            <a:srgbClr val="0E1726"/>
+                          </a:solidFill>
+                          <a:latin typeface="Inter"/>
+                        </a:rPr>
+                        <a:t>7</a:t>
+                      </a:r>
+                    </a:p>
+                  </a:txBody>
+                  <a:tcPr marL="64008" marR="54864" marT="27432" marB="27432" anchor="ctr">
+                    <a:solidFill>
+                      <a:srgbClr val="FFFFFF"/>
+                    </a:solidFill>
+                  </a:tcPr>
+                </a:tc>
+                <a:tc>
+                  <a:txBody>
+                    <a:bodyPr wrap="square"/>
+                    <a:lstStyle/>
+                    <a:p>
+                      <a:pPr algn="l"/>
+                      <a:r>
+                        <a:rPr sz="930" b="0">
+                          <a:solidFill>
+                            <a:srgbClr val="0E1726"/>
+                          </a:solidFill>
+                          <a:latin typeface="Inter"/>
+                        </a:rPr>
+                        <a:t>ekopsi-debaty-pro-pokoleniya</a:t>
+                      </a:r>
+                    </a:p>
+                  </a:txBody>
+                  <a:tcPr marL="64008" marR="54864" marT="27432" marB="27432" anchor="ctr">
+                    <a:solidFill>
+                      <a:srgbClr val="FFFFFF"/>
+                    </a:solidFill>
+                  </a:tcPr>
+                </a:tc>
+                <a:tc>
+                  <a:txBody>
+                    <a:bodyPr wrap="square"/>
+                    <a:lstStyle/>
+                    <a:p>
+                      <a:pPr algn="l"/>
+                      <a:r>
+                        <a:rPr sz="930" b="0">
+                          <a:solidFill>
+                            <a:srgbClr val="0E1726"/>
+                          </a:solidFill>
+                          <a:latin typeface="Inter"/>
+                        </a:rPr>
+                        <a:t>Дебаты про поколения, 1 млн респондентов 2011–2024: отличий поколений нет</a:t>
+                      </a:r>
+                    </a:p>
+                  </a:txBody>
+                  <a:tcPr marL="64008" marR="54864" marT="27432" marB="27432" anchor="ctr">
+                    <a:solidFill>
+                      <a:srgbClr val="FFFFFF"/>
+                    </a:solidFill>
+                  </a:tcPr>
+                </a:tc>
+                <a:tc>
+                  <a:txBody>
+                    <a:bodyPr wrap="square"/>
+                    <a:lstStyle/>
+                    <a:p>
+                      <a:pPr algn="ctr"/>
+                      <a:r>
+                        <a:rPr sz="930" b="0">
+                          <a:solidFill>
+                            <a:srgbClr val="0E1726"/>
+                          </a:solidFill>
+                          <a:latin typeface="Inter"/>
+                        </a:rPr>
+                        <a:t>21</a:t>
+                      </a:r>
+                    </a:p>
+                  </a:txBody>
+                  <a:tcPr marL="64008" marR="54864" marT="27432" marB="27432" anchor="ctr">
+                    <a:solidFill>
+                      <a:srgbClr val="FFFFFF"/>
+                    </a:solidFill>
+                  </a:tcPr>
+                </a:tc>
+              </a:tr>
+            </a:tbl>
+          </a:graphicData>
+        </a:graphic>
+      </p:graphicFrame>
+      <p:sp>
+        <p:nvSpPr>
+          <p:cNvPr id="11" name="TextBox 10"/>
+          <p:cNvSpPr txBox="1"/>
+          <p:nvPr/>
+        </p:nvSpPr>
+        <p:spPr>
+          <a:xfrm>
+            <a:off x="658368" y="4864608"/>
+            <a:ext cx="10881360" cy="274320"/>
+          </a:xfrm>
+          <a:prstGeom prst="rect">
+            <a:avLst/>
+          </a:prstGeom>
+          <a:noFill/>
+        </p:spPr>
+        <p:txBody>
+          <a:bodyPr wrap="square" lIns="0" rIns="0" tIns="0" bIns="0" anchor="t">
+            <a:spAutoFit/>
+          </a:bodyPr>
+          <a:lstStyle/>
+          <a:p>
+            <a:pPr algn="l"/>
+            <a:r>
+              <a:rPr sz="950" b="0" i="1">
+                <a:solidFill>
+                  <a:srgbClr val="606B7A"/>
+                </a:solidFill>
+                <a:latin typeface="Inter"/>
+              </a:rPr>
+              <a:t>Всего 260 слайдов и 2758 строк машинного массива data/values.csv. Первоисточник — inkofood-2026, остальные шесть — для сопоставления.</a:t>
+            </a:r>
+          </a:p>
+        </p:txBody>
+      </p:sp>
+      <p:sp>
+        <p:nvSpPr>
+          <p:cNvPr id="12" name="Rounded Rectangle 11"/>
+          <p:cNvSpPr/>
+          <p:nvPr/>
+        </p:nvSpPr>
+        <p:spPr>
+          <a:xfrm>
+            <a:off x="658368" y="5230368"/>
+            <a:ext cx="5349240" cy="1051560"/>
+          </a:xfrm>
+          <a:prstGeom prst="roundRect">
+            <a:avLst/>
+          </a:prstGeom>
+          <a:solidFill>
+            <a:srgbClr val="F2F5F9"/>
+          </a:solidFill>
+          <a:ln>
+            <a:noFill/>
+          </a:ln>
+          <a:effectLst/>
+        </p:spPr>
+        <p:txBody>
+          <a:bodyPr rtlCol="0" anchor="ctr"/>
+          <a:lstStyle/>
+          <a:p>
+            <a:pPr algn="ctr"/>
+          </a:p>
+        </p:txBody>
+      </p:sp>
+      <p:sp>
+        <p:nvSpPr>
+          <p:cNvPr id="13" name="TextBox 12"/>
+          <p:cNvSpPr txBox="1"/>
+          <p:nvPr/>
+        </p:nvSpPr>
+        <p:spPr>
+          <a:xfrm>
+            <a:off x="896112" y="5340096"/>
+            <a:ext cx="4983480" cy="868680"/>
+          </a:xfrm>
+          <a:prstGeom prst="rect">
+            <a:avLst/>
+          </a:prstGeom>
+          <a:noFill/>
+        </p:spPr>
+        <p:txBody>
+          <a:bodyPr wrap="square" lIns="0" rIns="0" tIns="0" bIns="0" anchor="t">
+            <a:spAutoFit/>
+          </a:bodyPr>
+          <a:lstStyle/>
+          <a:p>
+            <a:pPr algn="l">
+              <a:lnSpc>
+                <a:spcPct val="118000"/>
+              </a:lnSpc>
+            </a:pPr>
+            <a:r>
+              <a:rPr sz="930" b="0" i="0">
+                <a:solidFill>
+                  <a:srgbClr val="0E1726"/>
+                </a:solidFill>
+                <a:latin typeface="Inter"/>
+              </a:rPr>
+              <a:t>Ещё источники: checks/checks.csv — 91 проверка с вердиктами; checks/archive/ — 78 проверок по первой итерации Гемини; plans/2026-10-25-G01-G03.md — планы добора 55+ и полевого теста.</a:t>
+            </a:r>
+          </a:p>
+        </p:txBody>
+      </p:sp>
+      <p:sp>
+        <p:nvSpPr>
+          <p:cNvPr id="14" name="Rounded Rectangle 13"/>
+          <p:cNvSpPr/>
+          <p:nvPr/>
+        </p:nvSpPr>
+        <p:spPr>
+          <a:xfrm>
+            <a:off x="6190488" y="5230368"/>
+            <a:ext cx="5349240" cy="1051560"/>
+          </a:xfrm>
+          <a:prstGeom prst="roundRect">
+            <a:avLst/>
+          </a:prstGeom>
+          <a:solidFill>
+            <a:srgbClr val="F2F5F9"/>
+          </a:solidFill>
+          <a:ln>
+            <a:noFill/>
+          </a:ln>
+          <a:effectLst/>
+        </p:spPr>
+        <p:txBody>
+          <a:bodyPr rtlCol="0" anchor="ctr"/>
+          <a:lstStyle/>
+          <a:p>
+            <a:pPr algn="ctr"/>
+          </a:p>
+        </p:txBody>
+      </p:sp>
+      <p:sp>
+        <p:nvSpPr>
+          <p:cNvPr id="15" name="TextBox 14"/>
+          <p:cNvSpPr txBox="1"/>
+          <p:nvPr/>
+        </p:nvSpPr>
+        <p:spPr>
+          <a:xfrm>
+            <a:off x="6428232" y="5340096"/>
+            <a:ext cx="4983480" cy="868680"/>
+          </a:xfrm>
+          <a:prstGeom prst="rect">
+            <a:avLst/>
+          </a:prstGeom>
+          <a:noFill/>
+        </p:spPr>
+        <p:txBody>
+          <a:bodyPr wrap="square" lIns="0" rIns="0" tIns="0" bIns="0" anchor="t">
+            <a:spAutoFit/>
+          </a:bodyPr>
+          <a:lstStyle/>
+          <a:p>
+            <a:pPr algn="l">
+              <a:lnSpc>
+                <a:spcPct val="118000"/>
+              </a:lnSpc>
+            </a:pPr>
+            <a:r>
+              <a:rPr sz="930" b="0" i="0">
+                <a:solidFill>
+                  <a:srgbClr val="606B7A"/>
+                </a:solidFill>
+                <a:latin typeface="Inter"/>
+              </a:rPr>
+              <a:t>Репозиторий: github.com/Osmosy/Consumer-research. Слайды каждой колоды — decks/&lt;папка&gt;/, полный текст — &lt;папка&gt;.md, машинный массив — data/values.csv.</a:t>
+            </a:r>
+          </a:p>
+        </p:txBody>
+      </p:sp>
+    </p:spTree>
+  </p:cSld>
+  <p:clrMapOvr>
+    <a:masterClrMapping/>
+  </p:clrMapOvr>
+</p:sld>
+</file>
+
+<file path=ppt/slides/slide28.xml><?xml version="1.0" encoding="utf-8"?>
+<p:sld xmlns:a="http://schemas.openxmlformats.org/drawingml/2006/main" xmlns:p="http://schemas.openxmlformats.org/presentationml/2006/main" xmlns:r="http://schemas.openxmlformats.org/officeDocument/2006/relationships">
+  <p:cSld>
+    <p:spTree>
+      <p:nvGrpSpPr>
+        <p:cNvPr id="1" name=""/>
+        <p:cNvGrpSpPr/>
+        <p:nvPr/>
+      </p:nvGrpSpPr>
+      <p:grpSpPr/>
+      <p:sp>
+        <p:nvSpPr>
+          <p:cNvPr id="2" name="Rectangle 1"/>
+          <p:cNvSpPr/>
+          <p:nvPr/>
+        </p:nvSpPr>
+        <p:spPr>
+          <a:xfrm>
+            <a:off x="0" y="0"/>
+            <a:ext cx="12191695" cy="6858000"/>
+          </a:xfrm>
+          <a:prstGeom prst="rect">
+            <a:avLst/>
+          </a:prstGeom>
+          <a:solidFill>
+            <a:srgbClr val="FFFFFF"/>
+          </a:solidFill>
+          <a:ln>
+            <a:noFill/>
+          </a:ln>
+          <a:effectLst/>
+        </p:spPr>
+        <p:txBody>
+          <a:bodyPr rtlCol="0" anchor="ctr"/>
+          <a:lstStyle/>
+          <a:p>
+            <a:pPr algn="ctr"/>
+          </a:p>
+        </p:txBody>
+      </p:sp>
+      <p:sp>
+        <p:nvSpPr>
+          <p:cNvPr id="3" name="Rectangle 2"/>
+          <p:cNvSpPr/>
+          <p:nvPr/>
+        </p:nvSpPr>
+        <p:spPr>
+          <a:xfrm>
+            <a:off x="0" y="0"/>
+            <a:ext cx="146304" cy="6858000"/>
+          </a:xfrm>
+          <a:prstGeom prst="rect">
+            <a:avLst/>
+          </a:prstGeom>
+          <a:solidFill>
+            <a:srgbClr val="1E8A5F"/>
+          </a:solidFill>
+          <a:ln>
+            <a:noFill/>
+          </a:ln>
+          <a:effectLst/>
+        </p:spPr>
+        <p:txBody>
+          <a:bodyPr rtlCol="0" anchor="ctr"/>
+          <a:lstStyle/>
+          <a:p>
+            <a:pPr algn="ctr"/>
+          </a:p>
+        </p:txBody>
+      </p:sp>
+      <p:sp>
+        <p:nvSpPr>
+          <p:cNvPr id="4" name="TextBox 3"/>
+          <p:cNvSpPr txBox="1"/>
+          <p:nvPr/>
+        </p:nvSpPr>
+        <p:spPr>
+          <a:xfrm>
+            <a:off x="868680" y="960120"/>
+            <a:ext cx="9875520" cy="274320"/>
+          </a:xfrm>
+          <a:prstGeom prst="rect">
+            <a:avLst/>
+          </a:prstGeom>
+          <a:noFill/>
+        </p:spPr>
+        <p:txBody>
+          <a:bodyPr wrap="square" lIns="0" rIns="0" tIns="0" bIns="0" anchor="t">
+            <a:spAutoFit/>
+          </a:bodyPr>
+          <a:lstStyle/>
+          <a:p>
+            <a:pPr algn="l"/>
+            <a:r>
+              <a:rPr sz="1050" b="1" i="0">
+                <a:solidFill>
+                  <a:srgbClr val="606B7A"/>
+                </a:solidFill>
+                <a:latin typeface="Inter"/>
+              </a:rPr>
+              <a:t>ЧТО ДАЛЬШЕ</a:t>
+            </a:r>
+          </a:p>
+        </p:txBody>
+      </p:sp>
+      <p:sp>
+        <p:nvSpPr>
+          <p:cNvPr id="5" name="TextBox 4"/>
+          <p:cNvSpPr txBox="1"/>
+          <p:nvPr/>
+        </p:nvSpPr>
+        <p:spPr>
+          <a:xfrm>
+            <a:off x="868680" y="1325880"/>
+            <a:ext cx="10424160" cy="868680"/>
+          </a:xfrm>
+          <a:prstGeom prst="rect">
+            <a:avLst/>
+          </a:prstGeom>
+          <a:noFill/>
+        </p:spPr>
+        <p:txBody>
+          <a:bodyPr wrap="square" lIns="0" rIns="0" tIns="0" bIns="0" anchor="t">
+            <a:spAutoFit/>
+          </a:bodyPr>
+          <a:lstStyle/>
+          <a:p>
+            <a:pPr algn="l">
+              <a:lnSpc>
+                <a:spcPct val="120000"/>
+              </a:lnSpc>
+            </a:pPr>
+            <a:r>
+              <a:rPr sz="3000" b="1" i="0">
+                <a:solidFill>
+                  <a:srgbClr val="0E1726"/>
+                </a:solidFill>
+                <a:latin typeface="Inter"/>
+              </a:rPr>
+              <a:t>Каркас — Клод, детали — Гемини,
+сценарии и рынок 2025 — Грок</a:t>
+            </a:r>
+          </a:p>
+        </p:txBody>
+      </p:sp>
+      <p:sp>
+        <p:nvSpPr>
+          <p:cNvPr id="6" name="Rectangle 5"/>
+          <p:cNvSpPr/>
+          <p:nvPr/>
+        </p:nvSpPr>
+        <p:spPr>
+          <a:xfrm>
+            <a:off x="868680" y="2743200"/>
+            <a:ext cx="1828800" cy="45720"/>
+          </a:xfrm>
+          <a:prstGeom prst="rect">
+            <a:avLst/>
+          </a:prstGeom>
+          <a:solidFill>
+            <a:srgbClr val="1E8A5F"/>
+          </a:solidFill>
+          <a:ln>
+            <a:noFill/>
+          </a:ln>
+          <a:effectLst/>
+        </p:spPr>
+        <p:txBody>
+          <a:bodyPr rtlCol="0" anchor="ctr"/>
+          <a:lstStyle/>
+          <a:p>
+            <a:pPr algn="ctr"/>
+          </a:p>
+        </p:txBody>
+      </p:sp>
+      <p:sp>
+        <p:nvSpPr>
+          <p:cNvPr id="7" name="TextBox 6"/>
+          <p:cNvSpPr txBox="1"/>
+          <p:nvPr/>
+        </p:nvSpPr>
+        <p:spPr>
+          <a:xfrm>
+            <a:off x="868680" y="3035808"/>
+            <a:ext cx="10332720" cy="1737360"/>
+          </a:xfrm>
+          <a:prstGeom prst="rect">
+            <a:avLst/>
+          </a:prstGeom>
+          <a:noFill/>
+        </p:spPr>
+        <p:txBody>
+          <a:bodyPr wrap="square" lIns="0" rIns="0" tIns="0" bIns="0">
+            <a:noAutofit/>
+          </a:bodyPr>
+          <a:lstStyle/>
+          <a:p>
+            <a:pPr marL="237744" indent="-237744">
+              <a:lnSpc>
+                <a:spcPct val="122000"/>
+              </a:lnSpc>
+              <a:spcAft>
+                <a:spcPts val="1296"/>
+              </a:spcAft>
+            </a:pPr>
+            <a:r>
+              <a:rPr sz="1200">
+                <a:solidFill>
+                  <a:srgbClr val="1E8A5F"/>
+                </a:solidFill>
+                <a:latin typeface="Inter"/>
+              </a:rPr>
+              <a:t>▪  </a:t>
+            </a:r>
+            <a:r>
+              <a:rPr sz="1200" b="1">
+                <a:solidFill>
+                  <a:srgbClr val="0E1726"/>
+                </a:solidFill>
+                <a:latin typeface="Inter"/>
+              </a:rPr>
+              <a:t>Каркас: работа Agent 1.</a:t>
+            </a:r>
+            <a:r>
+              <a:rPr sz="1200">
+                <a:solidFill>
+                  <a:srgbClr val="0E1726"/>
+                </a:solidFill>
+                <a:latin typeface="Inter"/>
+              </a:rPr>
+              <a:t> </a:t>
+            </a:r>
+            <a:r>
+              <a:rPr sz="1200">
+                <a:solidFill>
+                  <a:srgbClr val="0E1726"/>
+                </a:solidFill>
+                <a:latin typeface="Inter"/>
+              </a:rPr>
+              <a:t>Она единственная, где каждое утверждение имеет слайд, расчёт помечен, а сомнение оформлено как ограничение. На неё можно опереться в решениях.</a:t>
+            </a:r>
+          </a:p>
+          <a:p>
+            <a:pPr marL="237744" indent="-237744">
+              <a:lnSpc>
+                <a:spcPct val="122000"/>
+              </a:lnSpc>
+              <a:spcAft>
+                <a:spcPts val="1296"/>
+              </a:spcAft>
+            </a:pPr>
+            <a:r>
+              <a:rPr sz="1200">
+                <a:solidFill>
+                  <a:srgbClr val="1E8A5F"/>
+                </a:solidFill>
+                <a:latin typeface="Inter"/>
+              </a:rPr>
+              <a:t>▪  </a:t>
+            </a:r>
+            <a:r>
+              <a:rPr sz="1200" b="1">
+                <a:solidFill>
+                  <a:srgbClr val="0E1726"/>
+                </a:solidFill>
+                <a:latin typeface="Inter"/>
+              </a:rPr>
+              <a:t>Детали: работа Agent 3, только подтверждённое.</a:t>
+            </a:r>
+            <a:r>
+              <a:rPr sz="1200">
+                <a:solidFill>
+                  <a:srgbClr val="0E1726"/>
+                </a:solidFill>
+                <a:latin typeface="Inter"/>
+              </a:rPr>
+              <a:t> </a:t>
+            </a:r>
+            <a:r>
+              <a:rPr sz="1200">
+                <a:solidFill>
+                  <a:srgbClr val="0E1726"/>
+                </a:solidFill>
+                <a:latin typeface="Inter"/>
+              </a:rPr>
+              <a:t>Нарезка, сервелат, механика премиума, сегменты 55–75 и формула белка. Всё остальное — после сверки.</a:t>
+            </a:r>
+          </a:p>
+          <a:p>
+            <a:pPr marL="237744" indent="-237744">
+              <a:lnSpc>
+                <a:spcPct val="122000"/>
+              </a:lnSpc>
+            </a:pPr>
+            <a:r>
+              <a:rPr sz="1200">
+                <a:solidFill>
+                  <a:srgbClr val="1E8A5F"/>
+                </a:solidFill>
+                <a:latin typeface="Inter"/>
+              </a:rPr>
+              <a:t>▪  </a:t>
+            </a:r>
+            <a:r>
+              <a:rPr sz="1200" b="1">
+                <a:solidFill>
+                  <a:srgbClr val="0E1726"/>
+                </a:solidFill>
+                <a:latin typeface="Inter"/>
+              </a:rPr>
+              <a:t>Сценарии и второй период рынка: Agent 2.</a:t>
+            </a:r>
+            <a:r>
+              <a:rPr sz="1200">
+                <a:solidFill>
+                  <a:srgbClr val="0E1726"/>
+                </a:solidFill>
+                <a:latin typeface="Inter"/>
+              </a:rPr>
+              <a:t> </a:t>
+            </a:r>
+            <a:r>
+              <a:rPr sz="1200">
+                <a:solidFill>
+                  <a:srgbClr val="0E1726"/>
+                </a:solidFill>
+                <a:latin typeface="Inter"/>
+              </a:rPr>
+              <a:t>План против импульса, «вечер наедине с собой» и мясо +9,9% за 2025.</a:t>
+            </a:r>
+          </a:p>
+        </p:txBody>
+      </p:sp>
+      <p:sp>
+        <p:nvSpPr>
+          <p:cNvPr id="8" name="Rounded Rectangle 7"/>
+          <p:cNvSpPr/>
+          <p:nvPr/>
+        </p:nvSpPr>
+        <p:spPr>
+          <a:xfrm>
+            <a:off x="868680" y="4983480"/>
+            <a:ext cx="10424160" cy="868680"/>
+          </a:xfrm>
+          <a:prstGeom prst="roundRect">
+            <a:avLst/>
+          </a:prstGeom>
+          <a:solidFill>
+            <a:srgbClr val="F2F5F9"/>
+          </a:solidFill>
+          <a:ln>
+            <a:noFill/>
+          </a:ln>
+          <a:effectLst/>
+        </p:spPr>
+        <p:txBody>
+          <a:bodyPr rtlCol="0" anchor="ctr"/>
+          <a:lstStyle/>
+          <a:p>
+            <a:pPr algn="ctr"/>
+          </a:p>
+        </p:txBody>
+      </p:sp>
+      <p:sp>
+        <p:nvSpPr>
+          <p:cNvPr id="9" name="Rectangle 8"/>
+          <p:cNvSpPr/>
+          <p:nvPr/>
+        </p:nvSpPr>
+        <p:spPr>
+          <a:xfrm>
+            <a:off x="868680" y="4983480"/>
+            <a:ext cx="68580" cy="868680"/>
+          </a:xfrm>
+          <a:prstGeom prst="rect">
+            <a:avLst/>
+          </a:prstGeom>
+          <a:solidFill>
+            <a:srgbClr val="1E8A5F"/>
+          </a:solidFill>
+          <a:ln>
+            <a:noFill/>
+          </a:ln>
+          <a:effectLst/>
+        </p:spPr>
+        <p:txBody>
+          <a:bodyPr rtlCol="0" anchor="ctr"/>
+          <a:lstStyle/>
+          <a:p>
+            <a:pPr algn="ctr"/>
+          </a:p>
+        </p:txBody>
+      </p:sp>
+      <p:sp>
+        <p:nvSpPr>
+          <p:cNvPr id="10" name="TextBox 9"/>
+          <p:cNvSpPr txBox="1"/>
+          <p:nvPr/>
+        </p:nvSpPr>
+        <p:spPr>
+          <a:xfrm>
+            <a:off x="1097280" y="5102352"/>
+            <a:ext cx="10058400" cy="713232"/>
+          </a:xfrm>
+          <a:prstGeom prst="rect">
+            <a:avLst/>
+          </a:prstGeom>
+          <a:noFill/>
+        </p:spPr>
+        <p:txBody>
+          <a:bodyPr wrap="square" lIns="0" rIns="0" tIns="0" bIns="0" anchor="t">
+            <a:spAutoFit/>
+          </a:bodyPr>
+          <a:lstStyle/>
+          <a:p>
+            <a:pPr algn="l">
+              <a:lnSpc>
+                <a:spcPct val="120000"/>
+              </a:lnSpc>
+            </a:pPr>
+            <a:r>
+              <a:rPr sz="1100" b="0" i="0">
+                <a:solidFill>
+                  <a:srgbClr val="0E1726"/>
+                </a:solidFill>
+                <a:latin typeface="Inter"/>
+              </a:rPr>
+              <a:t>Расхождения по рынку и демографии решены в пользу колоды. Расхождения по стратегии остаются выбором: данные позволяют взвесить ставки, но не отменяют решения. Следующий шаг — заказ волны 55+ и полевого теста по плану.</a:t>
+            </a:r>
+          </a:p>
+        </p:txBody>
+      </p:sp>
+      <p:sp>
+        <p:nvSpPr>
+          <p:cNvPr id="11" name="Rectangle 10"/>
+          <p:cNvSpPr/>
+          <p:nvPr/>
+        </p:nvSpPr>
+        <p:spPr>
+          <a:xfrm>
+            <a:off x="658368" y="6419088"/>
+            <a:ext cx="10881360" cy="10972"/>
+          </a:xfrm>
+          <a:prstGeom prst="rect">
+            <a:avLst/>
+          </a:prstGeom>
+          <a:solidFill>
+            <a:srgbClr val="D5DCE5"/>
+          </a:solidFill>
+          <a:ln>
+            <a:noFill/>
+          </a:ln>
+          <a:effectLst/>
+        </p:spPr>
+        <p:txBody>
+          <a:bodyPr rtlCol="0" anchor="ctr"/>
+          <a:lstStyle/>
+          <a:p>
+            <a:pPr algn="ctr"/>
+          </a:p>
+        </p:txBody>
+      </p:sp>
+      <p:sp>
+        <p:nvSpPr>
+          <p:cNvPr id="12" name="TextBox 11"/>
+          <p:cNvSpPr txBox="1"/>
+          <p:nvPr/>
+        </p:nvSpPr>
+        <p:spPr>
+          <a:xfrm>
+            <a:off x="658368" y="6483096"/>
+            <a:ext cx="9692640" cy="219456"/>
+          </a:xfrm>
+          <a:prstGeom prst="rect">
+            <a:avLst/>
+          </a:prstGeom>
+          <a:noFill/>
+        </p:spPr>
+        <p:txBody>
+          <a:bodyPr wrap="square" lIns="0" rIns="0" tIns="0" bIns="0" anchor="t">
+            <a:spAutoFit/>
+          </a:bodyPr>
+          <a:lstStyle/>
+          <a:p>
+            <a:pPr algn="l"/>
+            <a:r>
+              <a:rPr sz="850" b="0" i="0">
+                <a:solidFill>
+                  <a:srgbClr val="939FAF"/>
+                </a:solidFill>
+                <a:latin typeface="Inter"/>
+              </a:rPr>
+              <a:t>Сводный разбор работ Agent 1–3 · колода inkofood-2026 · Consumer-research</a:t>
+            </a:r>
+          </a:p>
+        </p:txBody>
+      </p:sp>
+      <p:sp>
+        <p:nvSpPr>
+          <p:cNvPr id="13" name="TextBox 12"/>
+          <p:cNvSpPr txBox="1"/>
+          <p:nvPr/>
+        </p:nvSpPr>
+        <p:spPr>
+          <a:xfrm>
+            <a:off x="11064240" y="6483096"/>
+            <a:ext cx="475488" cy="219456"/>
+          </a:xfrm>
+          <a:prstGeom prst="rect">
+            <a:avLst/>
+          </a:prstGeom>
+          <a:noFill/>
+        </p:spPr>
+        <p:txBody>
+          <a:bodyPr wrap="square" lIns="0" rIns="0" tIns="0" bIns="0" anchor="t">
+            <a:spAutoFit/>
+          </a:bodyPr>
+          <a:lstStyle/>
+          <a:p>
+            <a:pPr algn="r"/>
+            <a:r>
+              <a:rPr sz="850" b="0" i="0">
+                <a:solidFill>
+                  <a:srgbClr val="939FAF"/>
+                </a:solidFill>
+                <a:latin typeface="Inter"/>
+              </a:rPr>
+              <a:t>28</a:t>
             </a:r>
           </a:p>
         </p:txBody>
@@ -25026,7 +27579,7 @@
             <a:avLst/>
           </a:prstGeom>
           <a:solidFill>
-            <a:srgbClr val="0E1726"/>
+            <a:srgbClr val="FFFFFF"/>
           </a:solidFill>
           <a:ln>
             <a:noFill/>
@@ -25132,7 +27685,7 @@
             <a:r>
               <a:rPr sz="3800" b="1" i="0">
                 <a:solidFill>
-                  <a:srgbClr val="FFFFFF"/>
+                  <a:srgbClr val="0E1726"/>
                 </a:solidFill>
                 <a:latin typeface="Inter"/>
               </a:rPr>
@@ -25171,11 +27724,11 @@
             <a:r>
               <a:rPr sz="1400" b="0" i="0">
                 <a:solidFill>
-                  <a:srgbClr val="C6CFDB"/>
-                </a:solidFill>
-                <a:latin typeface="Inter"/>
-              </a:rPr>
-              <a:t>Десять тезисов, которые воспроизвели все трое</a:t>
+                  <a:srgbClr val="606B7A"/>
+                </a:solidFill>
+                <a:latin typeface="Inter"/>
+              </a:rPr>
+              <a:t>Десять тезисов ядра колоды и кто из троих их покрыл</a:t>
             </a:r>
           </a:p>
         </p:txBody>
@@ -25210,11 +27763,11 @@
             <a:r>
               <a:rPr sz="1150" b="0" i="0">
                 <a:solidFill>
-                  <a:srgbClr val="8F9DB2"/>
-                </a:solidFill>
-                <a:latin typeface="Inter"/>
-              </a:rPr>
-              <a:t>Совпадает не только вывод, но и числа: 12 показателей названы всеми тремя и сходятся с колодой.</a:t>
+                  <a:srgbClr val="606B7A"/>
+                </a:solidFill>
+                <a:latin typeface="Inter"/>
+              </a:rPr>
+              <a:t>Совпадает не только вывод, но и числа: шесть показателей у всех трёх совпадают точно, ещё два — в округлении. Построчная матрица — на слайде 08.</a:t>
             </a:r>
           </a:p>
         </p:txBody>
@@ -25234,7 +27787,7 @@
             <a:avLst/>
           </a:prstGeom>
           <a:solidFill>
-            <a:srgbClr val="333F50"/>
+            <a:srgbClr val="D5DCE5"/>
           </a:solidFill>
           <a:ln>
             <a:noFill/>
@@ -29001,7 +31554,7 @@
             <a:avLst/>
           </a:prstGeom>
           <a:solidFill>
-            <a:srgbClr val="0E1726"/>
+            <a:srgbClr val="FFFFFF"/>
           </a:solidFill>
           <a:ln>
             <a:noFill/>
@@ -29107,7 +31660,7 @@
             <a:r>
               <a:rPr sz="3800" b="1" i="0">
                 <a:solidFill>
-                  <a:srgbClr val="FFFFFF"/>
+                  <a:srgbClr val="0E1726"/>
                 </a:solidFill>
                 <a:latin typeface="Inter"/>
               </a:rPr>
@@ -29146,7 +31699,7 @@
             <a:r>
               <a:rPr sz="1400" b="0" i="0">
                 <a:solidFill>
-                  <a:srgbClr val="C6CFDB"/>
+                  <a:srgbClr val="606B7A"/>
                 </a:solidFill>
                 <a:latin typeface="Inter"/>
               </a:rPr>
@@ -29185,7 +31738,7 @@
             <a:r>
               <a:rPr sz="1150" b="0" i="0">
                 <a:solidFill>
-                  <a:srgbClr val="8F9DB2"/>
+                  <a:srgbClr val="606B7A"/>
                 </a:solidFill>
                 <a:latin typeface="Inter"/>
               </a:rPr>
@@ -29209,7 +31762,7 @@
             <a:avLst/>
           </a:prstGeom>
           <a:solidFill>
-            <a:srgbClr val="333F50"/>
+            <a:srgbClr val="D5DCE5"/>
           </a:solidFill>
           <a:ln>
             <a:noFill/>
